--- a/Abu-rabia_Heba_2_support_032026.pptx
+++ b/Abu-rabia_Heba_2_support_032026.pptx
@@ -4,6 +4,9 @@
   <p:sldMasterIdLst>
     <p:sldMasterId id="2147483648" r:id="rId1"/>
   </p:sldMasterIdLst>
+  <p:notesMasterIdLst>
+    <p:notesMasterId r:id="rId19"/>
+  </p:notesMasterIdLst>
   <p:sldIdLst>
     <p:sldId id="256" r:id="rId2"/>
     <p:sldId id="257" r:id="rId3"/>
@@ -23,10 +26,7 @@
     <p:sldId id="271" r:id="rId17"/>
     <p:sldId id="272" r:id="rId18"/>
   </p:sldIdLst>
-  <p:notesMasterIdLst>
-    <p:notesMasterId r:id="rId19"/>
-  </p:notesMasterIdLst>
-  <p:sldSz cx="9144000" cy="5143500"/>
+  <p:sldSz cx="9144000" cy="5143500" type="screen16x9"/>
   <p:notesSz cx="5143500" cy="9144000"/>
   <p:defaultTextStyle>
     <a:lvl1pPr marL="0" algn="l" defTabSz="914400" rtl="0" eaLnBrk="1" latinLnBrk="0" hangingPunct="1">
@@ -120,6 +120,11 @@
       </a:defRPr>
     </a:lvl9pPr>
   </p:defaultTextStyle>
+  <p:extLst>
+    <p:ext uri="{EFAFB233-063F-42B5-8137-9DF3F51BA10A}">
+      <p15:sldGuideLst xmlns:p15="http://schemas.microsoft.com/office/powerpoint/2012/main"/>
+    </p:ext>
+  </p:extLst>
 </p:presentation>
 </file>
 
@@ -145,234 +150,10 @@
           <a:chExt cx="0" cy="0"/>
         </a:xfrm>
       </p:grpSpPr>
-      <p:sp>
-        <p:nvSpPr>
-          <p:cNvPr id="2" name="Header Placeholder 1"/>
-          <p:cNvSpPr>
-            <a:spLocks noGrp="1"/>
-          </p:cNvSpPr>
-          <p:nvPr>
-            <p:ph type="hdr" sz="quarter"/>
-          </p:nvPr>
-        </p:nvSpPr>
-        <p:spPr>
-          <a:xfrm>
-            <a:off x="0" y="0"/>
-            <a:ext cx="2971800" cy="458788"/>
-          </a:xfrm>
-          <a:prstGeom prst="rect">
-            <a:avLst/>
-          </a:prstGeom>
-        </p:spPr>
-        <p:txBody>
-          <a:bodyPr vert="horz" lIns="91440" tIns="45720" rIns="91440" bIns="45720" rtlCol="0"/>
-          <a:lstStyle>
-            <a:lvl1pPr algn="l">
-              <a:defRPr sz="1200"/>
-            </a:lvl1pPr>
-          </a:lstStyle>
-          <a:p>
-            <a:endParaRPr lang="en-US"/>
-          </a:p>
-        </p:txBody>
-      </p:sp>
-      <p:sp>
-        <p:nvSpPr>
-          <p:cNvPr id="3" name="Date Placeholder 2"/>
-          <p:cNvSpPr>
-            <a:spLocks noGrp="1"/>
-          </p:cNvSpPr>
-          <p:nvPr>
-            <p:ph type="dt" idx="1"/>
-          </p:nvPr>
-        </p:nvSpPr>
-        <p:spPr>
-          <a:xfrm>
-            <a:off x="3884613" y="0"/>
-            <a:ext cx="2971800" cy="458788"/>
-          </a:xfrm>
-          <a:prstGeom prst="rect">
-            <a:avLst/>
-          </a:prstGeom>
-        </p:spPr>
-        <p:txBody>
-          <a:bodyPr vert="horz" lIns="91440" tIns="45720" rIns="91440" bIns="45720" rtlCol="0"/>
-          <a:lstStyle>
-            <a:lvl1pPr algn="r">
-              <a:defRPr sz="1200"/>
-            </a:lvl1pPr>
-          </a:lstStyle>
-          <a:p>
-            <a:fld id="{5282F153-3F37-0F45-9E97-73ACFA13230C}" type="datetimeFigureOut">
-              <a:rPr lang="en-US"/>
-              <a:t>7/23/19</a:t>
-            </a:fld>
-            <a:endParaRPr lang="en-US"/>
-          </a:p>
-        </p:txBody>
-      </p:sp>
-      <p:sp>
-        <p:nvSpPr>
-          <p:cNvPr id="4" name="Slide Image Placeholder 3"/>
-          <p:cNvSpPr>
-            <a:spLocks noGrp="1" noRot="1" noChangeAspect="1"/>
-          </p:cNvSpPr>
-          <p:nvPr>
-            <p:ph type="sldImg" idx="2"/>
-          </p:nvPr>
-        </p:nvSpPr>
-        <p:spPr>
-          <a:xfrm>
-            <a:off x="685800" y="1143000"/>
-            <a:ext cx="5486400" cy="3086100"/>
-          </a:xfrm>
-          <a:prstGeom prst="rect">
-            <a:avLst/>
-          </a:prstGeom>
-          <a:noFill/>
-          <a:ln w="12700">
-            <a:solidFill>
-              <a:prstClr val="black"/>
-            </a:solidFill>
-          </a:ln>
-        </p:spPr>
-        <p:txBody>
-          <a:bodyPr vert="horz" lIns="91440" tIns="45720" rIns="91440" bIns="45720" rtlCol="0" anchor="ctr"/>
-          <a:lstStyle/>
-          <a:p>
-            <a:endParaRPr lang="en-US"/>
-          </a:p>
-        </p:txBody>
-      </p:sp>
-      <p:sp>
-        <p:nvSpPr>
-          <p:cNvPr id="5" name="Notes Placeholder 4"/>
-          <p:cNvSpPr>
-            <a:spLocks noGrp="1"/>
-          </p:cNvSpPr>
-          <p:nvPr>
-            <p:ph type="body" sz="quarter" idx="3"/>
-          </p:nvPr>
-        </p:nvSpPr>
-        <p:spPr>
-          <a:xfrm>
-            <a:off x="685800" y="4400550"/>
-            <a:ext cx="5486400" cy="3600450"/>
-          </a:xfrm>
-          <a:prstGeom prst="rect">
-            <a:avLst/>
-          </a:prstGeom>
-        </p:spPr>
-        <p:txBody>
-          <a:bodyPr vert="horz" lIns="91440" tIns="45720" rIns="91440" bIns="45720" rtlCol="0"/>
-          <a:lstStyle/>
-          <a:p>
-            <a:pPr lvl="0"/>
-            <a:r>
-              <a:rPr lang="en-US"/>
-              <a:t>Click to edit Master text styles</a:t>
-            </a:r>
-          </a:p>
-          <a:p>
-            <a:pPr lvl="1"/>
-            <a:r>
-              <a:rPr lang="en-US"/>
-              <a:t>Second level</a:t>
-            </a:r>
-          </a:p>
-          <a:p>
-            <a:pPr lvl="2"/>
-            <a:r>
-              <a:rPr lang="en-US"/>
-              <a:t>Third level</a:t>
-            </a:r>
-          </a:p>
-          <a:p>
-            <a:pPr lvl="3"/>
-            <a:r>
-              <a:rPr lang="en-US"/>
-              <a:t>Fourth level</a:t>
-            </a:r>
-          </a:p>
-          <a:p>
-            <a:pPr lvl="4"/>
-            <a:r>
-              <a:rPr lang="en-US"/>
-              <a:t>Fifth level</a:t>
-            </a:r>
-          </a:p>
-        </p:txBody>
-      </p:sp>
-      <p:sp>
-        <p:nvSpPr>
-          <p:cNvPr id="6" name="Footer Placeholder 5"/>
-          <p:cNvSpPr>
-            <a:spLocks noGrp="1"/>
-          </p:cNvSpPr>
-          <p:nvPr>
-            <p:ph type="ftr" sz="quarter" idx="4"/>
-          </p:nvPr>
-        </p:nvSpPr>
-        <p:spPr>
-          <a:xfrm>
-            <a:off x="0" y="8685213"/>
-            <a:ext cx="2971800" cy="458787"/>
-          </a:xfrm>
-          <a:prstGeom prst="rect">
-            <a:avLst/>
-          </a:prstGeom>
-        </p:spPr>
-        <p:txBody>
-          <a:bodyPr vert="horz" lIns="91440" tIns="45720" rIns="91440" bIns="45720" rtlCol="0" anchor="b"/>
-          <a:lstStyle>
-            <a:lvl1pPr algn="l">
-              <a:defRPr sz="1200"/>
-            </a:lvl1pPr>
-          </a:lstStyle>
-          <a:p>
-            <a:endParaRPr lang="en-US"/>
-          </a:p>
-        </p:txBody>
-      </p:sp>
-      <p:sp>
-        <p:nvSpPr>
-          <p:cNvPr id="7" name="Slide Number Placeholder 6"/>
-          <p:cNvSpPr>
-            <a:spLocks noGrp="1"/>
-          </p:cNvSpPr>
-          <p:nvPr>
-            <p:ph type="sldNum" sz="quarter" idx="5"/>
-          </p:nvPr>
-        </p:nvSpPr>
-        <p:spPr>
-          <a:xfrm>
-            <a:off x="3884613" y="8685213"/>
-            <a:ext cx="2971800" cy="458787"/>
-          </a:xfrm>
-          <a:prstGeom prst="rect">
-            <a:avLst/>
-          </a:prstGeom>
-        </p:spPr>
-        <p:txBody>
-          <a:bodyPr vert="horz" lIns="91440" tIns="45720" rIns="91440" bIns="45720" rtlCol="0" anchor="b"/>
-          <a:lstStyle>
-            <a:lvl1pPr algn="r">
-              <a:defRPr sz="1200"/>
-            </a:lvl1pPr>
-          </a:lstStyle>
-          <a:p>
-            <a:fld id="{CE5E9CC1-C706-0F49-92D6-E571CC5EEA8F}" type="slidenum">
-              <a:rPr lang="en-US"/>
-              <a:t>‹#›</a:t>
-            </a:fld>
-            <a:endParaRPr lang="en-US"/>
-          </a:p>
-        </p:txBody>
-      </p:sp>
     </p:spTree>
     <p:extLst>
       <p:ext uri="{BB962C8B-B14F-4D97-AF65-F5344CB8AC3E}">
-        <p14:creationId xmlns:p14="http://schemas.microsoft.com/office/powerpoint/2010/main" val="1024086991"/>
+        <p14:creationId xmlns:p14="http://schemas.microsoft.com/office/powerpoint/2010/main" val="513083695"/>
       </p:ext>
     </p:extLst>
   </p:cSld>
@@ -516,10 +297,6 @@
           <a:bodyPr/>
           <a:lstStyle/>
           <a:p>
-            <a:r>
-              <a:rPr lang="en-US" dirty="0"/>
-              <a:t/>
-            </a:r>
             <a:endParaRPr lang="en-US" dirty="0"/>
           </a:p>
         </p:txBody>
@@ -604,10 +381,6 @@
           <a:bodyPr/>
           <a:lstStyle/>
           <a:p>
-            <a:r>
-              <a:rPr lang="en-US" dirty="0"/>
-              <a:t/>
-            </a:r>
             <a:endParaRPr lang="en-US" dirty="0"/>
           </a:p>
         </p:txBody>
@@ -692,10 +465,6 @@
           <a:bodyPr/>
           <a:lstStyle/>
           <a:p>
-            <a:r>
-              <a:rPr lang="en-US" dirty="0"/>
-              <a:t/>
-            </a:r>
             <a:endParaRPr lang="en-US" dirty="0"/>
           </a:p>
         </p:txBody>
@@ -780,10 +549,6 @@
           <a:bodyPr/>
           <a:lstStyle/>
           <a:p>
-            <a:r>
-              <a:rPr lang="en-US" dirty="0"/>
-              <a:t/>
-            </a:r>
             <a:endParaRPr lang="en-US" dirty="0"/>
           </a:p>
         </p:txBody>
@@ -868,10 +633,6 @@
           <a:bodyPr/>
           <a:lstStyle/>
           <a:p>
-            <a:r>
-              <a:rPr lang="en-US" dirty="0"/>
-              <a:t/>
-            </a:r>
             <a:endParaRPr lang="en-US" dirty="0"/>
           </a:p>
         </p:txBody>
@@ -956,10 +717,6 @@
           <a:bodyPr/>
           <a:lstStyle/>
           <a:p>
-            <a:r>
-              <a:rPr lang="en-US" dirty="0"/>
-              <a:t/>
-            </a:r>
             <a:endParaRPr lang="en-US" dirty="0"/>
           </a:p>
         </p:txBody>
@@ -1044,10 +801,6 @@
           <a:bodyPr/>
           <a:lstStyle/>
           <a:p>
-            <a:r>
-              <a:rPr lang="en-US" dirty="0"/>
-              <a:t/>
-            </a:r>
             <a:endParaRPr lang="en-US" dirty="0"/>
           </a:p>
         </p:txBody>
@@ -1132,10 +885,6 @@
           <a:bodyPr/>
           <a:lstStyle/>
           <a:p>
-            <a:r>
-              <a:rPr lang="en-US" dirty="0"/>
-              <a:t/>
-            </a:r>
             <a:endParaRPr lang="en-US" dirty="0"/>
           </a:p>
         </p:txBody>
@@ -1220,10 +969,6 @@
           <a:bodyPr/>
           <a:lstStyle/>
           <a:p>
-            <a:r>
-              <a:rPr lang="en-US" dirty="0"/>
-              <a:t/>
-            </a:r>
             <a:endParaRPr lang="en-US" dirty="0"/>
           </a:p>
         </p:txBody>
@@ -1308,10 +1053,6 @@
           <a:bodyPr/>
           <a:lstStyle/>
           <a:p>
-            <a:r>
-              <a:rPr lang="en-US" dirty="0"/>
-              <a:t/>
-            </a:r>
             <a:endParaRPr lang="en-US" dirty="0"/>
           </a:p>
         </p:txBody>
@@ -1396,10 +1137,6 @@
           <a:bodyPr/>
           <a:lstStyle/>
           <a:p>
-            <a:r>
-              <a:rPr lang="en-US" dirty="0"/>
-              <a:t/>
-            </a:r>
             <a:endParaRPr lang="en-US" dirty="0"/>
           </a:p>
         </p:txBody>
@@ -1484,10 +1221,6 @@
           <a:bodyPr/>
           <a:lstStyle/>
           <a:p>
-            <a:r>
-              <a:rPr lang="en-US" dirty="0"/>
-              <a:t/>
-            </a:r>
             <a:endParaRPr lang="en-US" dirty="0"/>
           </a:p>
         </p:txBody>
@@ -1572,10 +1305,6 @@
           <a:bodyPr/>
           <a:lstStyle/>
           <a:p>
-            <a:r>
-              <a:rPr lang="en-US" dirty="0"/>
-              <a:t/>
-            </a:r>
             <a:endParaRPr lang="en-US" dirty="0"/>
           </a:p>
         </p:txBody>
@@ -1660,10 +1389,6 @@
           <a:bodyPr/>
           <a:lstStyle/>
           <a:p>
-            <a:r>
-              <a:rPr lang="en-US" dirty="0"/>
-              <a:t/>
-            </a:r>
             <a:endParaRPr lang="en-US" dirty="0"/>
           </a:p>
         </p:txBody>
@@ -1748,10 +1473,6 @@
           <a:bodyPr/>
           <a:lstStyle/>
           <a:p>
-            <a:r>
-              <a:rPr lang="en-US" dirty="0"/>
-              <a:t/>
-            </a:r>
             <a:endParaRPr lang="en-US" dirty="0"/>
           </a:p>
         </p:txBody>
@@ -1836,10 +1557,6 @@
           <a:bodyPr/>
           <a:lstStyle/>
           <a:p>
-            <a:r>
-              <a:rPr lang="en-US" dirty="0"/>
-              <a:t/>
-            </a:r>
             <a:endParaRPr lang="en-US" dirty="0"/>
           </a:p>
         </p:txBody>
@@ -1924,10 +1641,6 @@
           <a:bodyPr/>
           <a:lstStyle/>
           <a:p>
-            <a:r>
-              <a:rPr lang="en-US" dirty="0"/>
-              <a:t/>
-            </a:r>
             <a:endParaRPr lang="en-US" dirty="0"/>
           </a:p>
         </p:txBody>
@@ -2001,6 +1714,11 @@
 <file path=ppt/slideMasters/slideMaster1.xml><?xml version="1.0" encoding="utf-8"?>
 <p:sldMaster xmlns:a="http://schemas.openxmlformats.org/drawingml/2006/main" xmlns:r="http://schemas.openxmlformats.org/officeDocument/2006/relationships" xmlns:p="http://schemas.openxmlformats.org/presentationml/2006/main">
   <p:cSld>
+    <p:bg>
+      <p:bgRef idx="1001">
+        <a:schemeClr val="bg1"/>
+      </p:bgRef>
+    </p:bg>
     <p:spTree>
       <p:nvGrpSpPr>
         <p:cNvPr id="1" name=""/>
@@ -2283,6 +2001,7 @@
         <a:solidFill>
           <a:srgbClr val="1C3838"/>
         </a:solidFill>
+        <a:effectLst/>
       </p:bgPr>
     </p:bg>
     <p:spTree>
@@ -2323,6 +2042,13 @@
             <a:prstDash val="solid"/>
           </a:ln>
         </p:spPr>
+        <p:txBody>
+          <a:bodyPr/>
+          <a:lstStyle/>
+          <a:p>
+            <a:endParaRPr lang="en-FR"/>
+          </a:p>
+        </p:txBody>
       </p:sp>
       <p:sp>
         <p:nvSpPr>
@@ -2348,6 +2074,13 @@
             <a:prstDash val="solid"/>
           </a:ln>
         </p:spPr>
+        <p:txBody>
+          <a:bodyPr/>
+          <a:lstStyle/>
+          <a:p>
+            <a:endParaRPr lang="en-FR"/>
+          </a:p>
+        </p:txBody>
       </p:sp>
       <p:sp>
         <p:nvSpPr>
@@ -2370,7 +2103,7 @@
           <a:bodyPr wrap="square" rtlCol="0" anchor="ctr"/>
           <a:lstStyle/>
           <a:p>
-            <a:pPr indent="0" marL="0">
+            <a:pPr marL="0" indent="0">
               <a:buNone/>
             </a:pPr>
             <a:r>
@@ -2409,7 +2142,7 @@
           <a:bodyPr wrap="square" rtlCol="0" anchor="ctr"/>
           <a:lstStyle/>
           <a:p>
-            <a:pPr indent="0" marL="0">
+            <a:pPr marL="0" indent="0">
               <a:buNone/>
             </a:pPr>
             <a:r>
@@ -2448,7 +2181,7 @@
           <a:bodyPr wrap="square" rtlCol="0" anchor="ctr"/>
           <a:lstStyle/>
           <a:p>
-            <a:pPr indent="0" marL="0">
+            <a:pPr marL="0" indent="0">
               <a:buNone/>
             </a:pPr>
             <a:r>
@@ -2487,7 +2220,7 @@
           <a:bodyPr wrap="square" rtlCol="0" anchor="ctr"/>
           <a:lstStyle/>
           <a:p>
-            <a:pPr indent="0" marL="0">
+            <a:pPr marL="0" indent="0">
               <a:buNone/>
             </a:pPr>
             <a:r>
@@ -2521,6 +2254,7 @@
         <a:solidFill>
           <a:srgbClr val="EAF5F4"/>
         </a:solidFill>
+        <a:effectLst/>
       </p:bgPr>
     </p:bg>
     <p:spTree>
@@ -2561,6 +2295,13 @@
             <a:prstDash val="solid"/>
           </a:ln>
         </p:spPr>
+        <p:txBody>
+          <a:bodyPr/>
+          <a:lstStyle/>
+          <a:p>
+            <a:endParaRPr lang="en-FR"/>
+          </a:p>
+        </p:txBody>
       </p:sp>
       <p:sp>
         <p:nvSpPr>
@@ -2583,7 +2324,7 @@
           <a:bodyPr wrap="square" rtlCol="0" anchor="ctr"/>
           <a:lstStyle/>
           <a:p>
-            <a:pPr indent="0" marL="0">
+            <a:pPr marL="0" indent="0">
               <a:buNone/>
             </a:pPr>
             <a:r>
@@ -2623,6 +2364,13 @@
             <a:prstDash val="solid"/>
           </a:ln>
         </p:spPr>
+        <p:txBody>
+          <a:bodyPr/>
+          <a:lstStyle/>
+          <a:p>
+            <a:endParaRPr lang="en-FR"/>
+          </a:p>
+        </p:txBody>
       </p:sp>
       <p:sp>
         <p:nvSpPr>
@@ -2648,13 +2396,20 @@
             <a:prstDash val="solid"/>
           </a:ln>
           <a:effectLst>
-            <a:outerShdw sx="100000" sy="100000" kx="0" ky="0" algn="bl" rotWithShape="0" blurRad="38100" dist="25400" dir="8100000">
+            <a:outerShdw blurRad="38100" dist="25400" dir="8100000" algn="bl" rotWithShape="0">
               <a:srgbClr val="000000">
                 <a:alpha val="10000"/>
               </a:srgbClr>
             </a:outerShdw>
           </a:effectLst>
         </p:spPr>
+        <p:txBody>
+          <a:bodyPr/>
+          <a:lstStyle/>
+          <a:p>
+            <a:endParaRPr lang="en-FR"/>
+          </a:p>
+        </p:txBody>
       </p:sp>
       <p:sp>
         <p:nvSpPr>
@@ -2680,6 +2435,13 @@
             <a:prstDash val="solid"/>
           </a:ln>
         </p:spPr>
+        <p:txBody>
+          <a:bodyPr/>
+          <a:lstStyle/>
+          <a:p>
+            <a:endParaRPr lang="en-FR"/>
+          </a:p>
+        </p:txBody>
       </p:sp>
       <p:sp>
         <p:nvSpPr>
@@ -2702,7 +2464,7 @@
           <a:bodyPr wrap="square" rtlCol="0" anchor="ctr"/>
           <a:lstStyle/>
           <a:p>
-            <a:pPr indent="0" marL="0">
+            <a:pPr marL="0" indent="0">
               <a:buNone/>
             </a:pPr>
             <a:r>
@@ -2722,15 +2484,15 @@
       </p:sp>
       <p:pic>
         <p:nvPicPr>
-          <p:cNvPr id="8" name="Image 0" descr="preencoded.png">    </p:cNvPr>
+          <p:cNvPr id="8" name="Image 0" descr="preencoded.png"/>
           <p:cNvPicPr>
             <a:picLocks noChangeAspect="1"/>
           </p:cNvPicPr>
           <p:nvPr/>
         </p:nvPicPr>
         <p:blipFill>
-          <a:blip r:embed="rId1"/>
-          <a:srcRect l="0" r="0" t="0" b="0"/>
+          <a:blip r:embed="rId3"/>
+          <a:srcRect/>
           <a:stretch/>
         </p:blipFill>
         <p:spPr>
@@ -2767,13 +2529,20 @@
             <a:prstDash val="solid"/>
           </a:ln>
           <a:effectLst>
-            <a:outerShdw sx="100000" sy="100000" kx="0" ky="0" algn="bl" rotWithShape="0" blurRad="38100" dist="25400" dir="8100000">
+            <a:outerShdw blurRad="38100" dist="25400" dir="8100000" algn="bl" rotWithShape="0">
               <a:srgbClr val="000000">
                 <a:alpha val="10000"/>
               </a:srgbClr>
             </a:outerShdw>
           </a:effectLst>
         </p:spPr>
+        <p:txBody>
+          <a:bodyPr/>
+          <a:lstStyle/>
+          <a:p>
+            <a:endParaRPr lang="en-FR"/>
+          </a:p>
+        </p:txBody>
       </p:sp>
       <p:sp>
         <p:nvSpPr>
@@ -2799,6 +2568,13 @@
             <a:prstDash val="solid"/>
           </a:ln>
         </p:spPr>
+        <p:txBody>
+          <a:bodyPr/>
+          <a:lstStyle/>
+          <a:p>
+            <a:endParaRPr lang="en-FR"/>
+          </a:p>
+        </p:txBody>
       </p:sp>
       <p:sp>
         <p:nvSpPr>
@@ -2821,7 +2597,7 @@
           <a:bodyPr wrap="square" rtlCol="0" anchor="ctr"/>
           <a:lstStyle/>
           <a:p>
-            <a:pPr indent="0" marL="0">
+            <a:pPr marL="0" indent="0">
               <a:buNone/>
             </a:pPr>
             <a:r>
@@ -2863,6 +2639,13 @@
             <a:prstDash val="solid"/>
           </a:ln>
         </p:spPr>
+        <p:txBody>
+          <a:bodyPr/>
+          <a:lstStyle/>
+          <a:p>
+            <a:endParaRPr lang="en-FR"/>
+          </a:p>
+        </p:txBody>
       </p:sp>
       <p:sp>
         <p:nvSpPr>
@@ -2885,7 +2668,7 @@
           <a:bodyPr wrap="square" rtlCol="0" anchor="ctr"/>
           <a:lstStyle/>
           <a:p>
-            <a:pPr algn="ctr" indent="0" marL="0">
+            <a:pPr marL="0" indent="0" algn="ctr">
               <a:buNone/>
             </a:pPr>
             <a:r>
@@ -2924,7 +2707,7 @@
           <a:bodyPr wrap="square" rtlCol="0" anchor="ctr"/>
           <a:lstStyle/>
           <a:p>
-            <a:pPr algn="ctr" indent="0" marL="0">
+            <a:pPr marL="0" indent="0" algn="ctr">
               <a:buNone/>
             </a:pPr>
             <a:r>
@@ -2966,13 +2749,20 @@
             <a:prstDash val="solid"/>
           </a:ln>
           <a:effectLst>
-            <a:outerShdw sx="100000" sy="100000" kx="0" ky="0" algn="bl" rotWithShape="0" blurRad="38100" dist="25400" dir="8100000">
+            <a:outerShdw blurRad="38100" dist="25400" dir="8100000" algn="bl" rotWithShape="0">
               <a:srgbClr val="000000">
                 <a:alpha val="10000"/>
               </a:srgbClr>
             </a:outerShdw>
           </a:effectLst>
         </p:spPr>
+        <p:txBody>
+          <a:bodyPr/>
+          <a:lstStyle/>
+          <a:p>
+            <a:endParaRPr lang="en-FR"/>
+          </a:p>
+        </p:txBody>
       </p:sp>
       <p:sp>
         <p:nvSpPr>
@@ -2995,7 +2785,7 @@
           <a:bodyPr wrap="square" rtlCol="0" anchor="ctr"/>
           <a:lstStyle/>
           <a:p>
-            <a:pPr indent="0" marL="0">
+            <a:pPr marL="0" indent="0">
               <a:buNone/>
             </a:pPr>
             <a:r>
@@ -3029,6 +2819,7 @@
         <a:solidFill>
           <a:srgbClr val="EAF5F4"/>
         </a:solidFill>
+        <a:effectLst/>
       </p:bgPr>
     </p:bg>
     <p:spTree>
@@ -3069,6 +2860,13 @@
             <a:prstDash val="solid"/>
           </a:ln>
         </p:spPr>
+        <p:txBody>
+          <a:bodyPr/>
+          <a:lstStyle/>
+          <a:p>
+            <a:endParaRPr lang="en-FR"/>
+          </a:p>
+        </p:txBody>
       </p:sp>
       <p:sp>
         <p:nvSpPr>
@@ -3091,7 +2889,7 @@
           <a:bodyPr wrap="square" rtlCol="0" anchor="ctr"/>
           <a:lstStyle/>
           <a:p>
-            <a:pPr indent="0" marL="0">
+            <a:pPr marL="0" indent="0">
               <a:buNone/>
             </a:pPr>
             <a:r>
@@ -3131,6 +2929,13 @@
             <a:prstDash val="solid"/>
           </a:ln>
         </p:spPr>
+        <p:txBody>
+          <a:bodyPr/>
+          <a:lstStyle/>
+          <a:p>
+            <a:endParaRPr lang="en-FR"/>
+          </a:p>
+        </p:txBody>
       </p:sp>
       <p:sp>
         <p:nvSpPr>
@@ -3154,6 +2959,13 @@
             <a:prstDash val="solid"/>
           </a:ln>
         </p:spPr>
+        <p:txBody>
+          <a:bodyPr/>
+          <a:lstStyle/>
+          <a:p>
+            <a:endParaRPr lang="en-FR"/>
+          </a:p>
+        </p:txBody>
       </p:sp>
       <p:sp>
         <p:nvSpPr>
@@ -3179,6 +2991,13 @@
             <a:prstDash val="solid"/>
           </a:ln>
         </p:spPr>
+        <p:txBody>
+          <a:bodyPr/>
+          <a:lstStyle/>
+          <a:p>
+            <a:endParaRPr lang="en-FR"/>
+          </a:p>
+        </p:txBody>
       </p:sp>
       <p:sp>
         <p:nvSpPr>
@@ -3201,7 +3020,7 @@
           <a:bodyPr wrap="square" rtlCol="0" anchor="ctr"/>
           <a:lstStyle/>
           <a:p>
-            <a:pPr algn="ctr" indent="0" marL="0">
+            <a:pPr marL="0" indent="0" algn="ctr">
               <a:buNone/>
             </a:pPr>
             <a:r>
@@ -3240,7 +3059,7 @@
           <a:bodyPr wrap="square" rtlCol="0" anchor="ctr"/>
           <a:lstStyle/>
           <a:p>
-            <a:pPr indent="0" marL="0">
+            <a:pPr marL="0" indent="0">
               <a:buNone/>
             </a:pPr>
             <a:r>
@@ -3282,25 +3101,32 @@
             <a:prstDash val="solid"/>
           </a:ln>
           <a:effectLst>
-            <a:outerShdw sx="100000" sy="100000" kx="0" ky="0" algn="bl" rotWithShape="0" blurRad="38100" dist="25400" dir="8100000">
+            <a:outerShdw blurRad="38100" dist="25400" dir="8100000" algn="bl" rotWithShape="0">
               <a:srgbClr val="000000">
                 <a:alpha val="10000"/>
               </a:srgbClr>
             </a:outerShdw>
           </a:effectLst>
         </p:spPr>
+        <p:txBody>
+          <a:bodyPr/>
+          <a:lstStyle/>
+          <a:p>
+            <a:endParaRPr lang="en-FR"/>
+          </a:p>
+        </p:txBody>
       </p:sp>
       <p:pic>
         <p:nvPicPr>
-          <p:cNvPr id="10" name="Image 0" descr="preencoded.png">    </p:cNvPr>
+          <p:cNvPr id="10" name="Image 0" descr="preencoded.png"/>
           <p:cNvPicPr>
             <a:picLocks noChangeAspect="1"/>
           </p:cNvPicPr>
           <p:nvPr/>
         </p:nvPicPr>
         <p:blipFill>
-          <a:blip r:embed="rId1"/>
-          <a:srcRect l="0" r="0" t="0" b="0"/>
+          <a:blip r:embed="rId3"/>
+          <a:srcRect/>
           <a:stretch/>
         </p:blipFill>
         <p:spPr>
@@ -3334,7 +3160,7 @@
           <a:bodyPr wrap="square" rtlCol="0" anchor="ctr"/>
           <a:lstStyle/>
           <a:p>
-            <a:pPr indent="0" marL="0">
+            <a:pPr marL="0" indent="0">
               <a:buNone/>
             </a:pPr>
             <a:r>
@@ -3376,6 +3202,13 @@
             <a:prstDash val="solid"/>
           </a:ln>
         </p:spPr>
+        <p:txBody>
+          <a:bodyPr/>
+          <a:lstStyle/>
+          <a:p>
+            <a:endParaRPr lang="en-FR"/>
+          </a:p>
+        </p:txBody>
       </p:sp>
       <p:sp>
         <p:nvSpPr>
@@ -3398,7 +3231,7 @@
           <a:bodyPr wrap="square" rtlCol="0" anchor="ctr"/>
           <a:lstStyle/>
           <a:p>
-            <a:pPr algn="ctr" indent="0" marL="0">
+            <a:pPr marL="0" indent="0" algn="ctr">
               <a:buNone/>
             </a:pPr>
             <a:r>
@@ -3437,7 +3270,7 @@
           <a:bodyPr wrap="square" rtlCol="0" anchor="ctr"/>
           <a:lstStyle/>
           <a:p>
-            <a:pPr indent="0" marL="0">
+            <a:pPr marL="0" indent="0">
               <a:buNone/>
             </a:pPr>
             <a:r>
@@ -3479,25 +3312,32 @@
             <a:prstDash val="solid"/>
           </a:ln>
           <a:effectLst>
-            <a:outerShdw sx="100000" sy="100000" kx="0" ky="0" algn="bl" rotWithShape="0" blurRad="38100" dist="25400" dir="8100000">
+            <a:outerShdw blurRad="38100" dist="25400" dir="8100000" algn="bl" rotWithShape="0">
               <a:srgbClr val="000000">
                 <a:alpha val="10000"/>
               </a:srgbClr>
             </a:outerShdw>
           </a:effectLst>
         </p:spPr>
+        <p:txBody>
+          <a:bodyPr/>
+          <a:lstStyle/>
+          <a:p>
+            <a:endParaRPr lang="en-FR"/>
+          </a:p>
+        </p:txBody>
       </p:sp>
       <p:pic>
         <p:nvPicPr>
-          <p:cNvPr id="16" name="Image 1" descr="preencoded.png">    </p:cNvPr>
+          <p:cNvPr id="16" name="Image 1" descr="preencoded.png"/>
           <p:cNvPicPr>
             <a:picLocks noChangeAspect="1"/>
           </p:cNvPicPr>
           <p:nvPr/>
         </p:nvPicPr>
         <p:blipFill>
-          <a:blip r:embed="rId2"/>
-          <a:srcRect l="0" r="0" t="0" b="0"/>
+          <a:blip r:embed="rId4"/>
+          <a:srcRect/>
           <a:stretch/>
         </p:blipFill>
         <p:spPr>
@@ -3531,7 +3371,7 @@
           <a:bodyPr wrap="square" rtlCol="0" anchor="ctr"/>
           <a:lstStyle/>
           <a:p>
-            <a:pPr indent="0" marL="0">
+            <a:pPr marL="0" indent="0">
               <a:buNone/>
             </a:pPr>
             <a:r>
@@ -3565,6 +3405,7 @@
         <a:solidFill>
           <a:srgbClr val="EAF5F4"/>
         </a:solidFill>
+        <a:effectLst/>
       </p:bgPr>
     </p:bg>
     <p:spTree>
@@ -3605,6 +3446,13 @@
             <a:prstDash val="solid"/>
           </a:ln>
         </p:spPr>
+        <p:txBody>
+          <a:bodyPr/>
+          <a:lstStyle/>
+          <a:p>
+            <a:endParaRPr lang="en-FR"/>
+          </a:p>
+        </p:txBody>
       </p:sp>
       <p:sp>
         <p:nvSpPr>
@@ -3627,7 +3475,7 @@
           <a:bodyPr wrap="square" rtlCol="0" anchor="ctr"/>
           <a:lstStyle/>
           <a:p>
-            <a:pPr indent="0" marL="0">
+            <a:pPr marL="0" indent="0">
               <a:buNone/>
             </a:pPr>
             <a:r>
@@ -3667,6 +3515,13 @@
             <a:prstDash val="solid"/>
           </a:ln>
         </p:spPr>
+        <p:txBody>
+          <a:bodyPr/>
+          <a:lstStyle/>
+          <a:p>
+            <a:endParaRPr lang="en-FR"/>
+          </a:p>
+        </p:txBody>
       </p:sp>
       <p:sp>
         <p:nvSpPr>
@@ -3690,6 +3545,13 @@
             <a:prstDash val="solid"/>
           </a:ln>
         </p:spPr>
+        <p:txBody>
+          <a:bodyPr/>
+          <a:lstStyle/>
+          <a:p>
+            <a:endParaRPr lang="en-FR"/>
+          </a:p>
+        </p:txBody>
       </p:sp>
       <p:sp>
         <p:nvSpPr>
@@ -3715,6 +3577,13 @@
             <a:prstDash val="solid"/>
           </a:ln>
         </p:spPr>
+        <p:txBody>
+          <a:bodyPr/>
+          <a:lstStyle/>
+          <a:p>
+            <a:endParaRPr lang="en-FR"/>
+          </a:p>
+        </p:txBody>
       </p:sp>
       <p:sp>
         <p:nvSpPr>
@@ -3737,7 +3606,7 @@
           <a:bodyPr wrap="square" rtlCol="0" anchor="ctr"/>
           <a:lstStyle/>
           <a:p>
-            <a:pPr algn="ctr" indent="0" marL="0">
+            <a:pPr marL="0" indent="0" algn="ctr">
               <a:buNone/>
             </a:pPr>
             <a:r>
@@ -3776,7 +3645,7 @@
           <a:bodyPr wrap="square" rtlCol="0" anchor="ctr"/>
           <a:lstStyle/>
           <a:p>
-            <a:pPr indent="0" marL="0">
+            <a:pPr marL="0" indent="0">
               <a:buNone/>
             </a:pPr>
             <a:r>
@@ -3818,25 +3687,32 @@
             <a:prstDash val="solid"/>
           </a:ln>
           <a:effectLst>
-            <a:outerShdw sx="100000" sy="100000" kx="0" ky="0" algn="bl" rotWithShape="0" blurRad="38100" dist="25400" dir="8100000">
+            <a:outerShdw blurRad="38100" dist="25400" dir="8100000" algn="bl" rotWithShape="0">
               <a:srgbClr val="000000">
                 <a:alpha val="10000"/>
               </a:srgbClr>
             </a:outerShdw>
           </a:effectLst>
         </p:spPr>
+        <p:txBody>
+          <a:bodyPr/>
+          <a:lstStyle/>
+          <a:p>
+            <a:endParaRPr lang="en-FR"/>
+          </a:p>
+        </p:txBody>
       </p:sp>
       <p:pic>
         <p:nvPicPr>
-          <p:cNvPr id="10" name="Image 0" descr="preencoded.png">    </p:cNvPr>
+          <p:cNvPr id="10" name="Image 0" descr="preencoded.png"/>
           <p:cNvPicPr>
             <a:picLocks noChangeAspect="1"/>
           </p:cNvPicPr>
           <p:nvPr/>
         </p:nvPicPr>
         <p:blipFill>
-          <a:blip r:embed="rId1"/>
-          <a:srcRect l="0" r="0" t="0" b="0"/>
+          <a:blip r:embed="rId3"/>
+          <a:srcRect/>
           <a:stretch/>
         </p:blipFill>
         <p:spPr>
@@ -3870,7 +3746,7 @@
           <a:bodyPr wrap="square" rtlCol="0" anchor="ctr"/>
           <a:lstStyle/>
           <a:p>
-            <a:pPr indent="0" marL="0">
+            <a:pPr marL="0" indent="0">
               <a:buNone/>
             </a:pPr>
             <a:r>
@@ -3912,6 +3788,13 @@
             <a:prstDash val="solid"/>
           </a:ln>
         </p:spPr>
+        <p:txBody>
+          <a:bodyPr/>
+          <a:lstStyle/>
+          <a:p>
+            <a:endParaRPr lang="en-FR"/>
+          </a:p>
+        </p:txBody>
       </p:sp>
       <p:sp>
         <p:nvSpPr>
@@ -3934,7 +3817,7 @@
           <a:bodyPr wrap="square" rtlCol="0" anchor="ctr"/>
           <a:lstStyle/>
           <a:p>
-            <a:pPr algn="ctr" indent="0" marL="0">
+            <a:pPr marL="0" indent="0" algn="ctr">
               <a:buNone/>
             </a:pPr>
             <a:r>
@@ -3973,7 +3856,7 @@
           <a:bodyPr wrap="square" rtlCol="0" anchor="ctr"/>
           <a:lstStyle/>
           <a:p>
-            <a:pPr indent="0" marL="0">
+            <a:pPr marL="0" indent="0">
               <a:buNone/>
             </a:pPr>
             <a:r>
@@ -4015,25 +3898,32 @@
             <a:prstDash val="solid"/>
           </a:ln>
           <a:effectLst>
-            <a:outerShdw sx="100000" sy="100000" kx="0" ky="0" algn="bl" rotWithShape="0" blurRad="38100" dist="25400" dir="8100000">
+            <a:outerShdw blurRad="38100" dist="25400" dir="8100000" algn="bl" rotWithShape="0">
               <a:srgbClr val="000000">
                 <a:alpha val="10000"/>
               </a:srgbClr>
             </a:outerShdw>
           </a:effectLst>
         </p:spPr>
+        <p:txBody>
+          <a:bodyPr/>
+          <a:lstStyle/>
+          <a:p>
+            <a:endParaRPr lang="en-FR"/>
+          </a:p>
+        </p:txBody>
       </p:sp>
       <p:pic>
         <p:nvPicPr>
-          <p:cNvPr id="16" name="Image 1" descr="preencoded.png">    </p:cNvPr>
+          <p:cNvPr id="16" name="Image 1" descr="preencoded.png"/>
           <p:cNvPicPr>
             <a:picLocks noChangeAspect="1"/>
           </p:cNvPicPr>
           <p:nvPr/>
         </p:nvPicPr>
         <p:blipFill>
-          <a:blip r:embed="rId2"/>
-          <a:srcRect l="0" r="0" t="0" b="0"/>
+          <a:blip r:embed="rId4"/>
+          <a:srcRect/>
           <a:stretch/>
         </p:blipFill>
         <p:spPr>
@@ -4067,7 +3957,7 @@
           <a:bodyPr wrap="square" rtlCol="0" anchor="ctr"/>
           <a:lstStyle/>
           <a:p>
-            <a:pPr indent="0" marL="0">
+            <a:pPr marL="0" indent="0">
               <a:buNone/>
             </a:pPr>
             <a:r>
@@ -4101,6 +3991,7 @@
         <a:solidFill>
           <a:srgbClr val="EAF5F4"/>
         </a:solidFill>
+        <a:effectLst/>
       </p:bgPr>
     </p:bg>
     <p:spTree>
@@ -4141,6 +4032,13 @@
             <a:prstDash val="solid"/>
           </a:ln>
         </p:spPr>
+        <p:txBody>
+          <a:bodyPr/>
+          <a:lstStyle/>
+          <a:p>
+            <a:endParaRPr lang="en-FR"/>
+          </a:p>
+        </p:txBody>
       </p:sp>
       <p:sp>
         <p:nvSpPr>
@@ -4163,7 +4061,7 @@
           <a:bodyPr wrap="square" rtlCol="0" anchor="ctr"/>
           <a:lstStyle/>
           <a:p>
-            <a:pPr indent="0" marL="0">
+            <a:pPr marL="0" indent="0">
               <a:buNone/>
             </a:pPr>
             <a:r>
@@ -4203,6 +4101,13 @@
             <a:prstDash val="solid"/>
           </a:ln>
         </p:spPr>
+        <p:txBody>
+          <a:bodyPr/>
+          <a:lstStyle/>
+          <a:p>
+            <a:endParaRPr lang="en-FR"/>
+          </a:p>
+        </p:txBody>
       </p:sp>
       <p:sp>
         <p:nvSpPr>
@@ -4226,6 +4131,13 @@
             <a:prstDash val="solid"/>
           </a:ln>
         </p:spPr>
+        <p:txBody>
+          <a:bodyPr/>
+          <a:lstStyle/>
+          <a:p>
+            <a:endParaRPr lang="en-FR"/>
+          </a:p>
+        </p:txBody>
       </p:sp>
       <p:sp>
         <p:nvSpPr>
@@ -4251,6 +4163,13 @@
             <a:prstDash val="solid"/>
           </a:ln>
         </p:spPr>
+        <p:txBody>
+          <a:bodyPr/>
+          <a:lstStyle/>
+          <a:p>
+            <a:endParaRPr lang="en-FR"/>
+          </a:p>
+        </p:txBody>
       </p:sp>
       <p:sp>
         <p:nvSpPr>
@@ -4273,7 +4192,7 @@
           <a:bodyPr wrap="square" rtlCol="0" anchor="ctr"/>
           <a:lstStyle/>
           <a:p>
-            <a:pPr algn="ctr" indent="0" marL="0">
+            <a:pPr marL="0" indent="0" algn="ctr">
               <a:buNone/>
             </a:pPr>
             <a:r>
@@ -4312,7 +4231,7 @@
           <a:bodyPr wrap="square" rtlCol="0" anchor="ctr"/>
           <a:lstStyle/>
           <a:p>
-            <a:pPr indent="0" marL="0">
+            <a:pPr marL="0" indent="0">
               <a:buNone/>
             </a:pPr>
             <a:r>
@@ -4354,25 +4273,32 @@
             <a:prstDash val="solid"/>
           </a:ln>
           <a:effectLst>
-            <a:outerShdw sx="100000" sy="100000" kx="0" ky="0" algn="bl" rotWithShape="0" blurRad="38100" dist="25400" dir="8100000">
+            <a:outerShdw blurRad="38100" dist="25400" dir="8100000" algn="bl" rotWithShape="0">
               <a:srgbClr val="000000">
                 <a:alpha val="10000"/>
               </a:srgbClr>
             </a:outerShdw>
           </a:effectLst>
         </p:spPr>
+        <p:txBody>
+          <a:bodyPr/>
+          <a:lstStyle/>
+          <a:p>
+            <a:endParaRPr lang="en-FR"/>
+          </a:p>
+        </p:txBody>
       </p:sp>
       <p:pic>
         <p:nvPicPr>
-          <p:cNvPr id="10" name="Image 0" descr="preencoded.png">    </p:cNvPr>
+          <p:cNvPr id="10" name="Image 0" descr="preencoded.png"/>
           <p:cNvPicPr>
             <a:picLocks noChangeAspect="1"/>
           </p:cNvPicPr>
           <p:nvPr/>
         </p:nvPicPr>
         <p:blipFill>
-          <a:blip r:embed="rId1"/>
-          <a:srcRect l="0" r="0" t="0" b="0"/>
+          <a:blip r:embed="rId3"/>
+          <a:srcRect/>
           <a:stretch/>
         </p:blipFill>
         <p:spPr>
@@ -4406,7 +4332,7 @@
           <a:bodyPr wrap="square" rtlCol="0" anchor="ctr"/>
           <a:lstStyle/>
           <a:p>
-            <a:pPr indent="0" marL="0">
+            <a:pPr marL="0" indent="0">
               <a:buNone/>
             </a:pPr>
             <a:r>
@@ -4448,6 +4374,13 @@
             <a:prstDash val="solid"/>
           </a:ln>
         </p:spPr>
+        <p:txBody>
+          <a:bodyPr/>
+          <a:lstStyle/>
+          <a:p>
+            <a:endParaRPr lang="en-FR"/>
+          </a:p>
+        </p:txBody>
       </p:sp>
       <p:sp>
         <p:nvSpPr>
@@ -4470,7 +4403,7 @@
           <a:bodyPr wrap="square" rtlCol="0" anchor="ctr"/>
           <a:lstStyle/>
           <a:p>
-            <a:pPr algn="ctr" indent="0" marL="0">
+            <a:pPr marL="0" indent="0" algn="ctr">
               <a:buNone/>
             </a:pPr>
             <a:r>
@@ -4509,7 +4442,7 @@
           <a:bodyPr wrap="square" rtlCol="0" anchor="ctr"/>
           <a:lstStyle/>
           <a:p>
-            <a:pPr indent="0" marL="0">
+            <a:pPr marL="0" indent="0">
               <a:buNone/>
             </a:pPr>
             <a:r>
@@ -4551,25 +4484,32 @@
             <a:prstDash val="solid"/>
           </a:ln>
           <a:effectLst>
-            <a:outerShdw sx="100000" sy="100000" kx="0" ky="0" algn="bl" rotWithShape="0" blurRad="38100" dist="25400" dir="8100000">
+            <a:outerShdw blurRad="38100" dist="25400" dir="8100000" algn="bl" rotWithShape="0">
               <a:srgbClr val="000000">
                 <a:alpha val="10000"/>
               </a:srgbClr>
             </a:outerShdw>
           </a:effectLst>
         </p:spPr>
+        <p:txBody>
+          <a:bodyPr/>
+          <a:lstStyle/>
+          <a:p>
+            <a:endParaRPr lang="en-FR"/>
+          </a:p>
+        </p:txBody>
       </p:sp>
       <p:pic>
         <p:nvPicPr>
-          <p:cNvPr id="16" name="Image 1" descr="preencoded.png">    </p:cNvPr>
+          <p:cNvPr id="16" name="Image 1" descr="preencoded.png"/>
           <p:cNvPicPr>
             <a:picLocks noChangeAspect="1"/>
           </p:cNvPicPr>
           <p:nvPr/>
         </p:nvPicPr>
         <p:blipFill>
-          <a:blip r:embed="rId2"/>
-          <a:srcRect l="0" r="0" t="0" b="0"/>
+          <a:blip r:embed="rId4"/>
+          <a:srcRect/>
           <a:stretch/>
         </p:blipFill>
         <p:spPr>
@@ -4603,7 +4543,7 @@
           <a:bodyPr wrap="square" rtlCol="0" anchor="ctr"/>
           <a:lstStyle/>
           <a:p>
-            <a:pPr indent="0" marL="0">
+            <a:pPr marL="0" indent="0">
               <a:buNone/>
             </a:pPr>
             <a:r>
@@ -4637,6 +4577,7 @@
         <a:solidFill>
           <a:srgbClr val="EAF5F4"/>
         </a:solidFill>
+        <a:effectLst/>
       </p:bgPr>
     </p:bg>
     <p:spTree>
@@ -4677,6 +4618,13 @@
             <a:prstDash val="solid"/>
           </a:ln>
         </p:spPr>
+        <p:txBody>
+          <a:bodyPr/>
+          <a:lstStyle/>
+          <a:p>
+            <a:endParaRPr lang="en-FR"/>
+          </a:p>
+        </p:txBody>
       </p:sp>
       <p:sp>
         <p:nvSpPr>
@@ -4699,7 +4647,7 @@
           <a:bodyPr wrap="square" rtlCol="0" anchor="ctr"/>
           <a:lstStyle/>
           <a:p>
-            <a:pPr indent="0" marL="0">
+            <a:pPr marL="0" indent="0">
               <a:buNone/>
             </a:pPr>
             <a:r>
@@ -4739,6 +4687,13 @@
             <a:prstDash val="solid"/>
           </a:ln>
         </p:spPr>
+        <p:txBody>
+          <a:bodyPr/>
+          <a:lstStyle/>
+          <a:p>
+            <a:endParaRPr lang="en-FR"/>
+          </a:p>
+        </p:txBody>
       </p:sp>
       <p:sp>
         <p:nvSpPr>
@@ -4762,6 +4717,13 @@
             <a:prstDash val="solid"/>
           </a:ln>
         </p:spPr>
+        <p:txBody>
+          <a:bodyPr/>
+          <a:lstStyle/>
+          <a:p>
+            <a:endParaRPr lang="en-FR"/>
+          </a:p>
+        </p:txBody>
       </p:sp>
       <p:sp>
         <p:nvSpPr>
@@ -4787,6 +4749,13 @@
             <a:prstDash val="solid"/>
           </a:ln>
         </p:spPr>
+        <p:txBody>
+          <a:bodyPr/>
+          <a:lstStyle/>
+          <a:p>
+            <a:endParaRPr lang="en-FR"/>
+          </a:p>
+        </p:txBody>
       </p:sp>
       <p:sp>
         <p:nvSpPr>
@@ -4809,7 +4778,7 @@
           <a:bodyPr wrap="square" rtlCol="0" anchor="ctr"/>
           <a:lstStyle/>
           <a:p>
-            <a:pPr algn="ctr" indent="0" marL="0">
+            <a:pPr marL="0" indent="0" algn="ctr">
               <a:buNone/>
             </a:pPr>
             <a:r>
@@ -4848,7 +4817,7 @@
           <a:bodyPr wrap="square" rtlCol="0" anchor="ctr"/>
           <a:lstStyle/>
           <a:p>
-            <a:pPr indent="0" marL="0">
+            <a:pPr marL="0" indent="0">
               <a:buNone/>
             </a:pPr>
             <a:r>
@@ -4890,25 +4859,32 @@
             <a:prstDash val="solid"/>
           </a:ln>
           <a:effectLst>
-            <a:outerShdw sx="100000" sy="100000" kx="0" ky="0" algn="bl" rotWithShape="0" blurRad="38100" dist="25400" dir="8100000">
+            <a:outerShdw blurRad="38100" dist="25400" dir="8100000" algn="bl" rotWithShape="0">
               <a:srgbClr val="000000">
                 <a:alpha val="10000"/>
               </a:srgbClr>
             </a:outerShdw>
           </a:effectLst>
         </p:spPr>
+        <p:txBody>
+          <a:bodyPr/>
+          <a:lstStyle/>
+          <a:p>
+            <a:endParaRPr lang="en-FR"/>
+          </a:p>
+        </p:txBody>
       </p:sp>
       <p:pic>
         <p:nvPicPr>
-          <p:cNvPr id="10" name="Image 0" descr="preencoded.png">    </p:cNvPr>
+          <p:cNvPr id="10" name="Image 0" descr="preencoded.png"/>
           <p:cNvPicPr>
             <a:picLocks noChangeAspect="1"/>
           </p:cNvPicPr>
           <p:nvPr/>
         </p:nvPicPr>
         <p:blipFill>
-          <a:blip r:embed="rId1"/>
-          <a:srcRect l="0" r="0" t="0" b="0"/>
+          <a:blip r:embed="rId3"/>
+          <a:srcRect/>
           <a:stretch/>
         </p:blipFill>
         <p:spPr>
@@ -4942,7 +4918,7 @@
           <a:bodyPr wrap="square" rtlCol="0" anchor="ctr"/>
           <a:lstStyle/>
           <a:p>
-            <a:pPr indent="0" marL="0">
+            <a:pPr marL="0" indent="0">
               <a:buNone/>
             </a:pPr>
             <a:r>
@@ -4984,6 +4960,13 @@
             <a:prstDash val="solid"/>
           </a:ln>
         </p:spPr>
+        <p:txBody>
+          <a:bodyPr/>
+          <a:lstStyle/>
+          <a:p>
+            <a:endParaRPr lang="en-FR"/>
+          </a:p>
+        </p:txBody>
       </p:sp>
       <p:sp>
         <p:nvSpPr>
@@ -5006,7 +4989,7 @@
           <a:bodyPr wrap="square" rtlCol="0" anchor="ctr"/>
           <a:lstStyle/>
           <a:p>
-            <a:pPr algn="ctr" indent="0" marL="0">
+            <a:pPr marL="0" indent="0" algn="ctr">
               <a:buNone/>
             </a:pPr>
             <a:r>
@@ -5045,7 +5028,7 @@
           <a:bodyPr wrap="square" rtlCol="0" anchor="ctr"/>
           <a:lstStyle/>
           <a:p>
-            <a:pPr indent="0" marL="0">
+            <a:pPr marL="0" indent="0">
               <a:buNone/>
             </a:pPr>
             <a:r>
@@ -5087,25 +5070,32 @@
             <a:prstDash val="solid"/>
           </a:ln>
           <a:effectLst>
-            <a:outerShdw sx="100000" sy="100000" kx="0" ky="0" algn="bl" rotWithShape="0" blurRad="38100" dist="25400" dir="8100000">
+            <a:outerShdw blurRad="38100" dist="25400" dir="8100000" algn="bl" rotWithShape="0">
               <a:srgbClr val="000000">
                 <a:alpha val="10000"/>
               </a:srgbClr>
             </a:outerShdw>
           </a:effectLst>
         </p:spPr>
+        <p:txBody>
+          <a:bodyPr/>
+          <a:lstStyle/>
+          <a:p>
+            <a:endParaRPr lang="en-FR"/>
+          </a:p>
+        </p:txBody>
       </p:sp>
       <p:pic>
         <p:nvPicPr>
-          <p:cNvPr id="16" name="Image 1" descr="preencoded.png">    </p:cNvPr>
+          <p:cNvPr id="16" name="Image 1" descr="preencoded.png"/>
           <p:cNvPicPr>
             <a:picLocks noChangeAspect="1"/>
           </p:cNvPicPr>
           <p:nvPr/>
         </p:nvPicPr>
         <p:blipFill>
-          <a:blip r:embed="rId2"/>
-          <a:srcRect l="0" r="0" t="0" b="0"/>
+          <a:blip r:embed="rId4"/>
+          <a:srcRect/>
           <a:stretch/>
         </p:blipFill>
         <p:spPr>
@@ -5139,7 +5129,7 @@
           <a:bodyPr wrap="square" rtlCol="0" anchor="ctr"/>
           <a:lstStyle/>
           <a:p>
-            <a:pPr indent="0" marL="0">
+            <a:pPr marL="0" indent="0">
               <a:buNone/>
             </a:pPr>
             <a:r>
@@ -5173,6 +5163,7 @@
         <a:solidFill>
           <a:srgbClr val="EAF5F4"/>
         </a:solidFill>
+        <a:effectLst/>
       </p:bgPr>
     </p:bg>
     <p:spTree>
@@ -5213,6 +5204,13 @@
             <a:prstDash val="solid"/>
           </a:ln>
         </p:spPr>
+        <p:txBody>
+          <a:bodyPr/>
+          <a:lstStyle/>
+          <a:p>
+            <a:endParaRPr lang="en-FR"/>
+          </a:p>
+        </p:txBody>
       </p:sp>
       <p:sp>
         <p:nvSpPr>
@@ -5235,7 +5233,7 @@
           <a:bodyPr wrap="square" rtlCol="0" anchor="ctr"/>
           <a:lstStyle/>
           <a:p>
-            <a:pPr indent="0" marL="0">
+            <a:pPr marL="0" indent="0">
               <a:buNone/>
             </a:pPr>
             <a:r>
@@ -5275,6 +5273,13 @@
             <a:prstDash val="solid"/>
           </a:ln>
         </p:spPr>
+        <p:txBody>
+          <a:bodyPr/>
+          <a:lstStyle/>
+          <a:p>
+            <a:endParaRPr lang="en-FR"/>
+          </a:p>
+        </p:txBody>
       </p:sp>
       <p:sp>
         <p:nvSpPr>
@@ -5298,6 +5303,13 @@
             <a:prstDash val="solid"/>
           </a:ln>
         </p:spPr>
+        <p:txBody>
+          <a:bodyPr/>
+          <a:lstStyle/>
+          <a:p>
+            <a:endParaRPr lang="en-FR"/>
+          </a:p>
+        </p:txBody>
       </p:sp>
       <p:sp>
         <p:nvSpPr>
@@ -5323,6 +5335,13 @@
             <a:prstDash val="solid"/>
           </a:ln>
         </p:spPr>
+        <p:txBody>
+          <a:bodyPr/>
+          <a:lstStyle/>
+          <a:p>
+            <a:endParaRPr lang="en-FR"/>
+          </a:p>
+        </p:txBody>
       </p:sp>
       <p:sp>
         <p:nvSpPr>
@@ -5345,7 +5364,7 @@
           <a:bodyPr wrap="square" rtlCol="0" anchor="ctr"/>
           <a:lstStyle/>
           <a:p>
-            <a:pPr algn="ctr" indent="0" marL="0">
+            <a:pPr marL="0" indent="0" algn="ctr">
               <a:buNone/>
             </a:pPr>
             <a:r>
@@ -5384,7 +5403,7 @@
           <a:bodyPr wrap="square" rtlCol="0" anchor="ctr"/>
           <a:lstStyle/>
           <a:p>
-            <a:pPr indent="0" marL="0">
+            <a:pPr marL="0" indent="0">
               <a:buNone/>
             </a:pPr>
             <a:r>
@@ -5426,25 +5445,32 @@
             <a:prstDash val="solid"/>
           </a:ln>
           <a:effectLst>
-            <a:outerShdw sx="100000" sy="100000" kx="0" ky="0" algn="bl" rotWithShape="0" blurRad="38100" dist="25400" dir="8100000">
+            <a:outerShdw blurRad="38100" dist="25400" dir="8100000" algn="bl" rotWithShape="0">
               <a:srgbClr val="000000">
                 <a:alpha val="10000"/>
               </a:srgbClr>
             </a:outerShdw>
           </a:effectLst>
         </p:spPr>
+        <p:txBody>
+          <a:bodyPr/>
+          <a:lstStyle/>
+          <a:p>
+            <a:endParaRPr lang="en-FR"/>
+          </a:p>
+        </p:txBody>
       </p:sp>
       <p:pic>
         <p:nvPicPr>
-          <p:cNvPr id="10" name="Image 0" descr="preencoded.png">    </p:cNvPr>
+          <p:cNvPr id="10" name="Image 0" descr="preencoded.png"/>
           <p:cNvPicPr>
             <a:picLocks noChangeAspect="1"/>
           </p:cNvPicPr>
           <p:nvPr/>
         </p:nvPicPr>
         <p:blipFill>
-          <a:blip r:embed="rId1"/>
-          <a:srcRect l="0" r="0" t="0" b="0"/>
+          <a:blip r:embed="rId3"/>
+          <a:srcRect/>
           <a:stretch/>
         </p:blipFill>
         <p:spPr>
@@ -5478,7 +5504,7 @@
           <a:bodyPr wrap="square" rtlCol="0" anchor="ctr"/>
           <a:lstStyle/>
           <a:p>
-            <a:pPr indent="0" marL="0">
+            <a:pPr marL="0" indent="0">
               <a:buNone/>
             </a:pPr>
             <a:r>
@@ -5520,6 +5546,13 @@
             <a:prstDash val="solid"/>
           </a:ln>
         </p:spPr>
+        <p:txBody>
+          <a:bodyPr/>
+          <a:lstStyle/>
+          <a:p>
+            <a:endParaRPr lang="en-FR"/>
+          </a:p>
+        </p:txBody>
       </p:sp>
       <p:sp>
         <p:nvSpPr>
@@ -5542,7 +5575,7 @@
           <a:bodyPr wrap="square" rtlCol="0" anchor="ctr"/>
           <a:lstStyle/>
           <a:p>
-            <a:pPr algn="ctr" indent="0" marL="0">
+            <a:pPr marL="0" indent="0" algn="ctr">
               <a:buNone/>
             </a:pPr>
             <a:r>
@@ -5581,7 +5614,7 @@
           <a:bodyPr wrap="square" rtlCol="0" anchor="ctr"/>
           <a:lstStyle/>
           <a:p>
-            <a:pPr indent="0" marL="0">
+            <a:pPr marL="0" indent="0">
               <a:buNone/>
             </a:pPr>
             <a:r>
@@ -5623,25 +5656,32 @@
             <a:prstDash val="solid"/>
           </a:ln>
           <a:effectLst>
-            <a:outerShdw sx="100000" sy="100000" kx="0" ky="0" algn="bl" rotWithShape="0" blurRad="38100" dist="25400" dir="8100000">
+            <a:outerShdw blurRad="38100" dist="25400" dir="8100000" algn="bl" rotWithShape="0">
               <a:srgbClr val="000000">
                 <a:alpha val="10000"/>
               </a:srgbClr>
             </a:outerShdw>
           </a:effectLst>
         </p:spPr>
+        <p:txBody>
+          <a:bodyPr/>
+          <a:lstStyle/>
+          <a:p>
+            <a:endParaRPr lang="en-FR"/>
+          </a:p>
+        </p:txBody>
       </p:sp>
       <p:pic>
         <p:nvPicPr>
-          <p:cNvPr id="16" name="Image 1" descr="preencoded.png">    </p:cNvPr>
+          <p:cNvPr id="16" name="Image 1" descr="preencoded.png"/>
           <p:cNvPicPr>
             <a:picLocks noChangeAspect="1"/>
           </p:cNvPicPr>
           <p:nvPr/>
         </p:nvPicPr>
         <p:blipFill>
-          <a:blip r:embed="rId2"/>
-          <a:srcRect l="0" r="0" t="0" b="0"/>
+          <a:blip r:embed="rId4"/>
+          <a:srcRect/>
           <a:stretch/>
         </p:blipFill>
         <p:spPr>
@@ -5675,7 +5715,7 @@
           <a:bodyPr wrap="square" rtlCol="0" anchor="ctr"/>
           <a:lstStyle/>
           <a:p>
-            <a:pPr indent="0" marL="0">
+            <a:pPr marL="0" indent="0">
               <a:buNone/>
             </a:pPr>
             <a:r>
@@ -5709,6 +5749,7 @@
         <a:solidFill>
           <a:srgbClr val="EAF5F4"/>
         </a:solidFill>
+        <a:effectLst/>
       </p:bgPr>
     </p:bg>
     <p:spTree>
@@ -5749,6 +5790,13 @@
             <a:prstDash val="solid"/>
           </a:ln>
         </p:spPr>
+        <p:txBody>
+          <a:bodyPr/>
+          <a:lstStyle/>
+          <a:p>
+            <a:endParaRPr lang="en-FR"/>
+          </a:p>
+        </p:txBody>
       </p:sp>
       <p:sp>
         <p:nvSpPr>
@@ -5771,7 +5819,7 @@
           <a:bodyPr wrap="square" rtlCol="0" anchor="ctr"/>
           <a:lstStyle/>
           <a:p>
-            <a:pPr indent="0" marL="0">
+            <a:pPr marL="0" indent="0">
               <a:buNone/>
             </a:pPr>
             <a:r>
@@ -5811,6 +5859,13 @@
             <a:prstDash val="solid"/>
           </a:ln>
         </p:spPr>
+        <p:txBody>
+          <a:bodyPr/>
+          <a:lstStyle/>
+          <a:p>
+            <a:endParaRPr lang="en-FR"/>
+          </a:p>
+        </p:txBody>
       </p:sp>
       <p:sp>
         <p:nvSpPr>
@@ -5836,6 +5891,13 @@
             <a:prstDash val="solid"/>
           </a:ln>
         </p:spPr>
+        <p:txBody>
+          <a:bodyPr/>
+          <a:lstStyle/>
+          <a:p>
+            <a:endParaRPr lang="en-FR"/>
+          </a:p>
+        </p:txBody>
       </p:sp>
       <p:sp>
         <p:nvSpPr>
@@ -5858,7 +5920,7 @@
           <a:bodyPr wrap="square" rtlCol="0" anchor="ctr"/>
           <a:lstStyle/>
           <a:p>
-            <a:pPr algn="ctr" indent="0" marL="0">
+            <a:pPr marL="0" indent="0" algn="ctr">
               <a:buNone/>
             </a:pPr>
             <a:r>
@@ -5897,7 +5959,7 @@
           <a:bodyPr wrap="square" rtlCol="0" anchor="ctr"/>
           <a:lstStyle/>
           <a:p>
-            <a:pPr indent="0" marL="0">
+            <a:pPr marL="0" indent="0">
               <a:buNone/>
             </a:pPr>
             <a:r>
@@ -5939,25 +6001,32 @@
             <a:prstDash val="solid"/>
           </a:ln>
           <a:effectLst>
-            <a:outerShdw sx="100000" sy="100000" kx="0" ky="0" algn="bl" rotWithShape="0" blurRad="38100" dist="25400" dir="8100000">
+            <a:outerShdw blurRad="38100" dist="25400" dir="8100000" algn="bl" rotWithShape="0">
               <a:srgbClr val="000000">
                 <a:alpha val="10000"/>
               </a:srgbClr>
             </a:outerShdw>
           </a:effectLst>
         </p:spPr>
+        <p:txBody>
+          <a:bodyPr/>
+          <a:lstStyle/>
+          <a:p>
+            <a:endParaRPr lang="en-FR"/>
+          </a:p>
+        </p:txBody>
       </p:sp>
       <p:pic>
         <p:nvPicPr>
-          <p:cNvPr id="9" name="Image 0" descr="preencoded.png">    </p:cNvPr>
+          <p:cNvPr id="9" name="Image 0" descr="preencoded.png"/>
           <p:cNvPicPr>
             <a:picLocks noChangeAspect="1"/>
           </p:cNvPicPr>
           <p:nvPr/>
         </p:nvPicPr>
         <p:blipFill>
-          <a:blip r:embed="rId1"/>
-          <a:srcRect l="0" r="0" t="0" b="0"/>
+          <a:blip r:embed="rId3"/>
+          <a:srcRect/>
           <a:stretch/>
         </p:blipFill>
         <p:spPr>
@@ -5991,7 +6060,7 @@
           <a:bodyPr wrap="square" rtlCol="0" anchor="ctr"/>
           <a:lstStyle/>
           <a:p>
-            <a:pPr indent="0" marL="0">
+            <a:pPr marL="0" indent="0">
               <a:buNone/>
             </a:pPr>
             <a:r>
@@ -6025,6 +6094,7 @@
         <a:solidFill>
           <a:srgbClr val="EAF5F4"/>
         </a:solidFill>
+        <a:effectLst/>
       </p:bgPr>
     </p:bg>
     <p:spTree>
@@ -6065,6 +6135,13 @@
             <a:prstDash val="solid"/>
           </a:ln>
         </p:spPr>
+        <p:txBody>
+          <a:bodyPr/>
+          <a:lstStyle/>
+          <a:p>
+            <a:endParaRPr lang="en-FR"/>
+          </a:p>
+        </p:txBody>
       </p:sp>
       <p:sp>
         <p:nvSpPr>
@@ -6087,7 +6164,7 @@
           <a:bodyPr wrap="square" rtlCol="0" anchor="ctr"/>
           <a:lstStyle/>
           <a:p>
-            <a:pPr indent="0" marL="0">
+            <a:pPr marL="0" indent="0">
               <a:buNone/>
             </a:pPr>
             <a:r>
@@ -6127,6 +6204,13 @@
             <a:prstDash val="solid"/>
           </a:ln>
         </p:spPr>
+        <p:txBody>
+          <a:bodyPr/>
+          <a:lstStyle/>
+          <a:p>
+            <a:endParaRPr lang="en-FR"/>
+          </a:p>
+        </p:txBody>
       </p:sp>
       <p:sp>
         <p:nvSpPr>
@@ -6152,13 +6236,20 @@
             <a:prstDash val="solid"/>
           </a:ln>
           <a:effectLst>
-            <a:outerShdw sx="100000" sy="100000" kx="0" ky="0" algn="bl" rotWithShape="0" blurRad="38100" dist="25400" dir="8100000">
+            <a:outerShdw blurRad="38100" dist="25400" dir="8100000" algn="bl" rotWithShape="0">
               <a:srgbClr val="000000">
                 <a:alpha val="10000"/>
               </a:srgbClr>
             </a:outerShdw>
           </a:effectLst>
         </p:spPr>
+        <p:txBody>
+          <a:bodyPr/>
+          <a:lstStyle/>
+          <a:p>
+            <a:endParaRPr lang="en-FR"/>
+          </a:p>
+        </p:txBody>
       </p:sp>
       <p:sp>
         <p:nvSpPr>
@@ -6181,7 +6272,7 @@
           <a:bodyPr wrap="square" rtlCol="0" anchor="ctr"/>
           <a:lstStyle/>
           <a:p>
-            <a:pPr algn="ctr" indent="0" marL="0">
+            <a:pPr marL="0" indent="0" algn="ctr">
               <a:buNone/>
             </a:pPr>
             <a:r>
@@ -6220,7 +6311,7 @@
           <a:bodyPr wrap="square" rtlCol="0" anchor="ctr"/>
           <a:lstStyle/>
           <a:p>
-            <a:pPr algn="ctr" indent="0" marL="0">
+            <a:pPr marL="0" indent="0" algn="ctr">
               <a:buNone/>
             </a:pPr>
             <a:r>
@@ -6237,7 +6328,7 @@
             <a:endParaRPr lang="en-US" sz="750" dirty="0"/>
           </a:p>
           <a:p>
-            <a:pPr algn="ctr" indent="0" marL="0">
+            <a:pPr marL="0" indent="0" algn="ctr">
               <a:buNone/>
             </a:pPr>
             <a:r>
@@ -6279,13 +6370,20 @@
             <a:prstDash val="solid"/>
           </a:ln>
           <a:effectLst>
-            <a:outerShdw sx="100000" sy="100000" kx="0" ky="0" algn="bl" rotWithShape="0" blurRad="38100" dist="25400" dir="8100000">
+            <a:outerShdw blurRad="38100" dist="25400" dir="8100000" algn="bl" rotWithShape="0">
               <a:srgbClr val="000000">
                 <a:alpha val="10000"/>
               </a:srgbClr>
             </a:outerShdw>
           </a:effectLst>
         </p:spPr>
+        <p:txBody>
+          <a:bodyPr/>
+          <a:lstStyle/>
+          <a:p>
+            <a:endParaRPr lang="en-FR"/>
+          </a:p>
+        </p:txBody>
       </p:sp>
       <p:sp>
         <p:nvSpPr>
@@ -6308,7 +6406,7 @@
           <a:bodyPr wrap="square" rtlCol="0" anchor="ctr"/>
           <a:lstStyle/>
           <a:p>
-            <a:pPr algn="ctr" indent="0" marL="0">
+            <a:pPr marL="0" indent="0" algn="ctr">
               <a:buNone/>
             </a:pPr>
             <a:r>
@@ -6347,7 +6445,7 @@
           <a:bodyPr wrap="square" rtlCol="0" anchor="ctr"/>
           <a:lstStyle/>
           <a:p>
-            <a:pPr algn="ctr" indent="0" marL="0">
+            <a:pPr marL="0" indent="0" algn="ctr">
               <a:buNone/>
             </a:pPr>
             <a:r>
@@ -6364,7 +6462,7 @@
             <a:endParaRPr lang="en-US" sz="750" dirty="0"/>
           </a:p>
           <a:p>
-            <a:pPr algn="ctr" indent="0" marL="0">
+            <a:pPr marL="0" indent="0" algn="ctr">
               <a:buNone/>
             </a:pPr>
             <a:r>
@@ -6406,13 +6504,20 @@
             <a:prstDash val="solid"/>
           </a:ln>
           <a:effectLst>
-            <a:outerShdw sx="100000" sy="100000" kx="0" ky="0" algn="bl" rotWithShape="0" blurRad="38100" dist="25400" dir="8100000">
+            <a:outerShdw blurRad="38100" dist="25400" dir="8100000" algn="bl" rotWithShape="0">
               <a:srgbClr val="000000">
                 <a:alpha val="10000"/>
               </a:srgbClr>
             </a:outerShdw>
           </a:effectLst>
         </p:spPr>
+        <p:txBody>
+          <a:bodyPr/>
+          <a:lstStyle/>
+          <a:p>
+            <a:endParaRPr lang="en-FR"/>
+          </a:p>
+        </p:txBody>
       </p:sp>
       <p:sp>
         <p:nvSpPr>
@@ -6435,7 +6540,7 @@
           <a:bodyPr wrap="square" rtlCol="0" anchor="ctr"/>
           <a:lstStyle/>
           <a:p>
-            <a:pPr algn="ctr" indent="0" marL="0">
+            <a:pPr marL="0" indent="0" algn="ctr">
               <a:buNone/>
             </a:pPr>
             <a:r>
@@ -6474,7 +6579,7 @@
           <a:bodyPr wrap="square" rtlCol="0" anchor="ctr"/>
           <a:lstStyle/>
           <a:p>
-            <a:pPr algn="ctr" indent="0" marL="0">
+            <a:pPr marL="0" indent="0" algn="ctr">
               <a:buNone/>
             </a:pPr>
             <a:r>
@@ -6491,7 +6596,7 @@
             <a:endParaRPr lang="en-US" sz="750" dirty="0"/>
           </a:p>
           <a:p>
-            <a:pPr algn="ctr" indent="0" marL="0">
+            <a:pPr marL="0" indent="0" algn="ctr">
               <a:buNone/>
             </a:pPr>
             <a:r>
@@ -6533,13 +6638,20 @@
             <a:prstDash val="solid"/>
           </a:ln>
           <a:effectLst>
-            <a:outerShdw sx="100000" sy="100000" kx="0" ky="0" algn="bl" rotWithShape="0" blurRad="38100" dist="25400" dir="8100000">
+            <a:outerShdw blurRad="38100" dist="25400" dir="8100000" algn="bl" rotWithShape="0">
               <a:srgbClr val="000000">
                 <a:alpha val="10000"/>
               </a:srgbClr>
             </a:outerShdw>
           </a:effectLst>
         </p:spPr>
+        <p:txBody>
+          <a:bodyPr/>
+          <a:lstStyle/>
+          <a:p>
+            <a:endParaRPr lang="en-FR"/>
+          </a:p>
+        </p:txBody>
       </p:sp>
       <p:sp>
         <p:nvSpPr>
@@ -6562,7 +6674,7 @@
           <a:bodyPr wrap="square" rtlCol="0" anchor="ctr"/>
           <a:lstStyle/>
           <a:p>
-            <a:pPr algn="ctr" indent="0" marL="0">
+            <a:pPr marL="0" indent="0" algn="ctr">
               <a:buNone/>
             </a:pPr>
             <a:r>
@@ -6601,7 +6713,7 @@
           <a:bodyPr wrap="square" rtlCol="0" anchor="ctr"/>
           <a:lstStyle/>
           <a:p>
-            <a:pPr algn="ctr" indent="0" marL="0">
+            <a:pPr marL="0" indent="0" algn="ctr">
               <a:buNone/>
             </a:pPr>
             <a:r>
@@ -6618,7 +6730,7 @@
             <a:endParaRPr lang="en-US" sz="750" dirty="0"/>
           </a:p>
           <a:p>
-            <a:pPr algn="ctr" indent="0" marL="0">
+            <a:pPr marL="0" indent="0" algn="ctr">
               <a:buNone/>
             </a:pPr>
             <a:r>
@@ -6660,13 +6772,20 @@
             <a:prstDash val="solid"/>
           </a:ln>
           <a:effectLst>
-            <a:outerShdw sx="100000" sy="100000" kx="0" ky="0" algn="bl" rotWithShape="0" blurRad="38100" dist="25400" dir="8100000">
+            <a:outerShdw blurRad="38100" dist="25400" dir="8100000" algn="bl" rotWithShape="0">
               <a:srgbClr val="000000">
                 <a:alpha val="10000"/>
               </a:srgbClr>
             </a:outerShdw>
           </a:effectLst>
         </p:spPr>
+        <p:txBody>
+          <a:bodyPr/>
+          <a:lstStyle/>
+          <a:p>
+            <a:endParaRPr lang="en-FR"/>
+          </a:p>
+        </p:txBody>
       </p:sp>
       <p:sp>
         <p:nvSpPr>
@@ -6689,7 +6808,7 @@
           <a:bodyPr wrap="square" rtlCol="0" anchor="ctr"/>
           <a:lstStyle/>
           <a:p>
-            <a:pPr algn="ctr" indent="0" marL="0">
+            <a:pPr marL="0" indent="0" algn="ctr">
               <a:buNone/>
             </a:pPr>
             <a:r>
@@ -6728,7 +6847,7 @@
           <a:bodyPr wrap="square" rtlCol="0" anchor="ctr"/>
           <a:lstStyle/>
           <a:p>
-            <a:pPr algn="ctr" indent="0" marL="0">
+            <a:pPr marL="0" indent="0" algn="ctr">
               <a:buNone/>
             </a:pPr>
             <a:r>
@@ -6745,7 +6864,7 @@
             <a:endParaRPr lang="en-US" sz="750" dirty="0"/>
           </a:p>
           <a:p>
-            <a:pPr algn="ctr" indent="0" marL="0">
+            <a:pPr marL="0" indent="0" algn="ctr">
               <a:buNone/>
             </a:pPr>
             <a:r>
@@ -6787,13 +6906,20 @@
             <a:prstDash val="solid"/>
           </a:ln>
           <a:effectLst>
-            <a:outerShdw sx="100000" sy="100000" kx="0" ky="0" algn="bl" rotWithShape="0" blurRad="38100" dist="25400" dir="8100000">
+            <a:outerShdw blurRad="38100" dist="25400" dir="8100000" algn="bl" rotWithShape="0">
               <a:srgbClr val="000000">
                 <a:alpha val="10000"/>
               </a:srgbClr>
             </a:outerShdw>
           </a:effectLst>
         </p:spPr>
+        <p:txBody>
+          <a:bodyPr/>
+          <a:lstStyle/>
+          <a:p>
+            <a:endParaRPr lang="en-FR"/>
+          </a:p>
+        </p:txBody>
       </p:sp>
       <p:sp>
         <p:nvSpPr>
@@ -6819,6 +6945,13 @@
             <a:prstDash val="solid"/>
           </a:ln>
         </p:spPr>
+        <p:txBody>
+          <a:bodyPr/>
+          <a:lstStyle/>
+          <a:p>
+            <a:endParaRPr lang="en-FR"/>
+          </a:p>
+        </p:txBody>
       </p:sp>
       <p:sp>
         <p:nvSpPr>
@@ -6841,7 +6974,7 @@
           <a:bodyPr wrap="square" rtlCol="0" anchor="ctr"/>
           <a:lstStyle/>
           <a:p>
-            <a:pPr indent="0" marL="0">
+            <a:pPr marL="0" indent="0">
               <a:buNone/>
             </a:pPr>
             <a:r>
@@ -6880,7 +7013,7 @@
           <a:bodyPr wrap="square" rtlCol="0" anchor="ctr"/>
           <a:lstStyle/>
           <a:p>
-            <a:pPr indent="0" marL="0">
+            <a:pPr marL="0" indent="0">
               <a:buNone/>
             </a:pPr>
             <a:r>
@@ -6922,13 +7055,20 @@
             <a:prstDash val="solid"/>
           </a:ln>
           <a:effectLst>
-            <a:outerShdw sx="100000" sy="100000" kx="0" ky="0" algn="bl" rotWithShape="0" blurRad="38100" dist="25400" dir="8100000">
+            <a:outerShdw blurRad="38100" dist="25400" dir="8100000" algn="bl" rotWithShape="0">
               <a:srgbClr val="000000">
                 <a:alpha val="10000"/>
               </a:srgbClr>
             </a:outerShdw>
           </a:effectLst>
         </p:spPr>
+        <p:txBody>
+          <a:bodyPr/>
+          <a:lstStyle/>
+          <a:p>
+            <a:endParaRPr lang="en-FR"/>
+          </a:p>
+        </p:txBody>
       </p:sp>
       <p:sp>
         <p:nvSpPr>
@@ -6954,6 +7094,13 @@
             <a:prstDash val="solid"/>
           </a:ln>
         </p:spPr>
+        <p:txBody>
+          <a:bodyPr/>
+          <a:lstStyle/>
+          <a:p>
+            <a:endParaRPr lang="en-FR"/>
+          </a:p>
+        </p:txBody>
       </p:sp>
       <p:sp>
         <p:nvSpPr>
@@ -6976,7 +7123,7 @@
           <a:bodyPr wrap="square" rtlCol="0" anchor="ctr"/>
           <a:lstStyle/>
           <a:p>
-            <a:pPr indent="0" marL="0">
+            <a:pPr marL="0" indent="0">
               <a:buNone/>
             </a:pPr>
             <a:r>
@@ -7015,7 +7162,7 @@
           <a:bodyPr wrap="square" rtlCol="0" anchor="ctr"/>
           <a:lstStyle/>
           <a:p>
-            <a:pPr indent="0" marL="0">
+            <a:pPr marL="0" indent="0">
               <a:buNone/>
             </a:pPr>
             <a:r>
@@ -7057,13 +7204,20 @@
             <a:prstDash val="solid"/>
           </a:ln>
           <a:effectLst>
-            <a:outerShdw sx="100000" sy="100000" kx="0" ky="0" algn="bl" rotWithShape="0" blurRad="38100" dist="25400" dir="8100000">
+            <a:outerShdw blurRad="38100" dist="25400" dir="8100000" algn="bl" rotWithShape="0">
               <a:srgbClr val="000000">
                 <a:alpha val="10000"/>
               </a:srgbClr>
             </a:outerShdw>
           </a:effectLst>
         </p:spPr>
+        <p:txBody>
+          <a:bodyPr/>
+          <a:lstStyle/>
+          <a:p>
+            <a:endParaRPr lang="en-FR"/>
+          </a:p>
+        </p:txBody>
       </p:sp>
       <p:sp>
         <p:nvSpPr>
@@ -7089,6 +7243,13 @@
             <a:prstDash val="solid"/>
           </a:ln>
         </p:spPr>
+        <p:txBody>
+          <a:bodyPr/>
+          <a:lstStyle/>
+          <a:p>
+            <a:endParaRPr lang="en-FR"/>
+          </a:p>
+        </p:txBody>
       </p:sp>
       <p:sp>
         <p:nvSpPr>
@@ -7111,7 +7272,7 @@
           <a:bodyPr wrap="square" rtlCol="0" anchor="ctr"/>
           <a:lstStyle/>
           <a:p>
-            <a:pPr indent="0" marL="0">
+            <a:pPr marL="0" indent="0">
               <a:buNone/>
             </a:pPr>
             <a:r>
@@ -7150,7 +7311,7 @@
           <a:bodyPr wrap="square" rtlCol="0" anchor="ctr"/>
           <a:lstStyle/>
           <a:p>
-            <a:pPr indent="0" marL="0">
+            <a:pPr marL="0" indent="0">
               <a:buNone/>
             </a:pPr>
             <a:r>
@@ -7192,13 +7353,20 @@
             <a:prstDash val="solid"/>
           </a:ln>
           <a:effectLst>
-            <a:outerShdw sx="100000" sy="100000" kx="0" ky="0" algn="bl" rotWithShape="0" blurRad="38100" dist="25400" dir="8100000">
+            <a:outerShdw blurRad="38100" dist="25400" dir="8100000" algn="bl" rotWithShape="0">
               <a:srgbClr val="000000">
                 <a:alpha val="10000"/>
               </a:srgbClr>
             </a:outerShdw>
           </a:effectLst>
         </p:spPr>
+        <p:txBody>
+          <a:bodyPr/>
+          <a:lstStyle/>
+          <a:p>
+            <a:endParaRPr lang="en-FR"/>
+          </a:p>
+        </p:txBody>
       </p:sp>
       <p:sp>
         <p:nvSpPr>
@@ -7221,7 +7389,7 @@
           <a:bodyPr wrap="square" rtlCol="0" anchor="ctr"/>
           <a:lstStyle/>
           <a:p>
-            <a:pPr indent="0" marL="0">
+            <a:pPr marL="0" indent="0">
               <a:buNone/>
             </a:pPr>
             <a:r>
@@ -7260,7 +7428,7 @@
           <a:bodyPr wrap="square" rtlCol="0" anchor="ctr"/>
           <a:lstStyle/>
           <a:p>
-            <a:pPr indent="0" marL="0">
+            <a:pPr marL="0" indent="0">
               <a:buNone/>
             </a:pPr>
             <a:r>
@@ -7272,7 +7440,29 @@
                 <a:ea typeface="Arial" pitchFamily="34" charset="-122"/>
                 <a:cs typeface="Arial" pitchFamily="34" charset="-120"/>
               </a:rPr>
-              <a:t>Ajout données population INSEE → transactions / 1 000 hab.  ·  Intégration historique DVF 2018-2023  ·  Analyse saisonnalité  ·  Dashboard interactif</a:t>
+              <a:t>Ajout données population INSEE → transactions / 1 000 hab.  ·  Intégration historique DVF 2018-2023  ·  Analyse </a:t>
+            </a:r>
+            <a:r>
+              <a:rPr lang="en-US" sz="850" dirty="0" err="1">
+                <a:solidFill>
+                  <a:srgbClr val="546E6E"/>
+                </a:solidFill>
+                <a:latin typeface="Arial" pitchFamily="34" charset="0"/>
+                <a:ea typeface="Arial" pitchFamily="34" charset="-122"/>
+                <a:cs typeface="Arial" pitchFamily="34" charset="-120"/>
+              </a:rPr>
+              <a:t>saisonnalité</a:t>
+            </a:r>
+            <a:r>
+              <a:rPr lang="en-US" sz="850" dirty="0">
+                <a:solidFill>
+                  <a:srgbClr val="546E6E"/>
+                </a:solidFill>
+                <a:latin typeface="Arial" pitchFamily="34" charset="0"/>
+                <a:ea typeface="Arial" pitchFamily="34" charset="-122"/>
+                <a:cs typeface="Arial" pitchFamily="34" charset="-120"/>
+              </a:rPr>
+              <a:t> </a:t>
             </a:r>
             <a:endParaRPr lang="en-US" sz="850" dirty="0"/>
           </a:p>
@@ -7294,6 +7484,7 @@
         <a:solidFill>
           <a:srgbClr val="EAF5F4"/>
         </a:solidFill>
+        <a:effectLst/>
       </p:bgPr>
     </p:bg>
     <p:spTree>
@@ -7334,6 +7525,13 @@
             <a:prstDash val="solid"/>
           </a:ln>
         </p:spPr>
+        <p:txBody>
+          <a:bodyPr/>
+          <a:lstStyle/>
+          <a:p>
+            <a:endParaRPr lang="en-FR"/>
+          </a:p>
+        </p:txBody>
       </p:sp>
       <p:sp>
         <p:nvSpPr>
@@ -7356,7 +7554,7 @@
           <a:bodyPr wrap="square" rtlCol="0" anchor="ctr"/>
           <a:lstStyle/>
           <a:p>
-            <a:pPr indent="0" marL="0">
+            <a:pPr marL="0" indent="0">
               <a:buNone/>
             </a:pPr>
             <a:r>
@@ -7396,6 +7594,13 @@
             <a:prstDash val="solid"/>
           </a:ln>
         </p:spPr>
+        <p:txBody>
+          <a:bodyPr/>
+          <a:lstStyle/>
+          <a:p>
+            <a:endParaRPr lang="en-FR"/>
+          </a:p>
+        </p:txBody>
       </p:sp>
       <p:sp>
         <p:nvSpPr>
@@ -7421,13 +7626,20 @@
             <a:prstDash val="solid"/>
           </a:ln>
           <a:effectLst>
-            <a:outerShdw sx="100000" sy="100000" kx="0" ky="0" algn="bl" rotWithShape="0" blurRad="38100" dist="25400" dir="8100000">
+            <a:outerShdw blurRad="38100" dist="25400" dir="8100000" algn="bl" rotWithShape="0">
               <a:srgbClr val="000000">
                 <a:alpha val="10000"/>
               </a:srgbClr>
             </a:outerShdw>
           </a:effectLst>
         </p:spPr>
+        <p:txBody>
+          <a:bodyPr/>
+          <a:lstStyle/>
+          <a:p>
+            <a:endParaRPr lang="en-FR"/>
+          </a:p>
+        </p:txBody>
       </p:sp>
       <p:sp>
         <p:nvSpPr>
@@ -7453,6 +7665,13 @@
             <a:prstDash val="solid"/>
           </a:ln>
         </p:spPr>
+        <p:txBody>
+          <a:bodyPr/>
+          <a:lstStyle/>
+          <a:p>
+            <a:endParaRPr lang="en-FR"/>
+          </a:p>
+        </p:txBody>
       </p:sp>
       <p:sp>
         <p:nvSpPr>
@@ -7475,7 +7694,7 @@
           <a:bodyPr wrap="square" rtlCol="0" anchor="ctr"/>
           <a:lstStyle/>
           <a:p>
-            <a:pPr indent="0" marL="0">
+            <a:pPr marL="0" indent="0">
               <a:buNone/>
             </a:pPr>
             <a:r>
@@ -7517,13 +7736,20 @@
             <a:prstDash val="solid"/>
           </a:ln>
           <a:effectLst>
-            <a:outerShdw sx="100000" sy="100000" kx="0" ky="0" algn="bl" rotWithShape="0" blurRad="38100" dist="25400" dir="8100000">
+            <a:outerShdw blurRad="38100" dist="25400" dir="8100000" algn="bl" rotWithShape="0">
               <a:srgbClr val="000000">
                 <a:alpha val="10000"/>
               </a:srgbClr>
             </a:outerShdw>
           </a:effectLst>
         </p:spPr>
+        <p:txBody>
+          <a:bodyPr/>
+          <a:lstStyle/>
+          <a:p>
+            <a:endParaRPr lang="en-FR"/>
+          </a:p>
+        </p:txBody>
       </p:sp>
       <p:sp>
         <p:nvSpPr>
@@ -7549,6 +7775,13 @@
             <a:prstDash val="solid"/>
           </a:ln>
         </p:spPr>
+        <p:txBody>
+          <a:bodyPr/>
+          <a:lstStyle/>
+          <a:p>
+            <a:endParaRPr lang="en-FR"/>
+          </a:p>
+        </p:txBody>
       </p:sp>
       <p:sp>
         <p:nvSpPr>
@@ -7571,7 +7804,7 @@
           <a:bodyPr wrap="square" rtlCol="0" anchor="ctr"/>
           <a:lstStyle/>
           <a:p>
-            <a:pPr indent="0" marL="0">
+            <a:pPr marL="0" indent="0">
               <a:buNone/>
             </a:pPr>
             <a:r>
@@ -7610,7 +7843,7 @@
           <a:bodyPr wrap="square" rtlCol="0" anchor="ctr"/>
           <a:lstStyle/>
           <a:p>
-            <a:pPr indent="0" marL="0">
+            <a:pPr marL="0" indent="0">
               <a:buNone/>
             </a:pPr>
             <a:r>
@@ -7652,13 +7885,20 @@
             <a:prstDash val="solid"/>
           </a:ln>
           <a:effectLst>
-            <a:outerShdw sx="100000" sy="100000" kx="0" ky="0" algn="bl" rotWithShape="0" blurRad="38100" dist="25400" dir="8100000">
+            <a:outerShdw blurRad="38100" dist="25400" dir="8100000" algn="bl" rotWithShape="0">
               <a:srgbClr val="000000">
                 <a:alpha val="10000"/>
               </a:srgbClr>
             </a:outerShdw>
           </a:effectLst>
         </p:spPr>
+        <p:txBody>
+          <a:bodyPr/>
+          <a:lstStyle/>
+          <a:p>
+            <a:endParaRPr lang="en-FR"/>
+          </a:p>
+        </p:txBody>
       </p:sp>
       <p:sp>
         <p:nvSpPr>
@@ -7684,6 +7924,13 @@
             <a:prstDash val="solid"/>
           </a:ln>
         </p:spPr>
+        <p:txBody>
+          <a:bodyPr/>
+          <a:lstStyle/>
+          <a:p>
+            <a:endParaRPr lang="en-FR"/>
+          </a:p>
+        </p:txBody>
       </p:sp>
       <p:sp>
         <p:nvSpPr>
@@ -7706,7 +7953,7 @@
           <a:bodyPr wrap="square" rtlCol="0" anchor="ctr"/>
           <a:lstStyle/>
           <a:p>
-            <a:pPr indent="0" marL="0">
+            <a:pPr marL="0" indent="0">
               <a:buNone/>
             </a:pPr>
             <a:r>
@@ -7745,9 +7992,20 @@
           <a:bodyPr wrap="square" rtlCol="0" anchor="ctr"/>
           <a:lstStyle/>
           <a:p>
-            <a:pPr indent="0" marL="0">
+            <a:pPr marL="0" indent="0">
               <a:buNone/>
             </a:pPr>
+            <a:r>
+              <a:rPr lang="en-US" sz="1000" dirty="0" err="1">
+                <a:solidFill>
+                  <a:srgbClr val="1C3838"/>
+                </a:solidFill>
+                <a:latin typeface="Arial" pitchFamily="34" charset="0"/>
+                <a:ea typeface="Arial" pitchFamily="34" charset="-122"/>
+                <a:cs typeface="Arial" pitchFamily="34" charset="-120"/>
+              </a:rPr>
+              <a:t>Demandes</a:t>
+            </a:r>
             <a:r>
               <a:rPr lang="en-US" sz="1000" dirty="0">
                 <a:solidFill>
@@ -7757,7 +8015,7 @@
                 <a:ea typeface="Arial" pitchFamily="34" charset="-122"/>
                 <a:cs typeface="Arial" pitchFamily="34" charset="-120"/>
               </a:rPr>
-              <a:t>Fichier DVF — Demandes de Valeurs Foncières, fourni par l'État, données portant sur l'année 2020.</a:t>
+              <a:t> de Valeurs Foncières, fourni par l'État, données portant sur l'année 2020.</a:t>
             </a:r>
             <a:endParaRPr lang="en-US" sz="1000" dirty="0"/>
           </a:p>
@@ -7787,13 +8045,20 @@
             <a:prstDash val="solid"/>
           </a:ln>
           <a:effectLst>
-            <a:outerShdw sx="100000" sy="100000" kx="0" ky="0" algn="bl" rotWithShape="0" blurRad="38100" dist="25400" dir="8100000">
+            <a:outerShdw blurRad="38100" dist="25400" dir="8100000" algn="bl" rotWithShape="0">
               <a:srgbClr val="000000">
                 <a:alpha val="10000"/>
               </a:srgbClr>
             </a:outerShdw>
           </a:effectLst>
         </p:spPr>
+        <p:txBody>
+          <a:bodyPr/>
+          <a:lstStyle/>
+          <a:p>
+            <a:endParaRPr lang="en-FR"/>
+          </a:p>
+        </p:txBody>
       </p:sp>
       <p:sp>
         <p:nvSpPr>
@@ -7819,6 +8084,13 @@
             <a:prstDash val="solid"/>
           </a:ln>
         </p:spPr>
+        <p:txBody>
+          <a:bodyPr/>
+          <a:lstStyle/>
+          <a:p>
+            <a:endParaRPr lang="en-FR"/>
+          </a:p>
+        </p:txBody>
       </p:sp>
       <p:sp>
         <p:nvSpPr>
@@ -7841,7 +8113,7 @@
           <a:bodyPr wrap="square" rtlCol="0" anchor="ctr"/>
           <a:lstStyle/>
           <a:p>
-            <a:pPr indent="0" marL="0">
+            <a:pPr marL="0" indent="0">
               <a:buNone/>
             </a:pPr>
             <a:r>
@@ -7880,7 +8152,7 @@
           <a:bodyPr wrap="square" rtlCol="0" anchor="ctr"/>
           <a:lstStyle/>
           <a:p>
-            <a:pPr indent="0" marL="0">
+            <a:pPr marL="0" indent="0">
               <a:buNone/>
             </a:pPr>
             <a:r>
@@ -7892,7 +8164,29 @@
                 <a:ea typeface="Arial" pitchFamily="34" charset="-122"/>
                 <a:cs typeface="Arial" pitchFamily="34" charset="-120"/>
               </a:rPr>
-              <a:t>Compréhension → Dictionnaire → Schéma 3NF → Création BDD SQLite → Import CSV → Requêtes SQL analytiques.</a:t>
+              <a:t>Compréhension → Dictionnaire → </a:t>
+            </a:r>
+            <a:r>
+              <a:rPr lang="en-US" sz="1000" dirty="0" err="1">
+                <a:solidFill>
+                  <a:srgbClr val="1C3838"/>
+                </a:solidFill>
+                <a:latin typeface="Arial" pitchFamily="34" charset="0"/>
+                <a:ea typeface="Arial" pitchFamily="34" charset="-122"/>
+                <a:cs typeface="Arial" pitchFamily="34" charset="-120"/>
+              </a:rPr>
+              <a:t>Normalisation</a:t>
+            </a:r>
+            <a:r>
+              <a:rPr lang="en-US" sz="1000" dirty="0">
+                <a:solidFill>
+                  <a:srgbClr val="1C3838"/>
+                </a:solidFill>
+                <a:latin typeface="Arial" pitchFamily="34" charset="0"/>
+                <a:ea typeface="Arial" pitchFamily="34" charset="-122"/>
+                <a:cs typeface="Arial" pitchFamily="34" charset="-120"/>
+              </a:rPr>
+              <a:t>→ Création BDD SQLite → Import CSV → Requêtes SQL analytiques.</a:t>
             </a:r>
             <a:endParaRPr lang="en-US" sz="1000" dirty="0"/>
           </a:p>
@@ -7914,6 +8208,7 @@
         <a:solidFill>
           <a:srgbClr val="EAF5F4"/>
         </a:solidFill>
+        <a:effectLst/>
       </p:bgPr>
     </p:bg>
     <p:spTree>
@@ -7954,6 +8249,13 @@
             <a:prstDash val="solid"/>
           </a:ln>
         </p:spPr>
+        <p:txBody>
+          <a:bodyPr/>
+          <a:lstStyle/>
+          <a:p>
+            <a:endParaRPr lang="en-FR"/>
+          </a:p>
+        </p:txBody>
       </p:sp>
       <p:sp>
         <p:nvSpPr>
@@ -7976,7 +8278,7 @@
           <a:bodyPr wrap="square" rtlCol="0" anchor="ctr"/>
           <a:lstStyle/>
           <a:p>
-            <a:pPr indent="0" marL="0">
+            <a:pPr marL="0" indent="0">
               <a:buNone/>
             </a:pPr>
             <a:r>
@@ -8016,2156 +8318,1033 @@
             <a:prstDash val="solid"/>
           </a:ln>
         </p:spPr>
-      </p:sp>
-      <p:sp>
-        <p:nvSpPr>
-          <p:cNvPr id="5" name="Shape 3"/>
-          <p:cNvSpPr/>
-          <p:nvPr/>
-        </p:nvSpPr>
-        <p:spPr>
-          <a:xfrm>
-            <a:off x="256032" y="749808"/>
+        <p:txBody>
+          <a:bodyPr/>
+          <a:lstStyle/>
+          <a:p>
+            <a:endParaRPr lang="en-FR"/>
+          </a:p>
+        </p:txBody>
+      </p:sp>
+      <p:grpSp>
+        <p:nvGrpSpPr>
+          <p:cNvPr id="68" name="Group 67">
+            <a:extLst>
+              <a:ext uri="{FF2B5EF4-FFF2-40B4-BE49-F238E27FC236}">
+                <a16:creationId xmlns:a16="http://schemas.microsoft.com/office/drawing/2014/main" id="{9640981F-BDDB-5E51-DE55-5AEC68E817CE}"/>
+              </a:ext>
+            </a:extLst>
+          </p:cNvPr>
+          <p:cNvGrpSpPr/>
+          <p:nvPr/>
+        </p:nvGrpSpPr>
+        <p:grpSpPr>
+          <a:xfrm>
+            <a:off x="2491740" y="964692"/>
             <a:ext cx="4160520" cy="4069080"/>
-          </a:xfrm>
-          <a:prstGeom prst="rect">
-            <a:avLst/>
-          </a:prstGeom>
-          <a:solidFill>
-            <a:srgbClr val="FFFFFF"/>
-          </a:solidFill>
-          <a:ln w="12700">
+            <a:chOff x="4736592" y="749808"/>
+            <a:chExt cx="4160520" cy="4069080"/>
+          </a:xfrm>
+        </p:grpSpPr>
+        <p:sp>
+          <p:nvSpPr>
+            <p:cNvPr id="41" name="Shape 39"/>
+            <p:cNvSpPr/>
+            <p:nvPr/>
+          </p:nvSpPr>
+          <p:spPr>
+            <a:xfrm>
+              <a:off x="4736592" y="749808"/>
+              <a:ext cx="4160520" cy="4069080"/>
+            </a:xfrm>
+            <a:prstGeom prst="rect">
+              <a:avLst/>
+            </a:prstGeom>
             <a:solidFill>
-              <a:srgbClr val="D0E8E6"/>
+              <a:srgbClr val="FFFFFF"/>
             </a:solidFill>
-            <a:prstDash val="solid"/>
-          </a:ln>
-          <a:effectLst>
-            <a:outerShdw sx="100000" sy="100000" kx="0" ky="0" algn="bl" rotWithShape="0" blurRad="38100" dist="25400" dir="8100000">
-              <a:srgbClr val="000000">
-                <a:alpha val="10000"/>
-              </a:srgbClr>
-            </a:outerShdw>
-          </a:effectLst>
-        </p:spPr>
-      </p:sp>
-      <p:sp>
-        <p:nvSpPr>
-          <p:cNvPr id="6" name="Shape 4"/>
-          <p:cNvSpPr/>
-          <p:nvPr/>
-        </p:nvSpPr>
-        <p:spPr>
-          <a:xfrm>
-            <a:off x="256032" y="749808"/>
-            <a:ext cx="4160520" cy="329184"/>
-          </a:xfrm>
-          <a:prstGeom prst="rect">
-            <a:avLst/>
-          </a:prstGeom>
-          <a:solidFill>
-            <a:srgbClr val="158F7E"/>
-          </a:solidFill>
-          <a:ln w="12700">
-            <a:solidFill>
-              <a:srgbClr val="158F7E"/>
-            </a:solidFill>
-            <a:prstDash val="solid"/>
-          </a:ln>
-        </p:spPr>
-      </p:sp>
-      <p:sp>
-        <p:nvSpPr>
-          <p:cNvPr id="7" name="Text 5"/>
-          <p:cNvSpPr/>
-          <p:nvPr/>
-        </p:nvSpPr>
-        <p:spPr>
-          <a:xfrm>
-            <a:off x="347472" y="749808"/>
-            <a:ext cx="3977640" cy="329184"/>
-          </a:xfrm>
-          <a:prstGeom prst="rect">
-            <a:avLst/>
-          </a:prstGeom>
-          <a:noFill/>
-          <a:ln/>
-        </p:spPr>
-        <p:txBody>
-          <a:bodyPr wrap="square" rtlCol="0" anchor="ctr"/>
-          <a:lstStyle/>
-          <a:p>
-            <a:pPr indent="0" marL="0">
-              <a:buNone/>
-            </a:pPr>
-            <a:r>
-              <a:rPr lang="en-US" sz="1050" b="1" dirty="0">
-                <a:solidFill>
-                  <a:srgbClr val="FFFFFF"/>
-                </a:solidFill>
-                <a:latin typeface="Arial" pitchFamily="34" charset="0"/>
-                <a:ea typeface="Arial" pitchFamily="34" charset="-122"/>
-                <a:cs typeface="Arial" pitchFamily="34" charset="-120"/>
-              </a:rPr>
-              <a:t>✔  Colonnes conservées</a:t>
-            </a:r>
-            <a:endParaRPr lang="en-US" sz="1050" dirty="0"/>
-          </a:p>
-        </p:txBody>
-      </p:sp>
-      <p:sp>
-        <p:nvSpPr>
-          <p:cNvPr id="8" name="Shape 6"/>
-          <p:cNvSpPr/>
-          <p:nvPr/>
-        </p:nvSpPr>
-        <p:spPr>
-          <a:xfrm>
-            <a:off x="320040" y="1143000"/>
-            <a:ext cx="4041648" cy="310896"/>
-          </a:xfrm>
-          <a:prstGeom prst="rect">
-            <a:avLst/>
-          </a:prstGeom>
-          <a:solidFill>
-            <a:srgbClr val="F3FAFA"/>
-          </a:solidFill>
-          <a:ln w="5080">
-            <a:solidFill>
-              <a:srgbClr val="E0EEEE"/>
-            </a:solidFill>
-            <a:prstDash val="solid"/>
-          </a:ln>
-        </p:spPr>
-      </p:sp>
-      <p:sp>
-        <p:nvSpPr>
-          <p:cNvPr id="9" name="Text 7"/>
-          <p:cNvSpPr/>
-          <p:nvPr/>
-        </p:nvSpPr>
-        <p:spPr>
-          <a:xfrm>
-            <a:off x="365760" y="1152144"/>
-            <a:ext cx="1828800" cy="274320"/>
-          </a:xfrm>
-          <a:prstGeom prst="rect">
-            <a:avLst/>
-          </a:prstGeom>
-          <a:noFill/>
-          <a:ln/>
-        </p:spPr>
-        <p:txBody>
-          <a:bodyPr wrap="square" rtlCol="0" anchor="ctr"/>
-          <a:lstStyle/>
-          <a:p>
-            <a:pPr indent="0" marL="0">
-              <a:buNone/>
-            </a:pPr>
-            <a:r>
-              <a:rPr lang="en-US" sz="850" b="1" dirty="0">
-                <a:solidFill>
-                  <a:srgbClr val="158F7E"/>
-                </a:solidFill>
-                <a:latin typeface="Arial" pitchFamily="34" charset="0"/>
-                <a:ea typeface="Arial" pitchFamily="34" charset="-122"/>
-                <a:cs typeface="Arial" pitchFamily="34" charset="-120"/>
-              </a:rPr>
-              <a:t>Id_bien</a:t>
-            </a:r>
-            <a:endParaRPr lang="en-US" sz="850" dirty="0"/>
-          </a:p>
-        </p:txBody>
-      </p:sp>
-      <p:sp>
-        <p:nvSpPr>
-          <p:cNvPr id="10" name="Text 8"/>
-          <p:cNvSpPr/>
-          <p:nvPr/>
-        </p:nvSpPr>
-        <p:spPr>
-          <a:xfrm>
-            <a:off x="2212848" y="1152144"/>
-            <a:ext cx="2011680" cy="274320"/>
-          </a:xfrm>
-          <a:prstGeom prst="rect">
-            <a:avLst/>
-          </a:prstGeom>
-          <a:noFill/>
-          <a:ln/>
-        </p:spPr>
-        <p:txBody>
-          <a:bodyPr wrap="square" rtlCol="0" anchor="ctr"/>
-          <a:lstStyle/>
-          <a:p>
-            <a:pPr indent="0" marL="0">
-              <a:buNone/>
-            </a:pPr>
-            <a:r>
-              <a:rPr lang="en-US" sz="800" dirty="0">
-                <a:solidFill>
-                  <a:srgbClr val="546E6E"/>
-                </a:solidFill>
-                <a:latin typeface="Arial" pitchFamily="34" charset="0"/>
-                <a:ea typeface="Arial" pitchFamily="34" charset="-122"/>
-                <a:cs typeface="Arial" pitchFamily="34" charset="-120"/>
-              </a:rPr>
-              <a:t>PK auto-incrémenté (bien_immo)</a:t>
-            </a:r>
-            <a:endParaRPr lang="en-US" sz="800" dirty="0"/>
-          </a:p>
-        </p:txBody>
-      </p:sp>
-      <p:sp>
-        <p:nvSpPr>
-          <p:cNvPr id="11" name="Shape 9"/>
-          <p:cNvSpPr/>
-          <p:nvPr/>
-        </p:nvSpPr>
-        <p:spPr>
-          <a:xfrm>
-            <a:off x="320040" y="1472184"/>
-            <a:ext cx="4041648" cy="310896"/>
-          </a:xfrm>
-          <a:prstGeom prst="rect">
-            <a:avLst/>
-          </a:prstGeom>
-          <a:solidFill>
-            <a:srgbClr val="FFFFFF"/>
-          </a:solidFill>
-          <a:ln w="5080">
-            <a:solidFill>
-              <a:srgbClr val="E0EEEE"/>
-            </a:solidFill>
-            <a:prstDash val="solid"/>
-          </a:ln>
-        </p:spPr>
-      </p:sp>
-      <p:sp>
-        <p:nvSpPr>
-          <p:cNvPr id="12" name="Text 10"/>
-          <p:cNvSpPr/>
-          <p:nvPr/>
-        </p:nvSpPr>
-        <p:spPr>
-          <a:xfrm>
-            <a:off x="365760" y="1481328"/>
-            <a:ext cx="1828800" cy="274320"/>
-          </a:xfrm>
-          <a:prstGeom prst="rect">
-            <a:avLst/>
-          </a:prstGeom>
-          <a:noFill/>
-          <a:ln/>
-        </p:spPr>
-        <p:txBody>
-          <a:bodyPr wrap="square" rtlCol="0" anchor="ctr"/>
-          <a:lstStyle/>
-          <a:p>
-            <a:pPr indent="0" marL="0">
-              <a:buNone/>
-            </a:pPr>
-            <a:r>
-              <a:rPr lang="en-US" sz="850" b="1" dirty="0">
-                <a:solidFill>
-                  <a:srgbClr val="158F7E"/>
-                </a:solidFill>
-                <a:latin typeface="Arial" pitchFamily="34" charset="0"/>
-                <a:ea typeface="Arial" pitchFamily="34" charset="-122"/>
-                <a:cs typeface="Arial" pitchFamily="34" charset="-120"/>
-              </a:rPr>
-              <a:t>id_codedep_codecommune</a:t>
-            </a:r>
-            <a:endParaRPr lang="en-US" sz="850" dirty="0"/>
-          </a:p>
-        </p:txBody>
-      </p:sp>
-      <p:sp>
-        <p:nvSpPr>
-          <p:cNvPr id="13" name="Text 11"/>
-          <p:cNvSpPr/>
-          <p:nvPr/>
-        </p:nvSpPr>
-        <p:spPr>
-          <a:xfrm>
-            <a:off x="2212848" y="1481328"/>
-            <a:ext cx="2011680" cy="274320"/>
-          </a:xfrm>
-          <a:prstGeom prst="rect">
-            <a:avLst/>
-          </a:prstGeom>
-          <a:noFill/>
-          <a:ln/>
-        </p:spPr>
-        <p:txBody>
-          <a:bodyPr wrap="square" rtlCol="0" anchor="ctr"/>
-          <a:lstStyle/>
-          <a:p>
-            <a:pPr indent="0" marL="0">
-              <a:buNone/>
-            </a:pPr>
-            <a:r>
-              <a:rPr lang="en-US" sz="800" dirty="0">
-                <a:solidFill>
-                  <a:srgbClr val="546E6E"/>
-                </a:solidFill>
-                <a:latin typeface="Arial" pitchFamily="34" charset="0"/>
-                <a:ea typeface="Arial" pitchFamily="34" charset="-122"/>
-                <a:cs typeface="Arial" pitchFamily="34" charset="-120"/>
-              </a:rPr>
-              <a:t>PK concaténée — code_dep + code_commune</a:t>
-            </a:r>
-            <a:endParaRPr lang="en-US" sz="800" dirty="0"/>
-          </a:p>
-        </p:txBody>
-      </p:sp>
-      <p:sp>
-        <p:nvSpPr>
-          <p:cNvPr id="14" name="Shape 12"/>
-          <p:cNvSpPr/>
-          <p:nvPr/>
-        </p:nvSpPr>
-        <p:spPr>
-          <a:xfrm>
-            <a:off x="320040" y="1801368"/>
-            <a:ext cx="4041648" cy="310896"/>
-          </a:xfrm>
-          <a:prstGeom prst="rect">
-            <a:avLst/>
-          </a:prstGeom>
-          <a:solidFill>
-            <a:srgbClr val="F3FAFA"/>
-          </a:solidFill>
-          <a:ln w="5080">
-            <a:solidFill>
-              <a:srgbClr val="E0EEEE"/>
-            </a:solidFill>
-            <a:prstDash val="solid"/>
-          </a:ln>
-        </p:spPr>
-      </p:sp>
-      <p:sp>
-        <p:nvSpPr>
-          <p:cNvPr id="15" name="Text 13"/>
-          <p:cNvSpPr/>
-          <p:nvPr/>
-        </p:nvSpPr>
-        <p:spPr>
-          <a:xfrm>
-            <a:off x="365760" y="1810512"/>
-            <a:ext cx="1828800" cy="274320"/>
-          </a:xfrm>
-          <a:prstGeom prst="rect">
-            <a:avLst/>
-          </a:prstGeom>
-          <a:noFill/>
-          <a:ln/>
-        </p:spPr>
-        <p:txBody>
-          <a:bodyPr wrap="square" rtlCol="0" anchor="ctr"/>
-          <a:lstStyle/>
-          <a:p>
-            <a:pPr indent="0" marL="0">
-              <a:buNone/>
-            </a:pPr>
-            <a:r>
-              <a:rPr lang="en-US" sz="850" b="1" dirty="0">
-                <a:solidFill>
-                  <a:srgbClr val="158F7E"/>
-                </a:solidFill>
-                <a:latin typeface="Arial" pitchFamily="34" charset="0"/>
-                <a:ea typeface="Arial" pitchFamily="34" charset="-122"/>
-                <a:cs typeface="Arial" pitchFamily="34" charset="-120"/>
-              </a:rPr>
-              <a:t>Code_departement</a:t>
-            </a:r>
-            <a:endParaRPr lang="en-US" sz="850" dirty="0"/>
-          </a:p>
-        </p:txBody>
-      </p:sp>
-      <p:sp>
-        <p:nvSpPr>
-          <p:cNvPr id="16" name="Text 14"/>
-          <p:cNvSpPr/>
-          <p:nvPr/>
-        </p:nvSpPr>
-        <p:spPr>
-          <a:xfrm>
-            <a:off x="2212848" y="1810512"/>
-            <a:ext cx="2011680" cy="274320"/>
-          </a:xfrm>
-          <a:prstGeom prst="rect">
-            <a:avLst/>
-          </a:prstGeom>
-          <a:noFill/>
-          <a:ln/>
-        </p:spPr>
-        <p:txBody>
-          <a:bodyPr wrap="square" rtlCol="0" anchor="ctr"/>
-          <a:lstStyle/>
-          <a:p>
-            <a:pPr indent="0" marL="0">
-              <a:buNone/>
-            </a:pPr>
-            <a:r>
-              <a:rPr lang="en-US" sz="800" dirty="0">
-                <a:solidFill>
-                  <a:srgbClr val="546E6E"/>
-                </a:solidFill>
-                <a:latin typeface="Arial" pitchFamily="34" charset="0"/>
-                <a:ea typeface="Arial" pitchFamily="34" charset="-122"/>
-                <a:cs typeface="Arial" pitchFamily="34" charset="-120"/>
-              </a:rPr>
-              <a:t>Nécessaire pour les requêtes géographiques</a:t>
-            </a:r>
-            <a:endParaRPr lang="en-US" sz="800" dirty="0"/>
-          </a:p>
-        </p:txBody>
-      </p:sp>
-      <p:sp>
-        <p:nvSpPr>
-          <p:cNvPr id="17" name="Shape 15"/>
-          <p:cNvSpPr/>
-          <p:nvPr/>
-        </p:nvSpPr>
-        <p:spPr>
-          <a:xfrm>
-            <a:off x="320040" y="2130552"/>
-            <a:ext cx="4041648" cy="310896"/>
-          </a:xfrm>
-          <a:prstGeom prst="rect">
-            <a:avLst/>
-          </a:prstGeom>
-          <a:solidFill>
-            <a:srgbClr val="FFFFFF"/>
-          </a:solidFill>
-          <a:ln w="5080">
-            <a:solidFill>
-              <a:srgbClr val="E0EEEE"/>
-            </a:solidFill>
-            <a:prstDash val="solid"/>
-          </a:ln>
-        </p:spPr>
-      </p:sp>
-      <p:sp>
-        <p:nvSpPr>
-          <p:cNvPr id="18" name="Text 16"/>
-          <p:cNvSpPr/>
-          <p:nvPr/>
-        </p:nvSpPr>
-        <p:spPr>
-          <a:xfrm>
-            <a:off x="365760" y="2139696"/>
-            <a:ext cx="1828800" cy="274320"/>
-          </a:xfrm>
-          <a:prstGeom prst="rect">
-            <a:avLst/>
-          </a:prstGeom>
-          <a:noFill/>
-          <a:ln/>
-        </p:spPr>
-        <p:txBody>
-          <a:bodyPr wrap="square" rtlCol="0" anchor="ctr"/>
-          <a:lstStyle/>
-          <a:p>
-            <a:pPr indent="0" marL="0">
-              <a:buNone/>
-            </a:pPr>
-            <a:r>
-              <a:rPr lang="en-US" sz="850" b="1" dirty="0">
-                <a:solidFill>
-                  <a:srgbClr val="158F7E"/>
-                </a:solidFill>
-                <a:latin typeface="Arial" pitchFamily="34" charset="0"/>
-                <a:ea typeface="Arial" pitchFamily="34" charset="-122"/>
-                <a:cs typeface="Arial" pitchFamily="34" charset="-120"/>
-              </a:rPr>
-              <a:t>Commune</a:t>
-            </a:r>
-            <a:endParaRPr lang="en-US" sz="850" dirty="0"/>
-          </a:p>
-        </p:txBody>
-      </p:sp>
-      <p:sp>
-        <p:nvSpPr>
-          <p:cNvPr id="19" name="Text 17"/>
-          <p:cNvSpPr/>
-          <p:nvPr/>
-        </p:nvSpPr>
-        <p:spPr>
-          <a:xfrm>
-            <a:off x="2212848" y="2139696"/>
-            <a:ext cx="2011680" cy="274320"/>
-          </a:xfrm>
-          <a:prstGeom prst="rect">
-            <a:avLst/>
-          </a:prstGeom>
-          <a:noFill/>
-          <a:ln/>
-        </p:spPr>
-        <p:txBody>
-          <a:bodyPr wrap="square" rtlCol="0" anchor="ctr"/>
-          <a:lstStyle/>
-          <a:p>
-            <a:pPr indent="0" marL="0">
-              <a:buNone/>
-            </a:pPr>
-            <a:r>
-              <a:rPr lang="en-US" sz="800" dirty="0">
-                <a:solidFill>
-                  <a:srgbClr val="546E6E"/>
-                </a:solidFill>
-                <a:latin typeface="Arial" pitchFamily="34" charset="0"/>
-                <a:ea typeface="Arial" pitchFamily="34" charset="-122"/>
-                <a:cs typeface="Arial" pitchFamily="34" charset="-120"/>
-              </a:rPr>
-              <a:t>Nom de la commune</a:t>
-            </a:r>
-            <a:endParaRPr lang="en-US" sz="800" dirty="0"/>
-          </a:p>
-        </p:txBody>
-      </p:sp>
-      <p:sp>
-        <p:nvSpPr>
-          <p:cNvPr id="20" name="Shape 18"/>
-          <p:cNvSpPr/>
-          <p:nvPr/>
-        </p:nvSpPr>
-        <p:spPr>
-          <a:xfrm>
-            <a:off x="320040" y="2459736"/>
-            <a:ext cx="4041648" cy="310896"/>
-          </a:xfrm>
-          <a:prstGeom prst="rect">
-            <a:avLst/>
-          </a:prstGeom>
-          <a:solidFill>
-            <a:srgbClr val="F3FAFA"/>
-          </a:solidFill>
-          <a:ln w="5080">
-            <a:solidFill>
-              <a:srgbClr val="E0EEEE"/>
-            </a:solidFill>
-            <a:prstDash val="solid"/>
-          </a:ln>
-        </p:spPr>
-      </p:sp>
-      <p:sp>
-        <p:nvSpPr>
-          <p:cNvPr id="21" name="Text 19"/>
-          <p:cNvSpPr/>
-          <p:nvPr/>
-        </p:nvSpPr>
-        <p:spPr>
-          <a:xfrm>
-            <a:off x="365760" y="2468880"/>
-            <a:ext cx="1828800" cy="274320"/>
-          </a:xfrm>
-          <a:prstGeom prst="rect">
-            <a:avLst/>
-          </a:prstGeom>
-          <a:noFill/>
-          <a:ln/>
-        </p:spPr>
-        <p:txBody>
-          <a:bodyPr wrap="square" rtlCol="0" anchor="ctr"/>
-          <a:lstStyle/>
-          <a:p>
-            <a:pPr indent="0" marL="0">
-              <a:buNone/>
-            </a:pPr>
-            <a:r>
-              <a:rPr lang="en-US" sz="850" b="1" dirty="0">
-                <a:solidFill>
-                  <a:srgbClr val="158F7E"/>
-                </a:solidFill>
-                <a:latin typeface="Arial" pitchFamily="34" charset="0"/>
-                <a:ea typeface="Arial" pitchFamily="34" charset="-122"/>
-                <a:cs typeface="Arial" pitchFamily="34" charset="-120"/>
-              </a:rPr>
-              <a:t>id_region</a:t>
-            </a:r>
-            <a:endParaRPr lang="en-US" sz="850" dirty="0"/>
-          </a:p>
-        </p:txBody>
-      </p:sp>
-      <p:sp>
-        <p:nvSpPr>
-          <p:cNvPr id="22" name="Text 20"/>
-          <p:cNvSpPr/>
-          <p:nvPr/>
-        </p:nvSpPr>
-        <p:spPr>
-          <a:xfrm>
-            <a:off x="2212848" y="2468880"/>
-            <a:ext cx="2011680" cy="274320"/>
-          </a:xfrm>
-          <a:prstGeom prst="rect">
-            <a:avLst/>
-          </a:prstGeom>
-          <a:noFill/>
-          <a:ln/>
-        </p:spPr>
-        <p:txBody>
-          <a:bodyPr wrap="square" rtlCol="0" anchor="ctr"/>
-          <a:lstStyle/>
-          <a:p>
-            <a:pPr indent="0" marL="0">
-              <a:buNone/>
-            </a:pPr>
-            <a:r>
-              <a:rPr lang="en-US" sz="800" dirty="0">
-                <a:solidFill>
-                  <a:srgbClr val="546E6E"/>
-                </a:solidFill>
-                <a:latin typeface="Arial" pitchFamily="34" charset="0"/>
-                <a:ea typeface="Arial" pitchFamily="34" charset="-122"/>
-                <a:cs typeface="Arial" pitchFamily="34" charset="-120"/>
-              </a:rPr>
-              <a:t>FK vers la table region (3NF)</a:t>
-            </a:r>
-            <a:endParaRPr lang="en-US" sz="800" dirty="0"/>
-          </a:p>
-        </p:txBody>
-      </p:sp>
-      <p:sp>
-        <p:nvSpPr>
-          <p:cNvPr id="23" name="Shape 21"/>
-          <p:cNvSpPr/>
-          <p:nvPr/>
-        </p:nvSpPr>
-        <p:spPr>
-          <a:xfrm>
-            <a:off x="320040" y="2788920"/>
-            <a:ext cx="4041648" cy="310896"/>
-          </a:xfrm>
-          <a:prstGeom prst="rect">
-            <a:avLst/>
-          </a:prstGeom>
-          <a:solidFill>
-            <a:srgbClr val="FFFFFF"/>
-          </a:solidFill>
-          <a:ln w="5080">
-            <a:solidFill>
-              <a:srgbClr val="E0EEEE"/>
-            </a:solidFill>
-            <a:prstDash val="solid"/>
-          </a:ln>
-        </p:spPr>
-      </p:sp>
-      <p:sp>
-        <p:nvSpPr>
-          <p:cNvPr id="24" name="Text 22"/>
-          <p:cNvSpPr/>
-          <p:nvPr/>
-        </p:nvSpPr>
-        <p:spPr>
-          <a:xfrm>
-            <a:off x="365760" y="2798064"/>
-            <a:ext cx="1828800" cy="274320"/>
-          </a:xfrm>
-          <a:prstGeom prst="rect">
-            <a:avLst/>
-          </a:prstGeom>
-          <a:noFill/>
-          <a:ln/>
-        </p:spPr>
-        <p:txBody>
-          <a:bodyPr wrap="square" rtlCol="0" anchor="ctr"/>
-          <a:lstStyle/>
-          <a:p>
-            <a:pPr indent="0" marL="0">
-              <a:buNone/>
-            </a:pPr>
-            <a:r>
-              <a:rPr lang="en-US" sz="850" b="1" dirty="0">
-                <a:solidFill>
-                  <a:srgbClr val="158F7E"/>
-                </a:solidFill>
-                <a:latin typeface="Arial" pitchFamily="34" charset="0"/>
-                <a:ea typeface="Arial" pitchFamily="34" charset="-122"/>
-                <a:cs typeface="Arial" pitchFamily="34" charset="-120"/>
-              </a:rPr>
-              <a:t>nom_region</a:t>
-            </a:r>
-            <a:endParaRPr lang="en-US" sz="850" dirty="0"/>
-          </a:p>
-        </p:txBody>
-      </p:sp>
-      <p:sp>
-        <p:nvSpPr>
-          <p:cNvPr id="25" name="Text 23"/>
-          <p:cNvSpPr/>
-          <p:nvPr/>
-        </p:nvSpPr>
-        <p:spPr>
-          <a:xfrm>
-            <a:off x="2212848" y="2798064"/>
-            <a:ext cx="2011680" cy="274320"/>
-          </a:xfrm>
-          <a:prstGeom prst="rect">
-            <a:avLst/>
-          </a:prstGeom>
-          <a:noFill/>
-          <a:ln/>
-        </p:spPr>
-        <p:txBody>
-          <a:bodyPr wrap="square" rtlCol="0" anchor="ctr"/>
-          <a:lstStyle/>
-          <a:p>
-            <a:pPr indent="0" marL="0">
-              <a:buNone/>
-            </a:pPr>
-            <a:r>
-              <a:rPr lang="en-US" sz="800" dirty="0">
-                <a:solidFill>
-                  <a:srgbClr val="546E6E"/>
-                </a:solidFill>
-                <a:latin typeface="Arial" pitchFamily="34" charset="0"/>
-                <a:ea typeface="Arial" pitchFamily="34" charset="-122"/>
-                <a:cs typeface="Arial" pitchFamily="34" charset="-120"/>
-              </a:rPr>
-              <a:t>Nom officiel de la région</a:t>
-            </a:r>
-            <a:endParaRPr lang="en-US" sz="800" dirty="0"/>
-          </a:p>
-        </p:txBody>
-      </p:sp>
-      <p:sp>
-        <p:nvSpPr>
-          <p:cNvPr id="26" name="Shape 24"/>
-          <p:cNvSpPr/>
-          <p:nvPr/>
-        </p:nvSpPr>
-        <p:spPr>
-          <a:xfrm>
-            <a:off x="320040" y="3118104"/>
-            <a:ext cx="4041648" cy="310896"/>
-          </a:xfrm>
-          <a:prstGeom prst="rect">
-            <a:avLst/>
-          </a:prstGeom>
-          <a:solidFill>
-            <a:srgbClr val="F3FAFA"/>
-          </a:solidFill>
-          <a:ln w="5080">
-            <a:solidFill>
-              <a:srgbClr val="E0EEEE"/>
-            </a:solidFill>
-            <a:prstDash val="solid"/>
-          </a:ln>
-        </p:spPr>
-      </p:sp>
-      <p:sp>
-        <p:nvSpPr>
-          <p:cNvPr id="27" name="Text 25"/>
-          <p:cNvSpPr/>
-          <p:nvPr/>
-        </p:nvSpPr>
-        <p:spPr>
-          <a:xfrm>
-            <a:off x="365760" y="3127248"/>
-            <a:ext cx="1828800" cy="274320"/>
-          </a:xfrm>
-          <a:prstGeom prst="rect">
-            <a:avLst/>
-          </a:prstGeom>
-          <a:noFill/>
-          <a:ln/>
-        </p:spPr>
-        <p:txBody>
-          <a:bodyPr wrap="square" rtlCol="0" anchor="ctr"/>
-          <a:lstStyle/>
-          <a:p>
-            <a:pPr indent="0" marL="0">
-              <a:buNone/>
-            </a:pPr>
-            <a:r>
-              <a:rPr lang="en-US" sz="850" b="1" dirty="0">
-                <a:solidFill>
-                  <a:srgbClr val="158F7E"/>
-                </a:solidFill>
-                <a:latin typeface="Arial" pitchFamily="34" charset="0"/>
-                <a:ea typeface="Arial" pitchFamily="34" charset="-122"/>
-                <a:cs typeface="Arial" pitchFamily="34" charset="-120"/>
-              </a:rPr>
-              <a:t>Surface</a:t>
-            </a:r>
-            <a:endParaRPr lang="en-US" sz="850" dirty="0"/>
-          </a:p>
-        </p:txBody>
-      </p:sp>
-      <p:sp>
-        <p:nvSpPr>
-          <p:cNvPr id="28" name="Text 26"/>
-          <p:cNvSpPr/>
-          <p:nvPr/>
-        </p:nvSpPr>
-        <p:spPr>
-          <a:xfrm>
-            <a:off x="2212848" y="3127248"/>
-            <a:ext cx="2011680" cy="274320"/>
-          </a:xfrm>
-          <a:prstGeom prst="rect">
-            <a:avLst/>
-          </a:prstGeom>
-          <a:noFill/>
-          <a:ln/>
-        </p:spPr>
-        <p:txBody>
-          <a:bodyPr wrap="square" rtlCol="0" anchor="ctr"/>
-          <a:lstStyle/>
-          <a:p>
-            <a:pPr indent="0" marL="0">
-              <a:buNone/>
-            </a:pPr>
-            <a:r>
-              <a:rPr lang="en-US" sz="800" dirty="0">
-                <a:solidFill>
-                  <a:srgbClr val="546E6E"/>
-                </a:solidFill>
-                <a:latin typeface="Arial" pitchFamily="34" charset="0"/>
-                <a:ea typeface="Arial" pitchFamily="34" charset="-122"/>
-                <a:cs typeface="Arial" pitchFamily="34" charset="-120"/>
-              </a:rPr>
-              <a:t>Surface en m² — utilisée pour le prix/m²</a:t>
-            </a:r>
-            <a:endParaRPr lang="en-US" sz="800" dirty="0"/>
-          </a:p>
-        </p:txBody>
-      </p:sp>
-      <p:sp>
-        <p:nvSpPr>
-          <p:cNvPr id="29" name="Shape 27"/>
-          <p:cNvSpPr/>
-          <p:nvPr/>
-        </p:nvSpPr>
-        <p:spPr>
-          <a:xfrm>
-            <a:off x="320040" y="3447288"/>
-            <a:ext cx="4041648" cy="310896"/>
-          </a:xfrm>
-          <a:prstGeom prst="rect">
-            <a:avLst/>
-          </a:prstGeom>
-          <a:solidFill>
-            <a:srgbClr val="FFFFFF"/>
-          </a:solidFill>
-          <a:ln w="5080">
-            <a:solidFill>
-              <a:srgbClr val="E0EEEE"/>
-            </a:solidFill>
-            <a:prstDash val="solid"/>
-          </a:ln>
-        </p:spPr>
-      </p:sp>
-      <p:sp>
-        <p:nvSpPr>
-          <p:cNvPr id="30" name="Text 28"/>
-          <p:cNvSpPr/>
-          <p:nvPr/>
-        </p:nvSpPr>
-        <p:spPr>
-          <a:xfrm>
-            <a:off x="365760" y="3456432"/>
-            <a:ext cx="1828800" cy="274320"/>
-          </a:xfrm>
-          <a:prstGeom prst="rect">
-            <a:avLst/>
-          </a:prstGeom>
-          <a:noFill/>
-          <a:ln/>
-        </p:spPr>
-        <p:txBody>
-          <a:bodyPr wrap="square" rtlCol="0" anchor="ctr"/>
-          <a:lstStyle/>
-          <a:p>
-            <a:pPr indent="0" marL="0">
-              <a:buNone/>
-            </a:pPr>
-            <a:r>
-              <a:rPr lang="en-US" sz="850" b="1" dirty="0">
-                <a:solidFill>
-                  <a:srgbClr val="158F7E"/>
-                </a:solidFill>
-                <a:latin typeface="Arial" pitchFamily="34" charset="0"/>
-                <a:ea typeface="Arial" pitchFamily="34" charset="-122"/>
-                <a:cs typeface="Arial" pitchFamily="34" charset="-120"/>
-              </a:rPr>
-              <a:t>Type_local</a:t>
-            </a:r>
-            <a:endParaRPr lang="en-US" sz="850" dirty="0"/>
-          </a:p>
-        </p:txBody>
-      </p:sp>
-      <p:sp>
-        <p:nvSpPr>
-          <p:cNvPr id="31" name="Text 29"/>
-          <p:cNvSpPr/>
-          <p:nvPr/>
-        </p:nvSpPr>
-        <p:spPr>
-          <a:xfrm>
-            <a:off x="2212848" y="3456432"/>
-            <a:ext cx="2011680" cy="274320"/>
-          </a:xfrm>
-          <a:prstGeom prst="rect">
-            <a:avLst/>
-          </a:prstGeom>
-          <a:noFill/>
-          <a:ln/>
-        </p:spPr>
-        <p:txBody>
-          <a:bodyPr wrap="square" rtlCol="0" anchor="ctr"/>
-          <a:lstStyle/>
-          <a:p>
-            <a:pPr indent="0" marL="0">
-              <a:buNone/>
-            </a:pPr>
-            <a:r>
-              <a:rPr lang="en-US" sz="800" dirty="0">
-                <a:solidFill>
-                  <a:srgbClr val="546E6E"/>
-                </a:solidFill>
-                <a:latin typeface="Arial" pitchFamily="34" charset="0"/>
-                <a:ea typeface="Arial" pitchFamily="34" charset="-122"/>
-                <a:cs typeface="Arial" pitchFamily="34" charset="-120"/>
-              </a:rPr>
-              <a:t>Appartement / Maison — filtre clé des requêtes</a:t>
-            </a:r>
-            <a:endParaRPr lang="en-US" sz="800" dirty="0"/>
-          </a:p>
-        </p:txBody>
-      </p:sp>
-      <p:sp>
-        <p:nvSpPr>
-          <p:cNvPr id="32" name="Shape 30"/>
-          <p:cNvSpPr/>
-          <p:nvPr/>
-        </p:nvSpPr>
-        <p:spPr>
-          <a:xfrm>
-            <a:off x="320040" y="3776472"/>
-            <a:ext cx="4041648" cy="310896"/>
-          </a:xfrm>
-          <a:prstGeom prst="rect">
-            <a:avLst/>
-          </a:prstGeom>
-          <a:solidFill>
-            <a:srgbClr val="F3FAFA"/>
-          </a:solidFill>
-          <a:ln w="5080">
-            <a:solidFill>
-              <a:srgbClr val="E0EEEE"/>
-            </a:solidFill>
-            <a:prstDash val="solid"/>
-          </a:ln>
-        </p:spPr>
-      </p:sp>
-      <p:sp>
-        <p:nvSpPr>
-          <p:cNvPr id="33" name="Text 31"/>
-          <p:cNvSpPr/>
-          <p:nvPr/>
-        </p:nvSpPr>
-        <p:spPr>
-          <a:xfrm>
-            <a:off x="365760" y="3785616"/>
-            <a:ext cx="1828800" cy="274320"/>
-          </a:xfrm>
-          <a:prstGeom prst="rect">
-            <a:avLst/>
-          </a:prstGeom>
-          <a:noFill/>
-          <a:ln/>
-        </p:spPr>
-        <p:txBody>
-          <a:bodyPr wrap="square" rtlCol="0" anchor="ctr"/>
-          <a:lstStyle/>
-          <a:p>
-            <a:pPr indent="0" marL="0">
-              <a:buNone/>
-            </a:pPr>
-            <a:r>
-              <a:rPr lang="en-US" sz="850" b="1" dirty="0">
-                <a:solidFill>
-                  <a:srgbClr val="158F7E"/>
-                </a:solidFill>
-                <a:latin typeface="Arial" pitchFamily="34" charset="0"/>
-                <a:ea typeface="Arial" pitchFamily="34" charset="-122"/>
-                <a:cs typeface="Arial" pitchFamily="34" charset="-120"/>
-              </a:rPr>
-              <a:t>Total_piece</a:t>
-            </a:r>
-            <a:endParaRPr lang="en-US" sz="850" dirty="0"/>
-          </a:p>
-        </p:txBody>
-      </p:sp>
-      <p:sp>
-        <p:nvSpPr>
-          <p:cNvPr id="34" name="Text 32"/>
-          <p:cNvSpPr/>
-          <p:nvPr/>
-        </p:nvSpPr>
-        <p:spPr>
-          <a:xfrm>
-            <a:off x="2212848" y="3785616"/>
-            <a:ext cx="2011680" cy="274320"/>
-          </a:xfrm>
-          <a:prstGeom prst="rect">
-            <a:avLst/>
-          </a:prstGeom>
-          <a:noFill/>
-          <a:ln/>
-        </p:spPr>
-        <p:txBody>
-          <a:bodyPr wrap="square" rtlCol="0" anchor="ctr"/>
-          <a:lstStyle/>
-          <a:p>
-            <a:pPr indent="0" marL="0">
-              <a:buNone/>
-            </a:pPr>
-            <a:r>
-              <a:rPr lang="en-US" sz="800" dirty="0">
-                <a:solidFill>
-                  <a:srgbClr val="546E6E"/>
-                </a:solidFill>
-                <a:latin typeface="Arial" pitchFamily="34" charset="0"/>
-                <a:ea typeface="Arial" pitchFamily="34" charset="-122"/>
-                <a:cs typeface="Arial" pitchFamily="34" charset="-120"/>
-              </a:rPr>
-              <a:t>Nombre de pièces</a:t>
-            </a:r>
-            <a:endParaRPr lang="en-US" sz="800" dirty="0"/>
-          </a:p>
-        </p:txBody>
-      </p:sp>
-      <p:sp>
-        <p:nvSpPr>
-          <p:cNvPr id="35" name="Shape 33"/>
-          <p:cNvSpPr/>
-          <p:nvPr/>
-        </p:nvSpPr>
-        <p:spPr>
-          <a:xfrm>
-            <a:off x="320040" y="4105656"/>
-            <a:ext cx="4041648" cy="310896"/>
-          </a:xfrm>
-          <a:prstGeom prst="rect">
-            <a:avLst/>
-          </a:prstGeom>
-          <a:solidFill>
-            <a:srgbClr val="FFFFFF"/>
-          </a:solidFill>
-          <a:ln w="5080">
-            <a:solidFill>
-              <a:srgbClr val="E0EEEE"/>
-            </a:solidFill>
-            <a:prstDash val="solid"/>
-          </a:ln>
-        </p:spPr>
-      </p:sp>
-      <p:sp>
-        <p:nvSpPr>
-          <p:cNvPr id="36" name="Text 34"/>
-          <p:cNvSpPr/>
-          <p:nvPr/>
-        </p:nvSpPr>
-        <p:spPr>
-          <a:xfrm>
-            <a:off x="365760" y="4114800"/>
-            <a:ext cx="1828800" cy="274320"/>
-          </a:xfrm>
-          <a:prstGeom prst="rect">
-            <a:avLst/>
-          </a:prstGeom>
-          <a:noFill/>
-          <a:ln/>
-        </p:spPr>
-        <p:txBody>
-          <a:bodyPr wrap="square" rtlCol="0" anchor="ctr"/>
-          <a:lstStyle/>
-          <a:p>
-            <a:pPr indent="0" marL="0">
-              <a:buNone/>
-            </a:pPr>
-            <a:r>
-              <a:rPr lang="en-US" sz="850" b="1" dirty="0">
-                <a:solidFill>
-                  <a:srgbClr val="158F7E"/>
-                </a:solidFill>
-                <a:latin typeface="Arial" pitchFamily="34" charset="0"/>
-                <a:ea typeface="Arial" pitchFamily="34" charset="-122"/>
-                <a:cs typeface="Arial" pitchFamily="34" charset="-120"/>
-              </a:rPr>
-              <a:t>Id_vente / Date_vente</a:t>
-            </a:r>
-            <a:endParaRPr lang="en-US" sz="850" dirty="0"/>
-          </a:p>
-        </p:txBody>
-      </p:sp>
-      <p:sp>
-        <p:nvSpPr>
-          <p:cNvPr id="37" name="Text 35"/>
-          <p:cNvSpPr/>
-          <p:nvPr/>
-        </p:nvSpPr>
-        <p:spPr>
-          <a:xfrm>
-            <a:off x="2212848" y="4114800"/>
-            <a:ext cx="2011680" cy="274320"/>
-          </a:xfrm>
-          <a:prstGeom prst="rect">
-            <a:avLst/>
-          </a:prstGeom>
-          <a:noFill/>
-          <a:ln/>
-        </p:spPr>
-        <p:txBody>
-          <a:bodyPr wrap="square" rtlCol="0" anchor="ctr"/>
-          <a:lstStyle/>
-          <a:p>
-            <a:pPr indent="0" marL="0">
-              <a:buNone/>
-            </a:pPr>
-            <a:r>
-              <a:rPr lang="en-US" sz="800" dirty="0">
-                <a:solidFill>
-                  <a:srgbClr val="546E6E"/>
-                </a:solidFill>
-                <a:latin typeface="Arial" pitchFamily="34" charset="0"/>
-                <a:ea typeface="Arial" pitchFamily="34" charset="-122"/>
-                <a:cs typeface="Arial" pitchFamily="34" charset="-120"/>
-              </a:rPr>
-              <a:t>PK transaction + date de vente</a:t>
-            </a:r>
-            <a:endParaRPr lang="en-US" sz="800" dirty="0"/>
-          </a:p>
-        </p:txBody>
-      </p:sp>
-      <p:sp>
-        <p:nvSpPr>
-          <p:cNvPr id="38" name="Shape 36"/>
-          <p:cNvSpPr/>
-          <p:nvPr/>
-        </p:nvSpPr>
-        <p:spPr>
-          <a:xfrm>
-            <a:off x="320040" y="4434840"/>
-            <a:ext cx="4041648" cy="310896"/>
-          </a:xfrm>
-          <a:prstGeom prst="rect">
-            <a:avLst/>
-          </a:prstGeom>
-          <a:solidFill>
-            <a:srgbClr val="F3FAFA"/>
-          </a:solidFill>
-          <a:ln w="5080">
-            <a:solidFill>
-              <a:srgbClr val="E0EEEE"/>
-            </a:solidFill>
-            <a:prstDash val="solid"/>
-          </a:ln>
-        </p:spPr>
-      </p:sp>
-      <p:sp>
-        <p:nvSpPr>
-          <p:cNvPr id="39" name="Text 37"/>
-          <p:cNvSpPr/>
-          <p:nvPr/>
-        </p:nvSpPr>
-        <p:spPr>
-          <a:xfrm>
-            <a:off x="365760" y="4443984"/>
-            <a:ext cx="1828800" cy="274320"/>
-          </a:xfrm>
-          <a:prstGeom prst="rect">
-            <a:avLst/>
-          </a:prstGeom>
-          <a:noFill/>
-          <a:ln/>
-        </p:spPr>
-        <p:txBody>
-          <a:bodyPr wrap="square" rtlCol="0" anchor="ctr"/>
-          <a:lstStyle/>
-          <a:p>
-            <a:pPr indent="0" marL="0">
-              <a:buNone/>
-            </a:pPr>
-            <a:r>
-              <a:rPr lang="en-US" sz="850" b="1" dirty="0">
-                <a:solidFill>
-                  <a:srgbClr val="158F7E"/>
-                </a:solidFill>
-                <a:latin typeface="Arial" pitchFamily="34" charset="0"/>
-                <a:ea typeface="Arial" pitchFamily="34" charset="-122"/>
-                <a:cs typeface="Arial" pitchFamily="34" charset="-120"/>
-              </a:rPr>
-              <a:t>Valeur_fonciere</a:t>
-            </a:r>
-            <a:endParaRPr lang="en-US" sz="850" dirty="0"/>
-          </a:p>
-        </p:txBody>
-      </p:sp>
-      <p:sp>
-        <p:nvSpPr>
-          <p:cNvPr id="40" name="Text 38"/>
-          <p:cNvSpPr/>
-          <p:nvPr/>
-        </p:nvSpPr>
-        <p:spPr>
-          <a:xfrm>
-            <a:off x="2212848" y="4443984"/>
-            <a:ext cx="2011680" cy="274320"/>
-          </a:xfrm>
-          <a:prstGeom prst="rect">
-            <a:avLst/>
-          </a:prstGeom>
-          <a:noFill/>
-          <a:ln/>
-        </p:spPr>
-        <p:txBody>
-          <a:bodyPr wrap="square" rtlCol="0" anchor="ctr"/>
-          <a:lstStyle/>
-          <a:p>
-            <a:pPr indent="0" marL="0">
-              <a:buNone/>
-            </a:pPr>
-            <a:r>
-              <a:rPr lang="en-US" sz="800" dirty="0">
-                <a:solidFill>
-                  <a:srgbClr val="546E6E"/>
-                </a:solidFill>
-                <a:latin typeface="Arial" pitchFamily="34" charset="0"/>
-                <a:ea typeface="Arial" pitchFamily="34" charset="-122"/>
-                <a:cs typeface="Arial" pitchFamily="34" charset="-120"/>
-              </a:rPr>
-              <a:t>Prix de vente en € — donnée centrale</a:t>
-            </a:r>
-            <a:endParaRPr lang="en-US" sz="800" dirty="0"/>
-          </a:p>
-        </p:txBody>
-      </p:sp>
-      <p:sp>
-        <p:nvSpPr>
-          <p:cNvPr id="41" name="Shape 39"/>
-          <p:cNvSpPr/>
-          <p:nvPr/>
-        </p:nvSpPr>
-        <p:spPr>
-          <a:xfrm>
-            <a:off x="4736592" y="749808"/>
-            <a:ext cx="4160520" cy="4069080"/>
-          </a:xfrm>
-          <a:prstGeom prst="rect">
-            <a:avLst/>
-          </a:prstGeom>
-          <a:solidFill>
-            <a:srgbClr val="FFFFFF"/>
-          </a:solidFill>
-          <a:ln w="12700">
-            <a:solidFill>
-              <a:srgbClr val="D0E8E6"/>
-            </a:solidFill>
-            <a:prstDash val="solid"/>
-          </a:ln>
-          <a:effectLst>
-            <a:outerShdw sx="100000" sy="100000" kx="0" ky="0" algn="bl" rotWithShape="0" blurRad="38100" dist="25400" dir="8100000">
-              <a:srgbClr val="000000">
-                <a:alpha val="10000"/>
-              </a:srgbClr>
-            </a:outerShdw>
-          </a:effectLst>
-        </p:spPr>
-      </p:sp>
-      <p:sp>
-        <p:nvSpPr>
-          <p:cNvPr id="42" name="Shape 40"/>
-          <p:cNvSpPr/>
-          <p:nvPr/>
-        </p:nvSpPr>
-        <p:spPr>
-          <a:xfrm>
-            <a:off x="4736592" y="749808"/>
-            <a:ext cx="4160520" cy="329184"/>
-          </a:xfrm>
-          <a:prstGeom prst="rect">
-            <a:avLst/>
-          </a:prstGeom>
-          <a:solidFill>
-            <a:srgbClr val="B94A52"/>
-          </a:solidFill>
-          <a:ln w="12700">
+            <a:ln w="12700">
+              <a:solidFill>
+                <a:srgbClr val="D0E8E6"/>
+              </a:solidFill>
+              <a:prstDash val="solid"/>
+            </a:ln>
+            <a:effectLst>
+              <a:outerShdw blurRad="38100" dist="25400" dir="8100000" algn="bl" rotWithShape="0">
+                <a:srgbClr val="000000">
+                  <a:alpha val="10000"/>
+                </a:srgbClr>
+              </a:outerShdw>
+            </a:effectLst>
+          </p:spPr>
+          <p:txBody>
+            <a:bodyPr/>
+            <a:lstStyle/>
+            <a:p>
+              <a:endParaRPr lang="en-FR"/>
+            </a:p>
+          </p:txBody>
+        </p:sp>
+        <p:sp>
+          <p:nvSpPr>
+            <p:cNvPr id="42" name="Shape 40"/>
+            <p:cNvSpPr/>
+            <p:nvPr/>
+          </p:nvSpPr>
+          <p:spPr>
+            <a:xfrm>
+              <a:off x="4736592" y="749808"/>
+              <a:ext cx="4160520" cy="329184"/>
+            </a:xfrm>
+            <a:prstGeom prst="rect">
+              <a:avLst/>
+            </a:prstGeom>
             <a:solidFill>
               <a:srgbClr val="B94A52"/>
             </a:solidFill>
-            <a:prstDash val="solid"/>
-          </a:ln>
-        </p:spPr>
-      </p:sp>
-      <p:sp>
-        <p:nvSpPr>
-          <p:cNvPr id="43" name="Text 41"/>
-          <p:cNvSpPr/>
-          <p:nvPr/>
-        </p:nvSpPr>
-        <p:spPr>
-          <a:xfrm>
-            <a:off x="4828032" y="749808"/>
-            <a:ext cx="3977640" cy="329184"/>
-          </a:xfrm>
-          <a:prstGeom prst="rect">
-            <a:avLst/>
-          </a:prstGeom>
-          <a:noFill/>
-          <a:ln/>
-        </p:spPr>
-        <p:txBody>
-          <a:bodyPr wrap="square" rtlCol="0" anchor="ctr"/>
-          <a:lstStyle/>
-          <a:p>
-            <a:pPr indent="0" marL="0">
-              <a:buNone/>
-            </a:pPr>
-            <a:r>
-              <a:rPr lang="en-US" sz="1050" b="1" dirty="0">
-                <a:solidFill>
-                  <a:srgbClr val="FFFFFF"/>
-                </a:solidFill>
-                <a:latin typeface="Arial" pitchFamily="34" charset="0"/>
-                <a:ea typeface="Arial" pitchFamily="34" charset="-122"/>
-                <a:cs typeface="Arial" pitchFamily="34" charset="-120"/>
-              </a:rPr>
-              <a:t>✖  Colonnes supprimées &amp; justification</a:t>
-            </a:r>
-            <a:endParaRPr lang="en-US" sz="1050" dirty="0"/>
-          </a:p>
-        </p:txBody>
-      </p:sp>
-      <p:sp>
-        <p:nvSpPr>
-          <p:cNvPr id="44" name="Shape 42"/>
-          <p:cNvSpPr/>
-          <p:nvPr/>
-        </p:nvSpPr>
-        <p:spPr>
-          <a:xfrm>
-            <a:off x="4800600" y="1143000"/>
-            <a:ext cx="4041648" cy="384048"/>
-          </a:xfrm>
-          <a:prstGeom prst="rect">
-            <a:avLst/>
-          </a:prstGeom>
-          <a:solidFill>
-            <a:srgbClr val="FFF8F8"/>
-          </a:solidFill>
-          <a:ln w="5080">
+            <a:ln w="12700">
+              <a:solidFill>
+                <a:srgbClr val="B94A52"/>
+              </a:solidFill>
+              <a:prstDash val="solid"/>
+            </a:ln>
+          </p:spPr>
+          <p:txBody>
+            <a:bodyPr/>
+            <a:lstStyle/>
+            <a:p>
+              <a:endParaRPr lang="en-FR"/>
+            </a:p>
+          </p:txBody>
+        </p:sp>
+        <p:sp>
+          <p:nvSpPr>
+            <p:cNvPr id="43" name="Text 41"/>
+            <p:cNvSpPr/>
+            <p:nvPr/>
+          </p:nvSpPr>
+          <p:spPr>
+            <a:xfrm>
+              <a:off x="4828032" y="749808"/>
+              <a:ext cx="3977640" cy="329184"/>
+            </a:xfrm>
+            <a:prstGeom prst="rect">
+              <a:avLst/>
+            </a:prstGeom>
+            <a:noFill/>
+            <a:ln/>
+          </p:spPr>
+          <p:txBody>
+            <a:bodyPr wrap="square" rtlCol="0" anchor="ctr"/>
+            <a:lstStyle/>
+            <a:p>
+              <a:pPr marL="0" indent="0">
+                <a:buNone/>
+              </a:pPr>
+              <a:r>
+                <a:rPr lang="en-US" sz="1050" b="1" dirty="0">
+                  <a:solidFill>
+                    <a:srgbClr val="FFFFFF"/>
+                  </a:solidFill>
+                  <a:latin typeface="Arial" pitchFamily="34" charset="0"/>
+                  <a:ea typeface="Arial" pitchFamily="34" charset="-122"/>
+                  <a:cs typeface="Arial" pitchFamily="34" charset="-120"/>
+                </a:rPr>
+                <a:t>✖  Colonnes supprimées &amp; justification</a:t>
+              </a:r>
+              <a:endParaRPr lang="en-US" sz="1050" dirty="0"/>
+            </a:p>
+          </p:txBody>
+        </p:sp>
+        <p:sp>
+          <p:nvSpPr>
+            <p:cNvPr id="44" name="Shape 42"/>
+            <p:cNvSpPr/>
+            <p:nvPr/>
+          </p:nvSpPr>
+          <p:spPr>
+            <a:xfrm>
+              <a:off x="4800600" y="1143000"/>
+              <a:ext cx="4041648" cy="384048"/>
+            </a:xfrm>
+            <a:prstGeom prst="rect">
+              <a:avLst/>
+            </a:prstGeom>
             <a:solidFill>
-              <a:srgbClr val="EEDCDC"/>
+              <a:srgbClr val="FFF8F8"/>
             </a:solidFill>
-            <a:prstDash val="solid"/>
-          </a:ln>
-        </p:spPr>
-      </p:sp>
-      <p:sp>
-        <p:nvSpPr>
-          <p:cNvPr id="45" name="Text 43"/>
-          <p:cNvSpPr/>
-          <p:nvPr/>
-        </p:nvSpPr>
-        <p:spPr>
-          <a:xfrm>
-            <a:off x="4846320" y="1161288"/>
-            <a:ext cx="1737360" cy="329184"/>
-          </a:xfrm>
-          <a:prstGeom prst="rect">
-            <a:avLst/>
-          </a:prstGeom>
-          <a:noFill/>
-          <a:ln/>
-        </p:spPr>
-        <p:txBody>
-          <a:bodyPr wrap="square" rtlCol="0" anchor="ctr"/>
-          <a:lstStyle/>
-          <a:p>
-            <a:pPr indent="0" marL="0">
-              <a:buNone/>
-            </a:pPr>
-            <a:r>
-              <a:rPr lang="en-US" sz="850" b="1" dirty="0">
-                <a:solidFill>
-                  <a:srgbClr val="B94A52"/>
-                </a:solidFill>
-                <a:latin typeface="Arial" pitchFamily="34" charset="0"/>
-                <a:ea typeface="Arial" pitchFamily="34" charset="-122"/>
-                <a:cs typeface="Arial" pitchFamily="34" charset="-120"/>
-              </a:rPr>
-              <a:t>No_voie</a:t>
-            </a:r>
-            <a:endParaRPr lang="en-US" sz="850" dirty="0"/>
-          </a:p>
-        </p:txBody>
-      </p:sp>
-      <p:sp>
-        <p:nvSpPr>
-          <p:cNvPr id="46" name="Text 44"/>
-          <p:cNvSpPr/>
-          <p:nvPr/>
-        </p:nvSpPr>
-        <p:spPr>
-          <a:xfrm>
-            <a:off x="6601968" y="1161288"/>
-            <a:ext cx="2103120" cy="329184"/>
-          </a:xfrm>
-          <a:prstGeom prst="rect">
-            <a:avLst/>
-          </a:prstGeom>
-          <a:noFill/>
-          <a:ln/>
-        </p:spPr>
-        <p:txBody>
-          <a:bodyPr wrap="square" rtlCol="0" anchor="ctr"/>
-          <a:lstStyle/>
-          <a:p>
-            <a:pPr indent="0" marL="0">
-              <a:buNone/>
-            </a:pPr>
-            <a:r>
-              <a:rPr lang="en-US" sz="800" dirty="0">
-                <a:solidFill>
-                  <a:srgbClr val="546E6E"/>
-                </a:solidFill>
-                <a:latin typeface="Arial" pitchFamily="34" charset="0"/>
-                <a:ea typeface="Arial" pitchFamily="34" charset="-122"/>
-                <a:cs typeface="Arial" pitchFamily="34" charset="-120"/>
-              </a:rPr>
-              <a:t>Adresse — donnée personnelle (RGPD)</a:t>
-            </a:r>
-            <a:endParaRPr lang="en-US" sz="800" dirty="0"/>
-          </a:p>
-        </p:txBody>
-      </p:sp>
-      <p:sp>
-        <p:nvSpPr>
-          <p:cNvPr id="47" name="Shape 45"/>
-          <p:cNvSpPr/>
-          <p:nvPr/>
-        </p:nvSpPr>
-        <p:spPr>
-          <a:xfrm>
-            <a:off x="4800600" y="1563624"/>
-            <a:ext cx="4041648" cy="384048"/>
-          </a:xfrm>
-          <a:prstGeom prst="rect">
-            <a:avLst/>
-          </a:prstGeom>
-          <a:solidFill>
-            <a:srgbClr val="FFFFFF"/>
-          </a:solidFill>
-          <a:ln w="5080">
+            <a:ln w="5080">
+              <a:solidFill>
+                <a:srgbClr val="EEDCDC"/>
+              </a:solidFill>
+              <a:prstDash val="solid"/>
+            </a:ln>
+          </p:spPr>
+          <p:txBody>
+            <a:bodyPr/>
+            <a:lstStyle/>
+            <a:p>
+              <a:endParaRPr lang="en-FR"/>
+            </a:p>
+          </p:txBody>
+        </p:sp>
+        <p:sp>
+          <p:nvSpPr>
+            <p:cNvPr id="45" name="Text 43"/>
+            <p:cNvSpPr/>
+            <p:nvPr/>
+          </p:nvSpPr>
+          <p:spPr>
+            <a:xfrm>
+              <a:off x="4846320" y="1161288"/>
+              <a:ext cx="1737360" cy="329184"/>
+            </a:xfrm>
+            <a:prstGeom prst="rect">
+              <a:avLst/>
+            </a:prstGeom>
+            <a:noFill/>
+            <a:ln/>
+          </p:spPr>
+          <p:txBody>
+            <a:bodyPr wrap="square" rtlCol="0" anchor="ctr"/>
+            <a:lstStyle/>
+            <a:p>
+              <a:pPr marL="0" indent="0">
+                <a:buNone/>
+              </a:pPr>
+              <a:r>
+                <a:rPr lang="en-US" sz="850" b="1" dirty="0">
+                  <a:solidFill>
+                    <a:srgbClr val="B94A52"/>
+                  </a:solidFill>
+                  <a:latin typeface="Arial" pitchFamily="34" charset="0"/>
+                  <a:ea typeface="Arial" pitchFamily="34" charset="-122"/>
+                  <a:cs typeface="Arial" pitchFamily="34" charset="-120"/>
+                </a:rPr>
+                <a:t>No_voie</a:t>
+              </a:r>
+              <a:endParaRPr lang="en-US" sz="850" dirty="0"/>
+            </a:p>
+          </p:txBody>
+        </p:sp>
+        <p:sp>
+          <p:nvSpPr>
+            <p:cNvPr id="46" name="Text 44"/>
+            <p:cNvSpPr/>
+            <p:nvPr/>
+          </p:nvSpPr>
+          <p:spPr>
+            <a:xfrm>
+              <a:off x="6601968" y="1161288"/>
+              <a:ext cx="2103120" cy="329184"/>
+            </a:xfrm>
+            <a:prstGeom prst="rect">
+              <a:avLst/>
+            </a:prstGeom>
+            <a:noFill/>
+            <a:ln/>
+          </p:spPr>
+          <p:txBody>
+            <a:bodyPr wrap="square" rtlCol="0" anchor="ctr"/>
+            <a:lstStyle/>
+            <a:p>
+              <a:r>
+                <a:rPr lang="en-US" sz="800" dirty="0">
+                  <a:solidFill>
+                    <a:srgbClr val="546E6E"/>
+                  </a:solidFill>
+                  <a:latin typeface="Arial" pitchFamily="34" charset="0"/>
+                  <a:ea typeface="Arial" pitchFamily="34" charset="-122"/>
+                  <a:cs typeface="Arial" pitchFamily="34" charset="-120"/>
+                </a:rPr>
+                <a:t>Adresse — non pertinent pour </a:t>
+              </a:r>
+              <a:r>
+                <a:rPr lang="en-US" sz="800" dirty="0" err="1">
+                  <a:solidFill>
+                    <a:srgbClr val="546E6E"/>
+                  </a:solidFill>
+                  <a:latin typeface="Arial" pitchFamily="34" charset="0"/>
+                  <a:ea typeface="Arial" pitchFamily="34" charset="-122"/>
+                  <a:cs typeface="Arial" pitchFamily="34" charset="-120"/>
+                </a:rPr>
+                <a:t>l'analyse</a:t>
+              </a:r>
+              <a:endParaRPr lang="en-US" sz="800" dirty="0"/>
+            </a:p>
+          </p:txBody>
+        </p:sp>
+        <p:sp>
+          <p:nvSpPr>
+            <p:cNvPr id="47" name="Shape 45"/>
+            <p:cNvSpPr/>
+            <p:nvPr/>
+          </p:nvSpPr>
+          <p:spPr>
+            <a:xfrm>
+              <a:off x="4800600" y="1563624"/>
+              <a:ext cx="4041648" cy="384048"/>
+            </a:xfrm>
+            <a:prstGeom prst="rect">
+              <a:avLst/>
+            </a:prstGeom>
             <a:solidFill>
-              <a:srgbClr val="EEDCDC"/>
+              <a:srgbClr val="FFFFFF"/>
             </a:solidFill>
-            <a:prstDash val="solid"/>
-          </a:ln>
-        </p:spPr>
-      </p:sp>
-      <p:sp>
-        <p:nvSpPr>
-          <p:cNvPr id="48" name="Text 46"/>
-          <p:cNvSpPr/>
-          <p:nvPr/>
-        </p:nvSpPr>
-        <p:spPr>
-          <a:xfrm>
-            <a:off x="4846320" y="1581912"/>
-            <a:ext cx="1737360" cy="329184"/>
-          </a:xfrm>
-          <a:prstGeom prst="rect">
-            <a:avLst/>
-          </a:prstGeom>
-          <a:noFill/>
-          <a:ln/>
-        </p:spPr>
-        <p:txBody>
-          <a:bodyPr wrap="square" rtlCol="0" anchor="ctr"/>
-          <a:lstStyle/>
-          <a:p>
-            <a:pPr indent="0" marL="0">
-              <a:buNone/>
-            </a:pPr>
-            <a:r>
-              <a:rPr lang="en-US" sz="850" b="1" dirty="0">
-                <a:solidFill>
-                  <a:srgbClr val="B94A52"/>
-                </a:solidFill>
-                <a:latin typeface="Arial" pitchFamily="34" charset="0"/>
-                <a:ea typeface="Arial" pitchFamily="34" charset="-122"/>
-                <a:cs typeface="Arial" pitchFamily="34" charset="-120"/>
-              </a:rPr>
-              <a:t>Type_de_voie</a:t>
-            </a:r>
-            <a:endParaRPr lang="en-US" sz="850" dirty="0"/>
-          </a:p>
-        </p:txBody>
-      </p:sp>
-      <p:sp>
-        <p:nvSpPr>
-          <p:cNvPr id="49" name="Text 47"/>
-          <p:cNvSpPr/>
-          <p:nvPr/>
-        </p:nvSpPr>
-        <p:spPr>
-          <a:xfrm>
-            <a:off x="6601968" y="1581912"/>
-            <a:ext cx="2103120" cy="329184"/>
-          </a:xfrm>
-          <a:prstGeom prst="rect">
-            <a:avLst/>
-          </a:prstGeom>
-          <a:noFill/>
-          <a:ln/>
-        </p:spPr>
-        <p:txBody>
-          <a:bodyPr wrap="square" rtlCol="0" anchor="ctr"/>
-          <a:lstStyle/>
-          <a:p>
-            <a:pPr indent="0" marL="0">
-              <a:buNone/>
-            </a:pPr>
-            <a:r>
-              <a:rPr lang="en-US" sz="800" dirty="0">
-                <a:solidFill>
-                  <a:srgbClr val="546E6E"/>
-                </a:solidFill>
-                <a:latin typeface="Arial" pitchFamily="34" charset="0"/>
-                <a:ea typeface="Arial" pitchFamily="34" charset="-122"/>
-                <a:cs typeface="Arial" pitchFamily="34" charset="-120"/>
-              </a:rPr>
-              <a:t>Adresse — non pertinent pour l'analyse</a:t>
-            </a:r>
-            <a:endParaRPr lang="en-US" sz="800" dirty="0"/>
-          </a:p>
-        </p:txBody>
-      </p:sp>
-      <p:sp>
-        <p:nvSpPr>
-          <p:cNvPr id="50" name="Shape 48"/>
-          <p:cNvSpPr/>
-          <p:nvPr/>
-        </p:nvSpPr>
-        <p:spPr>
-          <a:xfrm>
-            <a:off x="4800600" y="1984248"/>
-            <a:ext cx="4041648" cy="384048"/>
-          </a:xfrm>
-          <a:prstGeom prst="rect">
-            <a:avLst/>
-          </a:prstGeom>
-          <a:solidFill>
-            <a:srgbClr val="FFF8F8"/>
-          </a:solidFill>
-          <a:ln w="5080">
+            <a:ln w="5080">
+              <a:solidFill>
+                <a:srgbClr val="EEDCDC"/>
+              </a:solidFill>
+              <a:prstDash val="solid"/>
+            </a:ln>
+          </p:spPr>
+          <p:txBody>
+            <a:bodyPr/>
+            <a:lstStyle/>
+            <a:p>
+              <a:endParaRPr lang="en-FR"/>
+            </a:p>
+          </p:txBody>
+        </p:sp>
+        <p:sp>
+          <p:nvSpPr>
+            <p:cNvPr id="48" name="Text 46"/>
+            <p:cNvSpPr/>
+            <p:nvPr/>
+          </p:nvSpPr>
+          <p:spPr>
+            <a:xfrm>
+              <a:off x="4846320" y="1581912"/>
+              <a:ext cx="1737360" cy="329184"/>
+            </a:xfrm>
+            <a:prstGeom prst="rect">
+              <a:avLst/>
+            </a:prstGeom>
+            <a:noFill/>
+            <a:ln/>
+          </p:spPr>
+          <p:txBody>
+            <a:bodyPr wrap="square" rtlCol="0" anchor="ctr"/>
+            <a:lstStyle/>
+            <a:p>
+              <a:pPr marL="0" indent="0">
+                <a:buNone/>
+              </a:pPr>
+              <a:r>
+                <a:rPr lang="en-US" sz="850" b="1" dirty="0">
+                  <a:solidFill>
+                    <a:srgbClr val="B94A52"/>
+                  </a:solidFill>
+                  <a:latin typeface="Arial" pitchFamily="34" charset="0"/>
+                  <a:ea typeface="Arial" pitchFamily="34" charset="-122"/>
+                  <a:cs typeface="Arial" pitchFamily="34" charset="-120"/>
+                </a:rPr>
+                <a:t>Type_de_voie</a:t>
+              </a:r>
+              <a:endParaRPr lang="en-US" sz="850" dirty="0"/>
+            </a:p>
+          </p:txBody>
+        </p:sp>
+        <p:sp>
+          <p:nvSpPr>
+            <p:cNvPr id="49" name="Text 47"/>
+            <p:cNvSpPr/>
+            <p:nvPr/>
+          </p:nvSpPr>
+          <p:spPr>
+            <a:xfrm>
+              <a:off x="6601968" y="1581912"/>
+              <a:ext cx="2103120" cy="329184"/>
+            </a:xfrm>
+            <a:prstGeom prst="rect">
+              <a:avLst/>
+            </a:prstGeom>
+            <a:noFill/>
+            <a:ln/>
+          </p:spPr>
+          <p:txBody>
+            <a:bodyPr wrap="square" rtlCol="0" anchor="ctr"/>
+            <a:lstStyle/>
+            <a:p>
+              <a:pPr marL="0" indent="0">
+                <a:buNone/>
+              </a:pPr>
+              <a:r>
+                <a:rPr lang="en-US" sz="800" dirty="0">
+                  <a:solidFill>
+                    <a:srgbClr val="546E6E"/>
+                  </a:solidFill>
+                  <a:latin typeface="Arial" pitchFamily="34" charset="0"/>
+                  <a:ea typeface="Arial" pitchFamily="34" charset="-122"/>
+                  <a:cs typeface="Arial" pitchFamily="34" charset="-120"/>
+                </a:rPr>
+                <a:t>Adresse — non pertinent pour l'analyse</a:t>
+              </a:r>
+              <a:endParaRPr lang="en-US" sz="800" dirty="0"/>
+            </a:p>
+          </p:txBody>
+        </p:sp>
+        <p:sp>
+          <p:nvSpPr>
+            <p:cNvPr id="50" name="Shape 48"/>
+            <p:cNvSpPr/>
+            <p:nvPr/>
+          </p:nvSpPr>
+          <p:spPr>
+            <a:xfrm>
+              <a:off x="4800600" y="1984248"/>
+              <a:ext cx="4041648" cy="384048"/>
+            </a:xfrm>
+            <a:prstGeom prst="rect">
+              <a:avLst/>
+            </a:prstGeom>
             <a:solidFill>
-              <a:srgbClr val="EEDCDC"/>
+              <a:srgbClr val="FFF8F8"/>
             </a:solidFill>
-            <a:prstDash val="solid"/>
-          </a:ln>
-        </p:spPr>
-      </p:sp>
-      <p:sp>
-        <p:nvSpPr>
-          <p:cNvPr id="51" name="Text 49"/>
-          <p:cNvSpPr/>
-          <p:nvPr/>
-        </p:nvSpPr>
-        <p:spPr>
-          <a:xfrm>
-            <a:off x="4846320" y="2002536"/>
-            <a:ext cx="1737360" cy="329184"/>
-          </a:xfrm>
-          <a:prstGeom prst="rect">
-            <a:avLst/>
-          </a:prstGeom>
-          <a:noFill/>
-          <a:ln/>
-        </p:spPr>
-        <p:txBody>
-          <a:bodyPr wrap="square" rtlCol="0" anchor="ctr"/>
-          <a:lstStyle/>
-          <a:p>
-            <a:pPr indent="0" marL="0">
-              <a:buNone/>
-            </a:pPr>
-            <a:r>
-              <a:rPr lang="en-US" sz="850" b="1" dirty="0">
-                <a:solidFill>
-                  <a:srgbClr val="B94A52"/>
-                </a:solidFill>
-                <a:latin typeface="Arial" pitchFamily="34" charset="0"/>
-                <a:ea typeface="Arial" pitchFamily="34" charset="-122"/>
-                <a:cs typeface="Arial" pitchFamily="34" charset="-120"/>
-              </a:rPr>
-              <a:t>Voie</a:t>
-            </a:r>
-            <a:endParaRPr lang="en-US" sz="850" dirty="0"/>
-          </a:p>
-        </p:txBody>
-      </p:sp>
-      <p:sp>
-        <p:nvSpPr>
-          <p:cNvPr id="52" name="Text 50"/>
-          <p:cNvSpPr/>
-          <p:nvPr/>
-        </p:nvSpPr>
-        <p:spPr>
-          <a:xfrm>
-            <a:off x="6601968" y="2002536"/>
-            <a:ext cx="2103120" cy="329184"/>
-          </a:xfrm>
-          <a:prstGeom prst="rect">
-            <a:avLst/>
-          </a:prstGeom>
-          <a:noFill/>
-          <a:ln/>
-        </p:spPr>
-        <p:txBody>
-          <a:bodyPr wrap="square" rtlCol="0" anchor="ctr"/>
-          <a:lstStyle/>
-          <a:p>
-            <a:pPr indent="0" marL="0">
-              <a:buNone/>
-            </a:pPr>
-            <a:r>
-              <a:rPr lang="en-US" sz="800" dirty="0">
-                <a:solidFill>
-                  <a:srgbClr val="546E6E"/>
-                </a:solidFill>
-                <a:latin typeface="Arial" pitchFamily="34" charset="0"/>
-                <a:ea typeface="Arial" pitchFamily="34" charset="-122"/>
-                <a:cs typeface="Arial" pitchFamily="34" charset="-120"/>
-              </a:rPr>
-              <a:t>Adresse — non pertinent pour l'analyse</a:t>
-            </a:r>
-            <a:endParaRPr lang="en-US" sz="800" dirty="0"/>
-          </a:p>
-        </p:txBody>
-      </p:sp>
-      <p:sp>
-        <p:nvSpPr>
-          <p:cNvPr id="53" name="Shape 51"/>
-          <p:cNvSpPr/>
-          <p:nvPr/>
-        </p:nvSpPr>
-        <p:spPr>
-          <a:xfrm>
-            <a:off x="4800600" y="2404872"/>
-            <a:ext cx="4041648" cy="384048"/>
-          </a:xfrm>
-          <a:prstGeom prst="rect">
-            <a:avLst/>
-          </a:prstGeom>
-          <a:solidFill>
-            <a:srgbClr val="FFFFFF"/>
-          </a:solidFill>
-          <a:ln w="5080">
+            <a:ln w="5080">
+              <a:solidFill>
+                <a:srgbClr val="EEDCDC"/>
+              </a:solidFill>
+              <a:prstDash val="solid"/>
+            </a:ln>
+          </p:spPr>
+          <p:txBody>
+            <a:bodyPr/>
+            <a:lstStyle/>
+            <a:p>
+              <a:endParaRPr lang="en-FR"/>
+            </a:p>
+          </p:txBody>
+        </p:sp>
+        <p:sp>
+          <p:nvSpPr>
+            <p:cNvPr id="51" name="Text 49"/>
+            <p:cNvSpPr/>
+            <p:nvPr/>
+          </p:nvSpPr>
+          <p:spPr>
+            <a:xfrm>
+              <a:off x="4846320" y="2002536"/>
+              <a:ext cx="1737360" cy="329184"/>
+            </a:xfrm>
+            <a:prstGeom prst="rect">
+              <a:avLst/>
+            </a:prstGeom>
+            <a:noFill/>
+            <a:ln/>
+          </p:spPr>
+          <p:txBody>
+            <a:bodyPr wrap="square" rtlCol="0" anchor="ctr"/>
+            <a:lstStyle/>
+            <a:p>
+              <a:pPr marL="0" indent="0">
+                <a:buNone/>
+              </a:pPr>
+              <a:r>
+                <a:rPr lang="en-US" sz="850" b="1" dirty="0">
+                  <a:solidFill>
+                    <a:srgbClr val="B94A52"/>
+                  </a:solidFill>
+                  <a:latin typeface="Arial" pitchFamily="34" charset="0"/>
+                  <a:ea typeface="Arial" pitchFamily="34" charset="-122"/>
+                  <a:cs typeface="Arial" pitchFamily="34" charset="-120"/>
+                </a:rPr>
+                <a:t>Voie</a:t>
+              </a:r>
+              <a:endParaRPr lang="en-US" sz="850" dirty="0"/>
+            </a:p>
+          </p:txBody>
+        </p:sp>
+        <p:sp>
+          <p:nvSpPr>
+            <p:cNvPr id="52" name="Text 50"/>
+            <p:cNvSpPr/>
+            <p:nvPr/>
+          </p:nvSpPr>
+          <p:spPr>
+            <a:xfrm>
+              <a:off x="6601968" y="2002536"/>
+              <a:ext cx="2103120" cy="329184"/>
+            </a:xfrm>
+            <a:prstGeom prst="rect">
+              <a:avLst/>
+            </a:prstGeom>
+            <a:noFill/>
+            <a:ln/>
+          </p:spPr>
+          <p:txBody>
+            <a:bodyPr wrap="square" rtlCol="0" anchor="ctr"/>
+            <a:lstStyle/>
+            <a:p>
+              <a:pPr marL="0" indent="0">
+                <a:buNone/>
+              </a:pPr>
+              <a:r>
+                <a:rPr lang="en-US" sz="800" dirty="0">
+                  <a:solidFill>
+                    <a:srgbClr val="546E6E"/>
+                  </a:solidFill>
+                  <a:latin typeface="Arial" pitchFamily="34" charset="0"/>
+                  <a:ea typeface="Arial" pitchFamily="34" charset="-122"/>
+                  <a:cs typeface="Arial" pitchFamily="34" charset="-120"/>
+                </a:rPr>
+                <a:t>Adresse — non pertinent pour l'analyse</a:t>
+              </a:r>
+              <a:endParaRPr lang="en-US" sz="800" dirty="0"/>
+            </a:p>
+          </p:txBody>
+        </p:sp>
+        <p:sp>
+          <p:nvSpPr>
+            <p:cNvPr id="53" name="Shape 51"/>
+            <p:cNvSpPr/>
+            <p:nvPr/>
+          </p:nvSpPr>
+          <p:spPr>
+            <a:xfrm>
+              <a:off x="4800600" y="2404872"/>
+              <a:ext cx="4041648" cy="384048"/>
+            </a:xfrm>
+            <a:prstGeom prst="rect">
+              <a:avLst/>
+            </a:prstGeom>
             <a:solidFill>
-              <a:srgbClr val="EEDCDC"/>
+              <a:srgbClr val="FFFFFF"/>
             </a:solidFill>
-            <a:prstDash val="solid"/>
-          </a:ln>
-        </p:spPr>
-      </p:sp>
-      <p:sp>
-        <p:nvSpPr>
-          <p:cNvPr id="54" name="Text 52"/>
-          <p:cNvSpPr/>
-          <p:nvPr/>
-        </p:nvSpPr>
-        <p:spPr>
-          <a:xfrm>
-            <a:off x="4846320" y="2423160"/>
-            <a:ext cx="1737360" cy="329184"/>
-          </a:xfrm>
-          <a:prstGeom prst="rect">
-            <a:avLst/>
-          </a:prstGeom>
-          <a:noFill/>
-          <a:ln/>
-        </p:spPr>
-        <p:txBody>
-          <a:bodyPr wrap="square" rtlCol="0" anchor="ctr"/>
-          <a:lstStyle/>
-          <a:p>
-            <a:pPr indent="0" marL="0">
-              <a:buNone/>
-            </a:pPr>
-            <a:r>
-              <a:rPr lang="en-US" sz="850" b="1" dirty="0">
-                <a:solidFill>
-                  <a:srgbClr val="B94A52"/>
-                </a:solidFill>
-                <a:latin typeface="Arial" pitchFamily="34" charset="0"/>
-                <a:ea typeface="Arial" pitchFamily="34" charset="-122"/>
-                <a:cs typeface="Arial" pitchFamily="34" charset="-120"/>
-              </a:rPr>
-              <a:t>Code_commune</a:t>
-            </a:r>
-            <a:endParaRPr lang="en-US" sz="850" dirty="0"/>
-          </a:p>
-        </p:txBody>
-      </p:sp>
-      <p:sp>
-        <p:nvSpPr>
-          <p:cNvPr id="55" name="Text 53"/>
-          <p:cNvSpPr/>
-          <p:nvPr/>
-        </p:nvSpPr>
-        <p:spPr>
-          <a:xfrm>
-            <a:off x="6601968" y="2423160"/>
-            <a:ext cx="2103120" cy="329184"/>
-          </a:xfrm>
-          <a:prstGeom prst="rect">
-            <a:avLst/>
-          </a:prstGeom>
-          <a:noFill/>
-          <a:ln/>
-        </p:spPr>
-        <p:txBody>
-          <a:bodyPr wrap="square" rtlCol="0" anchor="ctr"/>
-          <a:lstStyle/>
-          <a:p>
-            <a:pPr indent="0" marL="0">
-              <a:buNone/>
-            </a:pPr>
-            <a:r>
-              <a:rPr lang="en-US" sz="800" dirty="0">
-                <a:solidFill>
-                  <a:srgbClr val="546E6E"/>
-                </a:solidFill>
-                <a:latin typeface="Arial" pitchFamily="34" charset="0"/>
-                <a:ea typeface="Arial" pitchFamily="34" charset="-122"/>
-                <a:cs typeface="Arial" pitchFamily="34" charset="-120"/>
-              </a:rPr>
-              <a:t>Redondant — inclus dans id_codedep_codecommune</a:t>
-            </a:r>
-            <a:endParaRPr lang="en-US" sz="800" dirty="0"/>
-          </a:p>
-        </p:txBody>
-      </p:sp>
-      <p:sp>
-        <p:nvSpPr>
-          <p:cNvPr id="56" name="Shape 54"/>
-          <p:cNvSpPr/>
-          <p:nvPr/>
-        </p:nvSpPr>
-        <p:spPr>
-          <a:xfrm>
-            <a:off x="4800600" y="2825496"/>
-            <a:ext cx="4041648" cy="384048"/>
-          </a:xfrm>
-          <a:prstGeom prst="rect">
-            <a:avLst/>
-          </a:prstGeom>
-          <a:solidFill>
-            <a:srgbClr val="FFF8F8"/>
-          </a:solidFill>
-          <a:ln w="5080">
+            <a:ln w="5080">
+              <a:solidFill>
+                <a:srgbClr val="EEDCDC"/>
+              </a:solidFill>
+              <a:prstDash val="solid"/>
+            </a:ln>
+          </p:spPr>
+          <p:txBody>
+            <a:bodyPr/>
+            <a:lstStyle/>
+            <a:p>
+              <a:endParaRPr lang="en-FR"/>
+            </a:p>
+          </p:txBody>
+        </p:sp>
+        <p:sp>
+          <p:nvSpPr>
+            <p:cNvPr id="54" name="Text 52"/>
+            <p:cNvSpPr/>
+            <p:nvPr/>
+          </p:nvSpPr>
+          <p:spPr>
+            <a:xfrm>
+              <a:off x="4846320" y="2423160"/>
+              <a:ext cx="1737360" cy="329184"/>
+            </a:xfrm>
+            <a:prstGeom prst="rect">
+              <a:avLst/>
+            </a:prstGeom>
+            <a:noFill/>
+            <a:ln/>
+          </p:spPr>
+          <p:txBody>
+            <a:bodyPr wrap="square" rtlCol="0" anchor="ctr"/>
+            <a:lstStyle/>
+            <a:p>
+              <a:pPr marL="0" indent="0">
+                <a:buNone/>
+              </a:pPr>
+              <a:r>
+                <a:rPr lang="en-US" sz="850" b="1" dirty="0">
+                  <a:solidFill>
+                    <a:srgbClr val="B94A52"/>
+                  </a:solidFill>
+                  <a:latin typeface="Arial" pitchFamily="34" charset="0"/>
+                  <a:ea typeface="Arial" pitchFamily="34" charset="-122"/>
+                  <a:cs typeface="Arial" pitchFamily="34" charset="-120"/>
+                </a:rPr>
+                <a:t>Code_commune</a:t>
+              </a:r>
+              <a:endParaRPr lang="en-US" sz="850" dirty="0"/>
+            </a:p>
+          </p:txBody>
+        </p:sp>
+        <p:sp>
+          <p:nvSpPr>
+            <p:cNvPr id="55" name="Text 53"/>
+            <p:cNvSpPr/>
+            <p:nvPr/>
+          </p:nvSpPr>
+          <p:spPr>
+            <a:xfrm>
+              <a:off x="6601968" y="2423160"/>
+              <a:ext cx="2103120" cy="329184"/>
+            </a:xfrm>
+            <a:prstGeom prst="rect">
+              <a:avLst/>
+            </a:prstGeom>
+            <a:noFill/>
+            <a:ln/>
+          </p:spPr>
+          <p:txBody>
+            <a:bodyPr wrap="square" rtlCol="0" anchor="ctr"/>
+            <a:lstStyle/>
+            <a:p>
+              <a:pPr marL="0" indent="0">
+                <a:buNone/>
+              </a:pPr>
+              <a:r>
+                <a:rPr lang="en-US" sz="800" dirty="0">
+                  <a:solidFill>
+                    <a:srgbClr val="546E6E"/>
+                  </a:solidFill>
+                  <a:latin typeface="Arial" pitchFamily="34" charset="0"/>
+                  <a:ea typeface="Arial" pitchFamily="34" charset="-122"/>
+                  <a:cs typeface="Arial" pitchFamily="34" charset="-120"/>
+                </a:rPr>
+                <a:t>Redondant — inclus dans id_codedep_codecommune</a:t>
+              </a:r>
+              <a:endParaRPr lang="en-US" sz="800" dirty="0"/>
+            </a:p>
+          </p:txBody>
+        </p:sp>
+        <p:sp>
+          <p:nvSpPr>
+            <p:cNvPr id="56" name="Shape 54"/>
+            <p:cNvSpPr/>
+            <p:nvPr/>
+          </p:nvSpPr>
+          <p:spPr>
+            <a:xfrm>
+              <a:off x="4800600" y="2825496"/>
+              <a:ext cx="4041648" cy="384048"/>
+            </a:xfrm>
+            <a:prstGeom prst="rect">
+              <a:avLst/>
+            </a:prstGeom>
             <a:solidFill>
-              <a:srgbClr val="EEDCDC"/>
+              <a:srgbClr val="FFF8F8"/>
             </a:solidFill>
-            <a:prstDash val="solid"/>
-          </a:ln>
-        </p:spPr>
-      </p:sp>
-      <p:sp>
-        <p:nvSpPr>
-          <p:cNvPr id="57" name="Text 55"/>
-          <p:cNvSpPr/>
-          <p:nvPr/>
-        </p:nvSpPr>
-        <p:spPr>
-          <a:xfrm>
-            <a:off x="4846320" y="2843784"/>
-            <a:ext cx="1737360" cy="329184"/>
-          </a:xfrm>
-          <a:prstGeom prst="rect">
-            <a:avLst/>
-          </a:prstGeom>
-          <a:noFill/>
-          <a:ln/>
-        </p:spPr>
-        <p:txBody>
-          <a:bodyPr wrap="square" rtlCol="0" anchor="ctr"/>
-          <a:lstStyle/>
-          <a:p>
-            <a:pPr indent="0" marL="0">
-              <a:buNone/>
-            </a:pPr>
-            <a:r>
-              <a:rPr lang="en-US" sz="850" b="1" dirty="0">
-                <a:solidFill>
-                  <a:srgbClr val="B94A52"/>
-                </a:solidFill>
-                <a:latin typeface="Arial" pitchFamily="34" charset="0"/>
-                <a:ea typeface="Arial" pitchFamily="34" charset="-122"/>
-                <a:cs typeface="Arial" pitchFamily="34" charset="-120"/>
-              </a:rPr>
-              <a:t>Code_postal</a:t>
-            </a:r>
-            <a:endParaRPr lang="en-US" sz="850" dirty="0"/>
-          </a:p>
-        </p:txBody>
-      </p:sp>
-      <p:sp>
-        <p:nvSpPr>
-          <p:cNvPr id="58" name="Text 56"/>
-          <p:cNvSpPr/>
-          <p:nvPr/>
-        </p:nvSpPr>
-        <p:spPr>
-          <a:xfrm>
-            <a:off x="6601968" y="2843784"/>
-            <a:ext cx="2103120" cy="329184"/>
-          </a:xfrm>
-          <a:prstGeom prst="rect">
-            <a:avLst/>
-          </a:prstGeom>
-          <a:noFill/>
-          <a:ln/>
-        </p:spPr>
-        <p:txBody>
-          <a:bodyPr wrap="square" rtlCol="0" anchor="ctr"/>
-          <a:lstStyle/>
-          <a:p>
-            <a:pPr indent="0" marL="0">
-              <a:buNone/>
-            </a:pPr>
-            <a:r>
-              <a:rPr lang="en-US" sz="800" dirty="0">
-                <a:solidFill>
-                  <a:srgbClr val="546E6E"/>
-                </a:solidFill>
-                <a:latin typeface="Arial" pitchFamily="34" charset="0"/>
-                <a:ea typeface="Arial" pitchFamily="34" charset="-122"/>
-                <a:cs typeface="Arial" pitchFamily="34" charset="-120"/>
-              </a:rPr>
-              <a:t>Redondant avec Code_departement pour le POC</a:t>
-            </a:r>
-            <a:endParaRPr lang="en-US" sz="800" dirty="0"/>
-          </a:p>
-        </p:txBody>
-      </p:sp>
-      <p:sp>
-        <p:nvSpPr>
-          <p:cNvPr id="59" name="Shape 57"/>
-          <p:cNvSpPr/>
-          <p:nvPr/>
-        </p:nvSpPr>
-        <p:spPr>
-          <a:xfrm>
-            <a:off x="4800600" y="3246120"/>
-            <a:ext cx="4041648" cy="384048"/>
-          </a:xfrm>
-          <a:prstGeom prst="rect">
-            <a:avLst/>
-          </a:prstGeom>
-          <a:solidFill>
-            <a:srgbClr val="FFFFFF"/>
-          </a:solidFill>
-          <a:ln w="5080">
+            <a:ln w="5080">
+              <a:solidFill>
+                <a:srgbClr val="EEDCDC"/>
+              </a:solidFill>
+              <a:prstDash val="solid"/>
+            </a:ln>
+          </p:spPr>
+          <p:txBody>
+            <a:bodyPr/>
+            <a:lstStyle/>
+            <a:p>
+              <a:endParaRPr lang="en-FR"/>
+            </a:p>
+          </p:txBody>
+        </p:sp>
+        <p:sp>
+          <p:nvSpPr>
+            <p:cNvPr id="57" name="Text 55"/>
+            <p:cNvSpPr/>
+            <p:nvPr/>
+          </p:nvSpPr>
+          <p:spPr>
+            <a:xfrm>
+              <a:off x="4846320" y="2843784"/>
+              <a:ext cx="1737360" cy="329184"/>
+            </a:xfrm>
+            <a:prstGeom prst="rect">
+              <a:avLst/>
+            </a:prstGeom>
+            <a:noFill/>
+            <a:ln/>
+          </p:spPr>
+          <p:txBody>
+            <a:bodyPr wrap="square" rtlCol="0" anchor="ctr"/>
+            <a:lstStyle/>
+            <a:p>
+              <a:pPr marL="0" indent="0">
+                <a:buNone/>
+              </a:pPr>
+              <a:r>
+                <a:rPr lang="en-US" sz="850" b="1" dirty="0">
+                  <a:solidFill>
+                    <a:srgbClr val="B94A52"/>
+                  </a:solidFill>
+                  <a:latin typeface="Arial" pitchFamily="34" charset="0"/>
+                  <a:ea typeface="Arial" pitchFamily="34" charset="-122"/>
+                  <a:cs typeface="Arial" pitchFamily="34" charset="-120"/>
+                </a:rPr>
+                <a:t>Code_postal</a:t>
+              </a:r>
+              <a:endParaRPr lang="en-US" sz="850" dirty="0"/>
+            </a:p>
+          </p:txBody>
+        </p:sp>
+        <p:sp>
+          <p:nvSpPr>
+            <p:cNvPr id="58" name="Text 56"/>
+            <p:cNvSpPr/>
+            <p:nvPr/>
+          </p:nvSpPr>
+          <p:spPr>
+            <a:xfrm>
+              <a:off x="6601968" y="2843784"/>
+              <a:ext cx="2103120" cy="329184"/>
+            </a:xfrm>
+            <a:prstGeom prst="rect">
+              <a:avLst/>
+            </a:prstGeom>
+            <a:noFill/>
+            <a:ln/>
+          </p:spPr>
+          <p:txBody>
+            <a:bodyPr wrap="square" rtlCol="0" anchor="ctr"/>
+            <a:lstStyle/>
+            <a:p>
+              <a:pPr marL="0" indent="0">
+                <a:buNone/>
+              </a:pPr>
+              <a:r>
+                <a:rPr lang="en-US" sz="800" dirty="0">
+                  <a:solidFill>
+                    <a:srgbClr val="546E6E"/>
+                  </a:solidFill>
+                  <a:latin typeface="Arial" pitchFamily="34" charset="0"/>
+                  <a:ea typeface="Arial" pitchFamily="34" charset="-122"/>
+                  <a:cs typeface="Arial" pitchFamily="34" charset="-120"/>
+                </a:rPr>
+                <a:t>Redondant avec Code_departement pour le POC</a:t>
+              </a:r>
+              <a:endParaRPr lang="en-US" sz="800" dirty="0"/>
+            </a:p>
+          </p:txBody>
+        </p:sp>
+        <p:sp>
+          <p:nvSpPr>
+            <p:cNvPr id="59" name="Shape 57"/>
+            <p:cNvSpPr/>
+            <p:nvPr/>
+          </p:nvSpPr>
+          <p:spPr>
+            <a:xfrm>
+              <a:off x="4800600" y="3246120"/>
+              <a:ext cx="4041648" cy="384048"/>
+            </a:xfrm>
+            <a:prstGeom prst="rect">
+              <a:avLst/>
+            </a:prstGeom>
             <a:solidFill>
-              <a:srgbClr val="EEDCDC"/>
+              <a:srgbClr val="FFFFFF"/>
             </a:solidFill>
-            <a:prstDash val="solid"/>
-          </a:ln>
-        </p:spPr>
-      </p:sp>
-      <p:sp>
-        <p:nvSpPr>
-          <p:cNvPr id="60" name="Text 58"/>
-          <p:cNvSpPr/>
-          <p:nvPr/>
-        </p:nvSpPr>
-        <p:spPr>
-          <a:xfrm>
-            <a:off x="4846320" y="3264408"/>
-            <a:ext cx="1737360" cy="329184"/>
-          </a:xfrm>
-          <a:prstGeom prst="rect">
-            <a:avLst/>
-          </a:prstGeom>
-          <a:noFill/>
-          <a:ln/>
-        </p:spPr>
-        <p:txBody>
-          <a:bodyPr wrap="square" rtlCol="0" anchor="ctr"/>
-          <a:lstStyle/>
-          <a:p>
-            <a:pPr indent="0" marL="0">
-              <a:buNone/>
-            </a:pPr>
-            <a:r>
-              <a:rPr lang="en-US" sz="850" b="1" dirty="0">
-                <a:solidFill>
-                  <a:srgbClr val="B94A52"/>
-                </a:solidFill>
-                <a:latin typeface="Arial" pitchFamily="34" charset="0"/>
-                <a:ea typeface="Arial" pitchFamily="34" charset="-122"/>
-                <a:cs typeface="Arial" pitchFamily="34" charset="-120"/>
-              </a:rPr>
-              <a:t>BTQ</a:t>
-            </a:r>
-            <a:endParaRPr lang="en-US" sz="850" dirty="0"/>
-          </a:p>
-        </p:txBody>
-      </p:sp>
-      <p:sp>
-        <p:nvSpPr>
-          <p:cNvPr id="61" name="Text 59"/>
-          <p:cNvSpPr/>
-          <p:nvPr/>
-        </p:nvSpPr>
-        <p:spPr>
-          <a:xfrm>
-            <a:off x="6601968" y="3264408"/>
-            <a:ext cx="2103120" cy="329184"/>
-          </a:xfrm>
-          <a:prstGeom prst="rect">
-            <a:avLst/>
-          </a:prstGeom>
-          <a:noFill/>
-          <a:ln/>
-        </p:spPr>
-        <p:txBody>
-          <a:bodyPr wrap="square" rtlCol="0" anchor="ctr"/>
-          <a:lstStyle/>
-          <a:p>
-            <a:pPr indent="0" marL="0">
-              <a:buNone/>
-            </a:pPr>
-            <a:r>
-              <a:rPr lang="en-US" sz="800" dirty="0">
-                <a:solidFill>
-                  <a:srgbClr val="546E6E"/>
-                </a:solidFill>
-                <a:latin typeface="Arial" pitchFamily="34" charset="0"/>
-                <a:ea typeface="Arial" pitchFamily="34" charset="-122"/>
-                <a:cs typeface="Arial" pitchFamily="34" charset="-120"/>
-              </a:rPr>
-              <a:t>Très peu renseigné (&lt; 1 % de valeurs)</a:t>
-            </a:r>
-            <a:endParaRPr lang="en-US" sz="800" dirty="0"/>
-          </a:p>
-        </p:txBody>
-      </p:sp>
-      <p:sp>
-        <p:nvSpPr>
-          <p:cNvPr id="62" name="Shape 60"/>
-          <p:cNvSpPr/>
-          <p:nvPr/>
-        </p:nvSpPr>
-        <p:spPr>
-          <a:xfrm>
-            <a:off x="4800600" y="3666744"/>
-            <a:ext cx="4041648" cy="384048"/>
-          </a:xfrm>
-          <a:prstGeom prst="rect">
-            <a:avLst/>
-          </a:prstGeom>
-          <a:solidFill>
-            <a:srgbClr val="FFF8F8"/>
-          </a:solidFill>
-          <a:ln w="5080">
+            <a:ln w="5080">
+              <a:solidFill>
+                <a:srgbClr val="EEDCDC"/>
+              </a:solidFill>
+              <a:prstDash val="solid"/>
+            </a:ln>
+          </p:spPr>
+          <p:txBody>
+            <a:bodyPr/>
+            <a:lstStyle/>
+            <a:p>
+              <a:endParaRPr lang="en-FR"/>
+            </a:p>
+          </p:txBody>
+        </p:sp>
+        <p:sp>
+          <p:nvSpPr>
+            <p:cNvPr id="60" name="Text 58"/>
+            <p:cNvSpPr/>
+            <p:nvPr/>
+          </p:nvSpPr>
+          <p:spPr>
+            <a:xfrm>
+              <a:off x="4846320" y="3264408"/>
+              <a:ext cx="1737360" cy="329184"/>
+            </a:xfrm>
+            <a:prstGeom prst="rect">
+              <a:avLst/>
+            </a:prstGeom>
+            <a:noFill/>
+            <a:ln/>
+          </p:spPr>
+          <p:txBody>
+            <a:bodyPr wrap="square" rtlCol="0" anchor="ctr"/>
+            <a:lstStyle/>
+            <a:p>
+              <a:pPr marL="0" indent="0">
+                <a:buNone/>
+              </a:pPr>
+              <a:r>
+                <a:rPr lang="en-US" sz="850" b="1" dirty="0">
+                  <a:solidFill>
+                    <a:srgbClr val="B94A52"/>
+                  </a:solidFill>
+                  <a:latin typeface="Arial" pitchFamily="34" charset="0"/>
+                  <a:ea typeface="Arial" pitchFamily="34" charset="-122"/>
+                  <a:cs typeface="Arial" pitchFamily="34" charset="-120"/>
+                </a:rPr>
+                <a:t>BTQ</a:t>
+              </a:r>
+              <a:endParaRPr lang="en-US" sz="850" dirty="0"/>
+            </a:p>
+          </p:txBody>
+        </p:sp>
+        <p:sp>
+          <p:nvSpPr>
+            <p:cNvPr id="61" name="Text 59"/>
+            <p:cNvSpPr/>
+            <p:nvPr/>
+          </p:nvSpPr>
+          <p:spPr>
+            <a:xfrm>
+              <a:off x="6601968" y="3264408"/>
+              <a:ext cx="2103120" cy="329184"/>
+            </a:xfrm>
+            <a:prstGeom prst="rect">
+              <a:avLst/>
+            </a:prstGeom>
+            <a:noFill/>
+            <a:ln/>
+          </p:spPr>
+          <p:txBody>
+            <a:bodyPr wrap="square" rtlCol="0" anchor="ctr"/>
+            <a:lstStyle/>
+            <a:p>
+              <a:pPr marL="0" indent="0">
+                <a:buNone/>
+              </a:pPr>
+              <a:r>
+                <a:rPr lang="en-US" sz="800" dirty="0">
+                  <a:solidFill>
+                    <a:srgbClr val="546E6E"/>
+                  </a:solidFill>
+                  <a:latin typeface="Arial" pitchFamily="34" charset="0"/>
+                  <a:ea typeface="Arial" pitchFamily="34" charset="-122"/>
+                  <a:cs typeface="Arial" pitchFamily="34" charset="-120"/>
+                </a:rPr>
+                <a:t>Très peu renseigné (&lt; 1 % de valeurs)</a:t>
+              </a:r>
+              <a:endParaRPr lang="en-US" sz="800" dirty="0"/>
+            </a:p>
+          </p:txBody>
+        </p:sp>
+        <p:sp>
+          <p:nvSpPr>
+            <p:cNvPr id="62" name="Shape 60"/>
+            <p:cNvSpPr/>
+            <p:nvPr/>
+          </p:nvSpPr>
+          <p:spPr>
+            <a:xfrm>
+              <a:off x="4800600" y="3666744"/>
+              <a:ext cx="4041648" cy="384048"/>
+            </a:xfrm>
+            <a:prstGeom prst="rect">
+              <a:avLst/>
+            </a:prstGeom>
             <a:solidFill>
-              <a:srgbClr val="EEDCDC"/>
+              <a:srgbClr val="FFF8F8"/>
             </a:solidFill>
-            <a:prstDash val="solid"/>
-          </a:ln>
-        </p:spPr>
-      </p:sp>
-      <p:sp>
-        <p:nvSpPr>
-          <p:cNvPr id="63" name="Text 61"/>
-          <p:cNvSpPr/>
-          <p:nvPr/>
-        </p:nvSpPr>
-        <p:spPr>
-          <a:xfrm>
-            <a:off x="4846320" y="3685032"/>
-            <a:ext cx="1737360" cy="329184"/>
-          </a:xfrm>
-          <a:prstGeom prst="rect">
-            <a:avLst/>
-          </a:prstGeom>
-          <a:noFill/>
-          <a:ln/>
-        </p:spPr>
-        <p:txBody>
-          <a:bodyPr wrap="square" rtlCol="0" anchor="ctr"/>
-          <a:lstStyle/>
-          <a:p>
-            <a:pPr indent="0" marL="0">
-              <a:buNone/>
-            </a:pPr>
-            <a:r>
-              <a:rPr lang="en-US" sz="850" b="1" dirty="0">
-                <a:solidFill>
-                  <a:srgbClr val="B94A52"/>
-                </a:solidFill>
-                <a:latin typeface="Arial" pitchFamily="34" charset="0"/>
-                <a:ea typeface="Arial" pitchFamily="34" charset="-122"/>
-                <a:cs typeface="Arial" pitchFamily="34" charset="-120"/>
-              </a:rPr>
-              <a:t>Code_voie</a:t>
-            </a:r>
-            <a:endParaRPr lang="en-US" sz="850" dirty="0"/>
-          </a:p>
-        </p:txBody>
-      </p:sp>
-      <p:sp>
-        <p:nvSpPr>
-          <p:cNvPr id="64" name="Text 62"/>
-          <p:cNvSpPr/>
-          <p:nvPr/>
-        </p:nvSpPr>
-        <p:spPr>
-          <a:xfrm>
-            <a:off x="6601968" y="3685032"/>
-            <a:ext cx="2103120" cy="329184"/>
-          </a:xfrm>
-          <a:prstGeom prst="rect">
-            <a:avLst/>
-          </a:prstGeom>
-          <a:noFill/>
-          <a:ln/>
-        </p:spPr>
-        <p:txBody>
-          <a:bodyPr wrap="square" rtlCol="0" anchor="ctr"/>
-          <a:lstStyle/>
-          <a:p>
-            <a:pPr indent="0" marL="0">
-              <a:buNone/>
-            </a:pPr>
-            <a:r>
-              <a:rPr lang="en-US" sz="800" dirty="0">
-                <a:solidFill>
-                  <a:srgbClr val="546E6E"/>
-                </a:solidFill>
-                <a:latin typeface="Arial" pitchFamily="34" charset="0"/>
-                <a:ea typeface="Arial" pitchFamily="34" charset="-122"/>
-                <a:cs typeface="Arial" pitchFamily="34" charset="-120"/>
-              </a:rPr>
-              <a:t>Identifiant cadastral — hors périmètre POC</a:t>
-            </a:r>
-            <a:endParaRPr lang="en-US" sz="800" dirty="0"/>
-          </a:p>
-        </p:txBody>
-      </p:sp>
-      <p:sp>
-        <p:nvSpPr>
-          <p:cNvPr id="65" name="Shape 63"/>
-          <p:cNvSpPr/>
-          <p:nvPr/>
-        </p:nvSpPr>
-        <p:spPr>
-          <a:xfrm>
-            <a:off x="4800600" y="4087368"/>
-            <a:ext cx="4041648" cy="384048"/>
-          </a:xfrm>
-          <a:prstGeom prst="rect">
-            <a:avLst/>
-          </a:prstGeom>
-          <a:solidFill>
-            <a:srgbClr val="FFFFFF"/>
-          </a:solidFill>
-          <a:ln w="5080">
+            <a:ln w="5080">
+              <a:solidFill>
+                <a:srgbClr val="EEDCDC"/>
+              </a:solidFill>
+              <a:prstDash val="solid"/>
+            </a:ln>
+          </p:spPr>
+          <p:txBody>
+            <a:bodyPr/>
+            <a:lstStyle/>
+            <a:p>
+              <a:endParaRPr lang="en-FR"/>
+            </a:p>
+          </p:txBody>
+        </p:sp>
+        <p:sp>
+          <p:nvSpPr>
+            <p:cNvPr id="63" name="Text 61"/>
+            <p:cNvSpPr/>
+            <p:nvPr/>
+          </p:nvSpPr>
+          <p:spPr>
+            <a:xfrm>
+              <a:off x="4846320" y="3685032"/>
+              <a:ext cx="1737360" cy="329184"/>
+            </a:xfrm>
+            <a:prstGeom prst="rect">
+              <a:avLst/>
+            </a:prstGeom>
+            <a:noFill/>
+            <a:ln/>
+          </p:spPr>
+          <p:txBody>
+            <a:bodyPr wrap="square" rtlCol="0" anchor="ctr"/>
+            <a:lstStyle/>
+            <a:p>
+              <a:pPr marL="0" indent="0">
+                <a:buNone/>
+              </a:pPr>
+              <a:r>
+                <a:rPr lang="en-US" sz="850" b="1" dirty="0">
+                  <a:solidFill>
+                    <a:srgbClr val="B94A52"/>
+                  </a:solidFill>
+                  <a:latin typeface="Arial" pitchFamily="34" charset="0"/>
+                  <a:ea typeface="Arial" pitchFamily="34" charset="-122"/>
+                  <a:cs typeface="Arial" pitchFamily="34" charset="-120"/>
+                </a:rPr>
+                <a:t>Code_voie</a:t>
+              </a:r>
+              <a:endParaRPr lang="en-US" sz="850" dirty="0"/>
+            </a:p>
+          </p:txBody>
+        </p:sp>
+        <p:sp>
+          <p:nvSpPr>
+            <p:cNvPr id="64" name="Text 62"/>
+            <p:cNvSpPr/>
+            <p:nvPr/>
+          </p:nvSpPr>
+          <p:spPr>
+            <a:xfrm>
+              <a:off x="6601968" y="3685032"/>
+              <a:ext cx="2103120" cy="329184"/>
+            </a:xfrm>
+            <a:prstGeom prst="rect">
+              <a:avLst/>
+            </a:prstGeom>
+            <a:noFill/>
+            <a:ln/>
+          </p:spPr>
+          <p:txBody>
+            <a:bodyPr wrap="square" rtlCol="0" anchor="ctr"/>
+            <a:lstStyle/>
+            <a:p>
+              <a:pPr marL="0" indent="0">
+                <a:buNone/>
+              </a:pPr>
+              <a:r>
+                <a:rPr lang="en-US" sz="800" dirty="0">
+                  <a:solidFill>
+                    <a:srgbClr val="546E6E"/>
+                  </a:solidFill>
+                  <a:latin typeface="Arial" pitchFamily="34" charset="0"/>
+                  <a:ea typeface="Arial" pitchFamily="34" charset="-122"/>
+                  <a:cs typeface="Arial" pitchFamily="34" charset="-120"/>
+                </a:rPr>
+                <a:t>Identifiant cadastral — hors périmètre POC</a:t>
+              </a:r>
+              <a:endParaRPr lang="en-US" sz="800" dirty="0"/>
+            </a:p>
+          </p:txBody>
+        </p:sp>
+        <p:sp>
+          <p:nvSpPr>
+            <p:cNvPr id="65" name="Shape 63"/>
+            <p:cNvSpPr/>
+            <p:nvPr/>
+          </p:nvSpPr>
+          <p:spPr>
+            <a:xfrm>
+              <a:off x="4800600" y="4087368"/>
+              <a:ext cx="4041648" cy="384048"/>
+            </a:xfrm>
+            <a:prstGeom prst="rect">
+              <a:avLst/>
+            </a:prstGeom>
             <a:solidFill>
-              <a:srgbClr val="EEDCDC"/>
+              <a:srgbClr val="FFFFFF"/>
             </a:solidFill>
-            <a:prstDash val="solid"/>
-          </a:ln>
-        </p:spPr>
-      </p:sp>
-      <p:sp>
-        <p:nvSpPr>
-          <p:cNvPr id="66" name="Text 64"/>
-          <p:cNvSpPr/>
-          <p:nvPr/>
-        </p:nvSpPr>
-        <p:spPr>
-          <a:xfrm>
-            <a:off x="4846320" y="4105656"/>
-            <a:ext cx="1737360" cy="329184"/>
-          </a:xfrm>
-          <a:prstGeom prst="rect">
-            <a:avLst/>
-          </a:prstGeom>
-          <a:noFill/>
-          <a:ln/>
-        </p:spPr>
-        <p:txBody>
-          <a:bodyPr wrap="square" rtlCol="0" anchor="ctr"/>
-          <a:lstStyle/>
-          <a:p>
-            <a:pPr indent="0" marL="0">
-              <a:buNone/>
-            </a:pPr>
-            <a:r>
-              <a:rPr lang="en-US" sz="850" b="1" dirty="0">
-                <a:solidFill>
-                  <a:srgbClr val="B94A52"/>
-                </a:solidFill>
-                <a:latin typeface="Arial" pitchFamily="34" charset="0"/>
-                <a:ea typeface="Arial" pitchFamily="34" charset="-122"/>
-                <a:cs typeface="Arial" pitchFamily="34" charset="-120"/>
-              </a:rPr>
-              <a:t>indice_prix_logement</a:t>
-            </a:r>
-            <a:endParaRPr lang="en-US" sz="850" dirty="0"/>
-          </a:p>
-        </p:txBody>
-      </p:sp>
-      <p:sp>
-        <p:nvSpPr>
-          <p:cNvPr id="67" name="Text 65"/>
-          <p:cNvSpPr/>
-          <p:nvPr/>
-        </p:nvSpPr>
-        <p:spPr>
-          <a:xfrm>
-            <a:off x="6601968" y="4105656"/>
-            <a:ext cx="2103120" cy="329184"/>
-          </a:xfrm>
-          <a:prstGeom prst="rect">
-            <a:avLst/>
-          </a:prstGeom>
-          <a:noFill/>
-          <a:ln/>
-        </p:spPr>
-        <p:txBody>
-          <a:bodyPr wrap="square" rtlCol="0" anchor="ctr"/>
-          <a:lstStyle/>
-          <a:p>
-            <a:pPr indent="0" marL="0">
-              <a:buNone/>
-            </a:pPr>
-            <a:r>
-              <a:rPr lang="en-US" sz="800" dirty="0">
-                <a:solidFill>
-                  <a:srgbClr val="546E6E"/>
-                </a:solidFill>
-                <a:latin typeface="Arial" pitchFamily="34" charset="0"/>
-                <a:ea typeface="Arial" pitchFamily="34" charset="-122"/>
-                <a:cs typeface="Arial" pitchFamily="34" charset="-120"/>
-              </a:rPr>
-              <a:t>Hors schéma — nécessite table séparée</a:t>
-            </a:r>
-            <a:endParaRPr lang="en-US" sz="800" dirty="0"/>
-          </a:p>
-        </p:txBody>
-      </p:sp>
+            <a:ln w="5080">
+              <a:solidFill>
+                <a:srgbClr val="EEDCDC"/>
+              </a:solidFill>
+              <a:prstDash val="solid"/>
+            </a:ln>
+          </p:spPr>
+          <p:txBody>
+            <a:bodyPr/>
+            <a:lstStyle/>
+            <a:p>
+              <a:endParaRPr lang="en-FR"/>
+            </a:p>
+          </p:txBody>
+        </p:sp>
+        <p:sp>
+          <p:nvSpPr>
+            <p:cNvPr id="66" name="Text 64"/>
+            <p:cNvSpPr/>
+            <p:nvPr/>
+          </p:nvSpPr>
+          <p:spPr>
+            <a:xfrm>
+              <a:off x="4846320" y="4105656"/>
+              <a:ext cx="1737360" cy="329184"/>
+            </a:xfrm>
+            <a:prstGeom prst="rect">
+              <a:avLst/>
+            </a:prstGeom>
+            <a:noFill/>
+            <a:ln/>
+          </p:spPr>
+          <p:txBody>
+            <a:bodyPr wrap="square" rtlCol="0" anchor="ctr"/>
+            <a:lstStyle/>
+            <a:p>
+              <a:pPr marL="0" indent="0">
+                <a:buNone/>
+              </a:pPr>
+              <a:r>
+                <a:rPr lang="en-US" sz="850" b="1" dirty="0">
+                  <a:solidFill>
+                    <a:srgbClr val="B94A52"/>
+                  </a:solidFill>
+                  <a:latin typeface="Arial" pitchFamily="34" charset="0"/>
+                  <a:ea typeface="Arial" pitchFamily="34" charset="-122"/>
+                  <a:cs typeface="Arial" pitchFamily="34" charset="-120"/>
+                </a:rPr>
+                <a:t>indice_prix_logement</a:t>
+              </a:r>
+              <a:endParaRPr lang="en-US" sz="850" dirty="0"/>
+            </a:p>
+          </p:txBody>
+        </p:sp>
+        <p:sp>
+          <p:nvSpPr>
+            <p:cNvPr id="67" name="Text 65"/>
+            <p:cNvSpPr/>
+            <p:nvPr/>
+          </p:nvSpPr>
+          <p:spPr>
+            <a:xfrm>
+              <a:off x="6601968" y="4105656"/>
+              <a:ext cx="2103120" cy="329184"/>
+            </a:xfrm>
+            <a:prstGeom prst="rect">
+              <a:avLst/>
+            </a:prstGeom>
+            <a:noFill/>
+            <a:ln/>
+          </p:spPr>
+          <p:txBody>
+            <a:bodyPr wrap="square" rtlCol="0" anchor="ctr"/>
+            <a:lstStyle/>
+            <a:p>
+              <a:pPr marL="0" indent="0">
+                <a:buNone/>
+              </a:pPr>
+              <a:r>
+                <a:rPr lang="en-US" sz="800" dirty="0">
+                  <a:solidFill>
+                    <a:srgbClr val="546E6E"/>
+                  </a:solidFill>
+                  <a:latin typeface="Arial" pitchFamily="34" charset="0"/>
+                  <a:ea typeface="Arial" pitchFamily="34" charset="-122"/>
+                  <a:cs typeface="Arial" pitchFamily="34" charset="-120"/>
+                </a:rPr>
+                <a:t>Hors schéma — nécessite table séparée</a:t>
+              </a:r>
+              <a:endParaRPr lang="en-US" sz="800" dirty="0"/>
+            </a:p>
+          </p:txBody>
+        </p:sp>
+      </p:grpSp>
     </p:spTree>
   </p:cSld>
   <p:clrMapOvr>
@@ -10182,6 +9361,7 @@
         <a:solidFill>
           <a:srgbClr val="EAF5F4"/>
         </a:solidFill>
+        <a:effectLst/>
       </p:bgPr>
     </p:bg>
     <p:spTree>
@@ -10222,6 +9402,13 @@
             <a:prstDash val="solid"/>
           </a:ln>
         </p:spPr>
+        <p:txBody>
+          <a:bodyPr/>
+          <a:lstStyle/>
+          <a:p>
+            <a:endParaRPr lang="en-FR"/>
+          </a:p>
+        </p:txBody>
       </p:sp>
       <p:sp>
         <p:nvSpPr>
@@ -10244,7 +9431,7 @@
           <a:bodyPr wrap="square" rtlCol="0" anchor="ctr"/>
           <a:lstStyle/>
           <a:p>
-            <a:pPr indent="0" marL="0">
+            <a:pPr marL="0" indent="0">
               <a:buNone/>
             </a:pPr>
             <a:r>
@@ -10284,6 +9471,13 @@
             <a:prstDash val="solid"/>
           </a:ln>
         </p:spPr>
+        <p:txBody>
+          <a:bodyPr/>
+          <a:lstStyle/>
+          <a:p>
+            <a:endParaRPr lang="en-FR"/>
+          </a:p>
+        </p:txBody>
       </p:sp>
       <p:sp>
         <p:nvSpPr>
@@ -10306,7 +9500,7 @@
           <a:bodyPr wrap="square" rtlCol="0" anchor="ctr"/>
           <a:lstStyle/>
           <a:p>
-            <a:pPr indent="0" marL="0">
+            <a:pPr marL="0" indent="0">
               <a:buNone/>
             </a:pPr>
             <a:r>
@@ -10326,15 +9520,15 @@
       </p:sp>
       <p:pic>
         <p:nvPicPr>
-          <p:cNvPr id="6" name="Image 0" descr="preencoded.png">    </p:cNvPr>
+          <p:cNvPr id="6" name="Image 0" descr="preencoded.png"/>
           <p:cNvPicPr>
             <a:picLocks noChangeAspect="1"/>
           </p:cNvPicPr>
           <p:nvPr/>
         </p:nvPicPr>
         <p:blipFill>
-          <a:blip r:embed="rId1"/>
-          <a:srcRect l="0" r="0" t="0" b="0"/>
+          <a:blip r:embed="rId3"/>
+          <a:srcRect/>
           <a:stretch/>
         </p:blipFill>
         <p:spPr>
@@ -10368,7 +9562,7 @@
           <a:bodyPr wrap="square" rtlCol="0" anchor="ctr"/>
           <a:lstStyle/>
           <a:p>
-            <a:pPr algn="ctr" indent="0" marL="0">
+            <a:pPr marL="0" indent="0" algn="ctr">
               <a:buNone/>
             </a:pPr>
             <a:r>
@@ -10402,6 +9596,7 @@
         <a:solidFill>
           <a:srgbClr val="EAF5F4"/>
         </a:solidFill>
+        <a:effectLst/>
       </p:bgPr>
     </p:bg>
     <p:spTree>
@@ -10442,6 +9637,13 @@
             <a:prstDash val="solid"/>
           </a:ln>
         </p:spPr>
+        <p:txBody>
+          <a:bodyPr/>
+          <a:lstStyle/>
+          <a:p>
+            <a:endParaRPr lang="en-FR"/>
+          </a:p>
+        </p:txBody>
       </p:sp>
       <p:sp>
         <p:nvSpPr>
@@ -10464,7 +9666,7 @@
           <a:bodyPr wrap="square" rtlCol="0" anchor="ctr"/>
           <a:lstStyle/>
           <a:p>
-            <a:pPr indent="0" marL="0">
+            <a:pPr marL="0" indent="0">
               <a:buNone/>
             </a:pPr>
             <a:r>
@@ -10476,7 +9678,40 @@
                 <a:ea typeface="Arial" pitchFamily="34" charset="-122"/>
                 <a:cs typeface="Arial" pitchFamily="34" charset="-120"/>
               </a:rPr>
-              <a:t>Schéma relationnel normalisé (3FN)</a:t>
+              <a:t>Schéma </a:t>
+            </a:r>
+            <a:r>
+              <a:rPr lang="en-US" sz="2000" b="1" dirty="0" err="1">
+                <a:solidFill>
+                  <a:srgbClr val="1C3838"/>
+                </a:solidFill>
+                <a:latin typeface="Arial" pitchFamily="34" charset="0"/>
+                <a:ea typeface="Arial" pitchFamily="34" charset="-122"/>
+                <a:cs typeface="Arial" pitchFamily="34" charset="-120"/>
+              </a:rPr>
+              <a:t>relationnel</a:t>
+            </a:r>
+            <a:r>
+              <a:rPr lang="en-US" sz="2000" b="1" dirty="0">
+                <a:solidFill>
+                  <a:srgbClr val="1C3838"/>
+                </a:solidFill>
+                <a:latin typeface="Arial" pitchFamily="34" charset="0"/>
+                <a:ea typeface="Arial" pitchFamily="34" charset="-122"/>
+                <a:cs typeface="Arial" pitchFamily="34" charset="-120"/>
+              </a:rPr>
+              <a:t> </a:t>
+            </a:r>
+            <a:r>
+              <a:rPr lang="en-US" sz="2000" b="1" dirty="0" err="1">
+                <a:solidFill>
+                  <a:srgbClr val="1C3838"/>
+                </a:solidFill>
+                <a:latin typeface="Arial" pitchFamily="34" charset="0"/>
+                <a:ea typeface="Arial" pitchFamily="34" charset="-122"/>
+                <a:cs typeface="Arial" pitchFamily="34" charset="-120"/>
+              </a:rPr>
+              <a:t>normalisé</a:t>
             </a:r>
             <a:endParaRPr lang="en-US" sz="2000" dirty="0"/>
           </a:p>
@@ -10504,18 +9739,25 @@
             <a:prstDash val="solid"/>
           </a:ln>
         </p:spPr>
+        <p:txBody>
+          <a:bodyPr/>
+          <a:lstStyle/>
+          <a:p>
+            <a:endParaRPr lang="en-FR"/>
+          </a:p>
+        </p:txBody>
       </p:sp>
       <p:pic>
         <p:nvPicPr>
-          <p:cNvPr id="5" name="Image 0" descr="preencoded.png">    </p:cNvPr>
+          <p:cNvPr id="5" name="Image 0" descr="preencoded.png"/>
           <p:cNvPicPr>
             <a:picLocks noChangeAspect="1"/>
           </p:cNvPicPr>
           <p:nvPr/>
         </p:nvPicPr>
         <p:blipFill>
-          <a:blip r:embed="rId1"/>
-          <a:srcRect l="0" r="0" t="0" b="0"/>
+          <a:blip r:embed="rId3"/>
+          <a:srcRect/>
           <a:stretch/>
         </p:blipFill>
         <p:spPr>
@@ -10549,7 +9791,7 @@
           <a:bodyPr wrap="square" rtlCol="0" anchor="ctr"/>
           <a:lstStyle/>
           <a:p>
-            <a:pPr algn="ctr" indent="0" marL="0">
+            <a:pPr marL="0" indent="0" algn="ctr">
               <a:buNone/>
             </a:pPr>
             <a:r>
@@ -10561,7 +9803,7 @@
                 <a:ea typeface="Arial" pitchFamily="34" charset="-122"/>
                 <a:cs typeface="Arial" pitchFamily="34" charset="-120"/>
               </a:rPr>
-              <a:t>4 tables · Clés primaires et étrangères explicites · Données atomiques (1NF) · Dépendances transitives éliminées (3NF) · Conforme RGPD</a:t>
+              <a:t>4 tables · Clés primaires et étrangères explicites · Données atomiques (1NF) · Dépendances transitives éliminées (3NF)</a:t>
             </a:r>
             <a:endParaRPr lang="en-US" sz="850" dirty="0"/>
           </a:p>
@@ -10583,6 +9825,7 @@
         <a:solidFill>
           <a:srgbClr val="EAF5F4"/>
         </a:solidFill>
+        <a:effectLst/>
       </p:bgPr>
     </p:bg>
     <p:spTree>
@@ -10623,6 +9866,13 @@
             <a:prstDash val="solid"/>
           </a:ln>
         </p:spPr>
+        <p:txBody>
+          <a:bodyPr/>
+          <a:lstStyle/>
+          <a:p>
+            <a:endParaRPr lang="en-FR"/>
+          </a:p>
+        </p:txBody>
       </p:sp>
       <p:sp>
         <p:nvSpPr>
@@ -10645,7 +9895,7 @@
           <a:bodyPr wrap="square" rtlCol="0" anchor="ctr"/>
           <a:lstStyle/>
           <a:p>
-            <a:pPr indent="0" marL="0">
+            <a:pPr marL="0" indent="0">
               <a:buNone/>
             </a:pPr>
             <a:r>
@@ -10685,6 +9935,13 @@
             <a:prstDash val="solid"/>
           </a:ln>
         </p:spPr>
+        <p:txBody>
+          <a:bodyPr/>
+          <a:lstStyle/>
+          <a:p>
+            <a:endParaRPr lang="en-FR"/>
+          </a:p>
+        </p:txBody>
       </p:sp>
       <p:sp>
         <p:nvSpPr>
@@ -10710,13 +9967,20 @@
             <a:prstDash val="solid"/>
           </a:ln>
           <a:effectLst>
-            <a:outerShdw sx="100000" sy="100000" kx="0" ky="0" algn="bl" rotWithShape="0" blurRad="38100" dist="25400" dir="8100000">
+            <a:outerShdw blurRad="38100" dist="25400" dir="8100000" algn="bl" rotWithShape="0">
               <a:srgbClr val="000000">
                 <a:alpha val="10000"/>
               </a:srgbClr>
             </a:outerShdw>
           </a:effectLst>
         </p:spPr>
+        <p:txBody>
+          <a:bodyPr/>
+          <a:lstStyle/>
+          <a:p>
+            <a:endParaRPr lang="en-FR"/>
+          </a:p>
+        </p:txBody>
       </p:sp>
       <p:sp>
         <p:nvSpPr>
@@ -10742,6 +10006,13 @@
             <a:prstDash val="solid"/>
           </a:ln>
         </p:spPr>
+        <p:txBody>
+          <a:bodyPr/>
+          <a:lstStyle/>
+          <a:p>
+            <a:endParaRPr lang="en-FR"/>
+          </a:p>
+        </p:txBody>
       </p:sp>
       <p:sp>
         <p:nvSpPr>
@@ -10764,7 +10035,7 @@
           <a:bodyPr wrap="square" rtlCol="0" anchor="ctr"/>
           <a:lstStyle/>
           <a:p>
-            <a:pPr indent="0" marL="0">
+            <a:pPr marL="0" indent="0">
               <a:buNone/>
             </a:pPr>
             <a:r>
@@ -10784,15 +10055,15 @@
       </p:sp>
       <p:pic>
         <p:nvPicPr>
-          <p:cNvPr id="8" name="Image 0" descr="preencoded.png">    </p:cNvPr>
+          <p:cNvPr id="8" name="Image 0" descr="preencoded.png"/>
           <p:cNvPicPr>
             <a:picLocks noChangeAspect="1"/>
           </p:cNvPicPr>
           <p:nvPr/>
         </p:nvPicPr>
         <p:blipFill>
-          <a:blip r:embed="rId1"/>
-          <a:srcRect l="0" r="0" t="0" b="0"/>
+          <a:blip r:embed="rId3"/>
+          <a:srcRect/>
           <a:stretch/>
         </p:blipFill>
         <p:spPr>
@@ -10829,13 +10100,20 @@
             <a:prstDash val="solid"/>
           </a:ln>
           <a:effectLst>
-            <a:outerShdw sx="100000" sy="100000" kx="0" ky="0" algn="bl" rotWithShape="0" blurRad="38100" dist="25400" dir="8100000">
+            <a:outerShdw blurRad="38100" dist="25400" dir="8100000" algn="bl" rotWithShape="0">
               <a:srgbClr val="000000">
                 <a:alpha val="10000"/>
               </a:srgbClr>
             </a:outerShdw>
           </a:effectLst>
         </p:spPr>
+        <p:txBody>
+          <a:bodyPr/>
+          <a:lstStyle/>
+          <a:p>
+            <a:endParaRPr lang="en-FR"/>
+          </a:p>
+        </p:txBody>
       </p:sp>
       <p:sp>
         <p:nvSpPr>
@@ -10861,6 +10139,13 @@
             <a:prstDash val="solid"/>
           </a:ln>
         </p:spPr>
+        <p:txBody>
+          <a:bodyPr/>
+          <a:lstStyle/>
+          <a:p>
+            <a:endParaRPr lang="en-FR"/>
+          </a:p>
+        </p:txBody>
       </p:sp>
       <p:sp>
         <p:nvSpPr>
@@ -10883,7 +10168,7 @@
           <a:bodyPr wrap="square" rtlCol="0" anchor="ctr"/>
           <a:lstStyle/>
           <a:p>
-            <a:pPr indent="0" marL="0">
+            <a:pPr marL="0" indent="0">
               <a:buNone/>
             </a:pPr>
             <a:r>
@@ -10903,15 +10188,15 @@
       </p:sp>
       <p:pic>
         <p:nvPicPr>
-          <p:cNvPr id="12" name="Image 1" descr="preencoded.png">    </p:cNvPr>
+          <p:cNvPr id="12" name="Image 1" descr="preencoded.png"/>
           <p:cNvPicPr>
             <a:picLocks noChangeAspect="1"/>
           </p:cNvPicPr>
           <p:nvPr/>
         </p:nvPicPr>
         <p:blipFill>
-          <a:blip r:embed="rId2"/>
-          <a:srcRect l="0" r="0" t="0" b="0"/>
+          <a:blip r:embed="rId4"/>
+          <a:srcRect/>
           <a:stretch/>
         </p:blipFill>
         <p:spPr>
@@ -10940,6 +10225,7 @@
         <a:solidFill>
           <a:srgbClr val="EAF5F4"/>
         </a:solidFill>
+        <a:effectLst/>
       </p:bgPr>
     </p:bg>
     <p:spTree>
@@ -10980,6 +10266,13 @@
             <a:prstDash val="solid"/>
           </a:ln>
         </p:spPr>
+        <p:txBody>
+          <a:bodyPr/>
+          <a:lstStyle/>
+          <a:p>
+            <a:endParaRPr lang="en-FR"/>
+          </a:p>
+        </p:txBody>
       </p:sp>
       <p:sp>
         <p:nvSpPr>
@@ -11002,7 +10295,7 @@
           <a:bodyPr wrap="square" rtlCol="0" anchor="ctr"/>
           <a:lstStyle/>
           <a:p>
-            <a:pPr indent="0" marL="0">
+            <a:pPr marL="0" indent="0">
               <a:buNone/>
             </a:pPr>
             <a:r>
@@ -11042,6 +10335,13 @@
             <a:prstDash val="solid"/>
           </a:ln>
         </p:spPr>
+        <p:txBody>
+          <a:bodyPr/>
+          <a:lstStyle/>
+          <a:p>
+            <a:endParaRPr lang="en-FR"/>
+          </a:p>
+        </p:txBody>
       </p:sp>
       <p:sp>
         <p:nvSpPr>
@@ -11067,13 +10367,20 @@
             <a:prstDash val="solid"/>
           </a:ln>
           <a:effectLst>
-            <a:outerShdw sx="100000" sy="100000" kx="0" ky="0" algn="bl" rotWithShape="0" blurRad="38100" dist="25400" dir="8100000">
+            <a:outerShdw blurRad="38100" dist="25400" dir="8100000" algn="bl" rotWithShape="0">
               <a:srgbClr val="000000">
                 <a:alpha val="10000"/>
               </a:srgbClr>
             </a:outerShdw>
           </a:effectLst>
         </p:spPr>
+        <p:txBody>
+          <a:bodyPr/>
+          <a:lstStyle/>
+          <a:p>
+            <a:endParaRPr lang="en-FR"/>
+          </a:p>
+        </p:txBody>
       </p:sp>
       <p:sp>
         <p:nvSpPr>
@@ -11099,6 +10406,13 @@
             <a:prstDash val="solid"/>
           </a:ln>
         </p:spPr>
+        <p:txBody>
+          <a:bodyPr/>
+          <a:lstStyle/>
+          <a:p>
+            <a:endParaRPr lang="en-FR"/>
+          </a:p>
+        </p:txBody>
       </p:sp>
       <p:sp>
         <p:nvSpPr>
@@ -11121,7 +10435,7 @@
           <a:bodyPr wrap="square" rtlCol="0" anchor="ctr"/>
           <a:lstStyle/>
           <a:p>
-            <a:pPr indent="0" marL="0">
+            <a:pPr marL="0" indent="0">
               <a:buNone/>
             </a:pPr>
             <a:r>
@@ -11141,15 +10455,15 @@
       </p:sp>
       <p:pic>
         <p:nvPicPr>
-          <p:cNvPr id="8" name="Image 0" descr="preencoded.png">    </p:cNvPr>
+          <p:cNvPr id="8" name="Image 0" descr="preencoded.png"/>
           <p:cNvPicPr>
             <a:picLocks noChangeAspect="1"/>
           </p:cNvPicPr>
           <p:nvPr/>
         </p:nvPicPr>
         <p:blipFill>
-          <a:blip r:embed="rId1"/>
-          <a:srcRect l="0" r="0" t="0" b="0"/>
+          <a:blip r:embed="rId3"/>
+          <a:srcRect/>
           <a:stretch/>
         </p:blipFill>
         <p:spPr>
@@ -11186,13 +10500,20 @@
             <a:prstDash val="solid"/>
           </a:ln>
           <a:effectLst>
-            <a:outerShdw sx="100000" sy="100000" kx="0" ky="0" algn="bl" rotWithShape="0" blurRad="38100" dist="25400" dir="8100000">
+            <a:outerShdw blurRad="38100" dist="25400" dir="8100000" algn="bl" rotWithShape="0">
               <a:srgbClr val="000000">
                 <a:alpha val="10000"/>
               </a:srgbClr>
             </a:outerShdw>
           </a:effectLst>
         </p:spPr>
+        <p:txBody>
+          <a:bodyPr/>
+          <a:lstStyle/>
+          <a:p>
+            <a:endParaRPr lang="en-FR"/>
+          </a:p>
+        </p:txBody>
       </p:sp>
       <p:sp>
         <p:nvSpPr>
@@ -11218,6 +10539,13 @@
             <a:prstDash val="solid"/>
           </a:ln>
         </p:spPr>
+        <p:txBody>
+          <a:bodyPr/>
+          <a:lstStyle/>
+          <a:p>
+            <a:endParaRPr lang="en-FR"/>
+          </a:p>
+        </p:txBody>
       </p:sp>
       <p:sp>
         <p:nvSpPr>
@@ -11240,7 +10568,7 @@
           <a:bodyPr wrap="square" rtlCol="0" anchor="ctr"/>
           <a:lstStyle/>
           <a:p>
-            <a:pPr indent="0" marL="0">
+            <a:pPr marL="0" indent="0">
               <a:buNone/>
             </a:pPr>
             <a:r>
@@ -11282,6 +10610,13 @@
             <a:prstDash val="solid"/>
           </a:ln>
         </p:spPr>
+        <p:txBody>
+          <a:bodyPr/>
+          <a:lstStyle/>
+          <a:p>
+            <a:endParaRPr lang="en-FR"/>
+          </a:p>
+        </p:txBody>
       </p:sp>
       <p:sp>
         <p:nvSpPr>
@@ -11304,7 +10639,7 @@
           <a:bodyPr wrap="square" rtlCol="0" anchor="ctr"/>
           <a:lstStyle/>
           <a:p>
-            <a:pPr algn="ctr" indent="0" marL="0">
+            <a:pPr marL="0" indent="0" algn="ctr">
               <a:buNone/>
             </a:pPr>
             <a:r>
@@ -11343,7 +10678,7 @@
           <a:bodyPr wrap="square" rtlCol="0" anchor="ctr"/>
           <a:lstStyle/>
           <a:p>
-            <a:pPr algn="ctr" indent="0" marL="0">
+            <a:pPr marL="0" indent="0" algn="ctr">
               <a:buNone/>
             </a:pPr>
             <a:r>
@@ -11385,13 +10720,20 @@
             <a:prstDash val="solid"/>
           </a:ln>
           <a:effectLst>
-            <a:outerShdw sx="100000" sy="100000" kx="0" ky="0" algn="bl" rotWithShape="0" blurRad="38100" dist="25400" dir="8100000">
+            <a:outerShdw blurRad="38100" dist="25400" dir="8100000" algn="bl" rotWithShape="0">
               <a:srgbClr val="000000">
                 <a:alpha val="10000"/>
               </a:srgbClr>
             </a:outerShdw>
           </a:effectLst>
         </p:spPr>
+        <p:txBody>
+          <a:bodyPr/>
+          <a:lstStyle/>
+          <a:p>
+            <a:endParaRPr lang="en-FR"/>
+          </a:p>
+        </p:txBody>
       </p:sp>
       <p:sp>
         <p:nvSpPr>
@@ -11414,7 +10756,7 @@
           <a:bodyPr wrap="square" rtlCol="0" anchor="ctr"/>
           <a:lstStyle/>
           <a:p>
-            <a:pPr indent="0" marL="0">
+            <a:pPr marL="0" indent="0">
               <a:buNone/>
             </a:pPr>
             <a:r>
@@ -11426,7 +10768,51 @@
                 <a:ea typeface="Arial" pitchFamily="34" charset="-122"/>
                 <a:cs typeface="Arial" pitchFamily="34" charset="-120"/>
               </a:rPr>
-              <a:t>Table de référence : 14 régions françaises. Clé primaire auto-incrémentée. Nécessaire pour la 3NF (élimination de la dépendance transitive nom_region dans commune).</a:t>
+              <a:t>Table de référence : 14 régions françaises. Clé </a:t>
+            </a:r>
+            <a:r>
+              <a:rPr lang="en-US" sz="850" dirty="0" err="1">
+                <a:solidFill>
+                  <a:srgbClr val="1C3838"/>
+                </a:solidFill>
+                <a:latin typeface="Arial" pitchFamily="34" charset="0"/>
+                <a:ea typeface="Arial" pitchFamily="34" charset="-122"/>
+                <a:cs typeface="Arial" pitchFamily="34" charset="-120"/>
+              </a:rPr>
+              <a:t>primaire</a:t>
+            </a:r>
+            <a:r>
+              <a:rPr lang="en-US" sz="850" dirty="0">
+                <a:solidFill>
+                  <a:srgbClr val="1C3838"/>
+                </a:solidFill>
+                <a:latin typeface="Arial" pitchFamily="34" charset="0"/>
+                <a:ea typeface="Arial" pitchFamily="34" charset="-122"/>
+                <a:cs typeface="Arial" pitchFamily="34" charset="-120"/>
+              </a:rPr>
+              <a:t> auto-</a:t>
+            </a:r>
+            <a:r>
+              <a:rPr lang="en-US" sz="850" dirty="0" err="1">
+                <a:solidFill>
+                  <a:srgbClr val="1C3838"/>
+                </a:solidFill>
+                <a:latin typeface="Arial" pitchFamily="34" charset="0"/>
+                <a:ea typeface="Arial" pitchFamily="34" charset="-122"/>
+                <a:cs typeface="Arial" pitchFamily="34" charset="-120"/>
+              </a:rPr>
+              <a:t>incrémentée</a:t>
+            </a:r>
+            <a:r>
+              <a:rPr lang="en-US" sz="850" dirty="0">
+                <a:solidFill>
+                  <a:srgbClr val="1C3838"/>
+                </a:solidFill>
+                <a:latin typeface="Arial" pitchFamily="34" charset="0"/>
+                <a:ea typeface="Arial" pitchFamily="34" charset="-122"/>
+                <a:cs typeface="Arial" pitchFamily="34" charset="-120"/>
+              </a:rPr>
+              <a:t>.</a:t>
             </a:r>
             <a:endParaRPr lang="en-US" sz="850" dirty="0"/>
           </a:p>
@@ -11448,6 +10834,7 @@
         <a:solidFill>
           <a:srgbClr val="EAF5F4"/>
         </a:solidFill>
+        <a:effectLst/>
       </p:bgPr>
     </p:bg>
     <p:spTree>
@@ -11488,6 +10875,13 @@
             <a:prstDash val="solid"/>
           </a:ln>
         </p:spPr>
+        <p:txBody>
+          <a:bodyPr/>
+          <a:lstStyle/>
+          <a:p>
+            <a:endParaRPr lang="en-FR"/>
+          </a:p>
+        </p:txBody>
       </p:sp>
       <p:sp>
         <p:nvSpPr>
@@ -11510,7 +10904,7 @@
           <a:bodyPr wrap="square" rtlCol="0" anchor="ctr"/>
           <a:lstStyle/>
           <a:p>
-            <a:pPr indent="0" marL="0">
+            <a:pPr marL="0" indent="0">
               <a:buNone/>
             </a:pPr>
             <a:r>
@@ -11550,6 +10944,13 @@
             <a:prstDash val="solid"/>
           </a:ln>
         </p:spPr>
+        <p:txBody>
+          <a:bodyPr/>
+          <a:lstStyle/>
+          <a:p>
+            <a:endParaRPr lang="en-FR"/>
+          </a:p>
+        </p:txBody>
       </p:sp>
       <p:sp>
         <p:nvSpPr>
@@ -11575,13 +10976,20 @@
             <a:prstDash val="solid"/>
           </a:ln>
           <a:effectLst>
-            <a:outerShdw sx="100000" sy="100000" kx="0" ky="0" algn="bl" rotWithShape="0" blurRad="38100" dist="25400" dir="8100000">
+            <a:outerShdw blurRad="38100" dist="25400" dir="8100000" algn="bl" rotWithShape="0">
               <a:srgbClr val="000000">
                 <a:alpha val="10000"/>
               </a:srgbClr>
             </a:outerShdw>
           </a:effectLst>
         </p:spPr>
+        <p:txBody>
+          <a:bodyPr/>
+          <a:lstStyle/>
+          <a:p>
+            <a:endParaRPr lang="en-FR"/>
+          </a:p>
+        </p:txBody>
       </p:sp>
       <p:sp>
         <p:nvSpPr>
@@ -11607,6 +11015,13 @@
             <a:prstDash val="solid"/>
           </a:ln>
         </p:spPr>
+        <p:txBody>
+          <a:bodyPr/>
+          <a:lstStyle/>
+          <a:p>
+            <a:endParaRPr lang="en-FR"/>
+          </a:p>
+        </p:txBody>
       </p:sp>
       <p:sp>
         <p:nvSpPr>
@@ -11629,7 +11044,7 @@
           <a:bodyPr wrap="square" rtlCol="0" anchor="ctr"/>
           <a:lstStyle/>
           <a:p>
-            <a:pPr indent="0" marL="0">
+            <a:pPr marL="0" indent="0">
               <a:buNone/>
             </a:pPr>
             <a:r>
@@ -11649,15 +11064,15 @@
       </p:sp>
       <p:pic>
         <p:nvPicPr>
-          <p:cNvPr id="8" name="Image 0" descr="preencoded.png">    </p:cNvPr>
+          <p:cNvPr id="8" name="Image 0" descr="preencoded.png"/>
           <p:cNvPicPr>
             <a:picLocks noChangeAspect="1"/>
           </p:cNvPicPr>
           <p:nvPr/>
         </p:nvPicPr>
         <p:blipFill>
-          <a:blip r:embed="rId1"/>
-          <a:srcRect l="0" r="0" t="0" b="0"/>
+          <a:blip r:embed="rId3"/>
+          <a:srcRect/>
           <a:stretch/>
         </p:blipFill>
         <p:spPr>
@@ -11694,13 +11109,20 @@
             <a:prstDash val="solid"/>
           </a:ln>
           <a:effectLst>
-            <a:outerShdw sx="100000" sy="100000" kx="0" ky="0" algn="bl" rotWithShape="0" blurRad="38100" dist="25400" dir="8100000">
+            <a:outerShdw blurRad="38100" dist="25400" dir="8100000" algn="bl" rotWithShape="0">
               <a:srgbClr val="000000">
                 <a:alpha val="10000"/>
               </a:srgbClr>
             </a:outerShdw>
           </a:effectLst>
         </p:spPr>
+        <p:txBody>
+          <a:bodyPr/>
+          <a:lstStyle/>
+          <a:p>
+            <a:endParaRPr lang="en-FR"/>
+          </a:p>
+        </p:txBody>
       </p:sp>
       <p:sp>
         <p:nvSpPr>
@@ -11726,6 +11148,13 @@
             <a:prstDash val="solid"/>
           </a:ln>
         </p:spPr>
+        <p:txBody>
+          <a:bodyPr/>
+          <a:lstStyle/>
+          <a:p>
+            <a:endParaRPr lang="en-FR"/>
+          </a:p>
+        </p:txBody>
       </p:sp>
       <p:sp>
         <p:nvSpPr>
@@ -11748,7 +11177,7 @@
           <a:bodyPr wrap="square" rtlCol="0" anchor="ctr"/>
           <a:lstStyle/>
           <a:p>
-            <a:pPr indent="0" marL="0">
+            <a:pPr marL="0" indent="0">
               <a:buNone/>
             </a:pPr>
             <a:r>
@@ -11790,6 +11219,13 @@
             <a:prstDash val="solid"/>
           </a:ln>
         </p:spPr>
+        <p:txBody>
+          <a:bodyPr/>
+          <a:lstStyle/>
+          <a:p>
+            <a:endParaRPr lang="en-FR"/>
+          </a:p>
+        </p:txBody>
       </p:sp>
       <p:sp>
         <p:nvSpPr>
@@ -11812,7 +11248,7 @@
           <a:bodyPr wrap="square" rtlCol="0" anchor="ctr"/>
           <a:lstStyle/>
           <a:p>
-            <a:pPr algn="ctr" indent="0" marL="0">
+            <a:pPr marL="0" indent="0" algn="ctr">
               <a:buNone/>
             </a:pPr>
             <a:r>
@@ -11851,7 +11287,7 @@
           <a:bodyPr wrap="square" rtlCol="0" anchor="ctr"/>
           <a:lstStyle/>
           <a:p>
-            <a:pPr algn="ctr" indent="0" marL="0">
+            <a:pPr marL="0" indent="0" algn="ctr">
               <a:buNone/>
             </a:pPr>
             <a:r>
@@ -11893,13 +11329,20 @@
             <a:prstDash val="solid"/>
           </a:ln>
           <a:effectLst>
-            <a:outerShdw sx="100000" sy="100000" kx="0" ky="0" algn="bl" rotWithShape="0" blurRad="38100" dist="25400" dir="8100000">
+            <a:outerShdw blurRad="38100" dist="25400" dir="8100000" algn="bl" rotWithShape="0">
               <a:srgbClr val="000000">
                 <a:alpha val="10000"/>
               </a:srgbClr>
             </a:outerShdw>
           </a:effectLst>
         </p:spPr>
+        <p:txBody>
+          <a:bodyPr/>
+          <a:lstStyle/>
+          <a:p>
+            <a:endParaRPr lang="en-FR"/>
+          </a:p>
+        </p:txBody>
       </p:sp>
       <p:sp>
         <p:nvSpPr>
@@ -11922,7 +11365,7 @@
           <a:bodyPr wrap="square" rtlCol="0" anchor="ctr"/>
           <a:lstStyle/>
           <a:p>
-            <a:pPr indent="0" marL="0">
+            <a:pPr marL="0" indent="0">
               <a:buNone/>
             </a:pPr>
             <a:r>
@@ -11956,6 +11399,7 @@
         <a:solidFill>
           <a:srgbClr val="EAF5F4"/>
         </a:solidFill>
+        <a:effectLst/>
       </p:bgPr>
     </p:bg>
     <p:spTree>
@@ -11996,6 +11440,13 @@
             <a:prstDash val="solid"/>
           </a:ln>
         </p:spPr>
+        <p:txBody>
+          <a:bodyPr/>
+          <a:lstStyle/>
+          <a:p>
+            <a:endParaRPr lang="en-FR"/>
+          </a:p>
+        </p:txBody>
       </p:sp>
       <p:sp>
         <p:nvSpPr>
@@ -12018,7 +11469,7 @@
           <a:bodyPr wrap="square" rtlCol="0" anchor="ctr"/>
           <a:lstStyle/>
           <a:p>
-            <a:pPr indent="0" marL="0">
+            <a:pPr marL="0" indent="0">
               <a:buNone/>
             </a:pPr>
             <a:r>
@@ -12058,6 +11509,13 @@
             <a:prstDash val="solid"/>
           </a:ln>
         </p:spPr>
+        <p:txBody>
+          <a:bodyPr/>
+          <a:lstStyle/>
+          <a:p>
+            <a:endParaRPr lang="en-FR"/>
+          </a:p>
+        </p:txBody>
       </p:sp>
       <p:sp>
         <p:nvSpPr>
@@ -12083,13 +11541,20 @@
             <a:prstDash val="solid"/>
           </a:ln>
           <a:effectLst>
-            <a:outerShdw sx="100000" sy="100000" kx="0" ky="0" algn="bl" rotWithShape="0" blurRad="38100" dist="25400" dir="8100000">
+            <a:outerShdw blurRad="38100" dist="25400" dir="8100000" algn="bl" rotWithShape="0">
               <a:srgbClr val="000000">
                 <a:alpha val="10000"/>
               </a:srgbClr>
             </a:outerShdw>
           </a:effectLst>
         </p:spPr>
+        <p:txBody>
+          <a:bodyPr/>
+          <a:lstStyle/>
+          <a:p>
+            <a:endParaRPr lang="en-FR"/>
+          </a:p>
+        </p:txBody>
       </p:sp>
       <p:sp>
         <p:nvSpPr>
@@ -12115,6 +11580,13 @@
             <a:prstDash val="solid"/>
           </a:ln>
         </p:spPr>
+        <p:txBody>
+          <a:bodyPr/>
+          <a:lstStyle/>
+          <a:p>
+            <a:endParaRPr lang="en-FR"/>
+          </a:p>
+        </p:txBody>
       </p:sp>
       <p:sp>
         <p:nvSpPr>
@@ -12137,7 +11609,7 @@
           <a:bodyPr wrap="square" rtlCol="0" anchor="ctr"/>
           <a:lstStyle/>
           <a:p>
-            <a:pPr indent="0" marL="0">
+            <a:pPr marL="0" indent="0">
               <a:buNone/>
             </a:pPr>
             <a:r>
@@ -12157,15 +11629,15 @@
       </p:sp>
       <p:pic>
         <p:nvPicPr>
-          <p:cNvPr id="8" name="Image 0" descr="preencoded.png">    </p:cNvPr>
+          <p:cNvPr id="8" name="Image 0" descr="preencoded.png"/>
           <p:cNvPicPr>
             <a:picLocks noChangeAspect="1"/>
           </p:cNvPicPr>
           <p:nvPr/>
         </p:nvPicPr>
         <p:blipFill>
-          <a:blip r:embed="rId1"/>
-          <a:srcRect l="0" r="0" t="0" b="0"/>
+          <a:blip r:embed="rId3"/>
+          <a:srcRect/>
           <a:stretch/>
         </p:blipFill>
         <p:spPr>
@@ -12202,13 +11674,20 @@
             <a:prstDash val="solid"/>
           </a:ln>
           <a:effectLst>
-            <a:outerShdw sx="100000" sy="100000" kx="0" ky="0" algn="bl" rotWithShape="0" blurRad="38100" dist="25400" dir="8100000">
+            <a:outerShdw blurRad="38100" dist="25400" dir="8100000" algn="bl" rotWithShape="0">
               <a:srgbClr val="000000">
                 <a:alpha val="10000"/>
               </a:srgbClr>
             </a:outerShdw>
           </a:effectLst>
         </p:spPr>
+        <p:txBody>
+          <a:bodyPr/>
+          <a:lstStyle/>
+          <a:p>
+            <a:endParaRPr lang="en-FR"/>
+          </a:p>
+        </p:txBody>
       </p:sp>
       <p:sp>
         <p:nvSpPr>
@@ -12234,6 +11713,13 @@
             <a:prstDash val="solid"/>
           </a:ln>
         </p:spPr>
+        <p:txBody>
+          <a:bodyPr/>
+          <a:lstStyle/>
+          <a:p>
+            <a:endParaRPr lang="en-FR"/>
+          </a:p>
+        </p:txBody>
       </p:sp>
       <p:sp>
         <p:nvSpPr>
@@ -12256,7 +11742,7 @@
           <a:bodyPr wrap="square" rtlCol="0" anchor="ctr"/>
           <a:lstStyle/>
           <a:p>
-            <a:pPr indent="0" marL="0">
+            <a:pPr marL="0" indent="0">
               <a:buNone/>
             </a:pPr>
             <a:r>
@@ -12298,6 +11784,13 @@
             <a:prstDash val="solid"/>
           </a:ln>
         </p:spPr>
+        <p:txBody>
+          <a:bodyPr/>
+          <a:lstStyle/>
+          <a:p>
+            <a:endParaRPr lang="en-FR"/>
+          </a:p>
+        </p:txBody>
       </p:sp>
       <p:sp>
         <p:nvSpPr>
@@ -12320,7 +11813,7 @@
           <a:bodyPr wrap="square" rtlCol="0" anchor="ctr"/>
           <a:lstStyle/>
           <a:p>
-            <a:pPr algn="ctr" indent="0" marL="0">
+            <a:pPr marL="0" indent="0" algn="ctr">
               <a:buNone/>
             </a:pPr>
             <a:r>
@@ -12359,7 +11852,7 @@
           <a:bodyPr wrap="square" rtlCol="0" anchor="ctr"/>
           <a:lstStyle/>
           <a:p>
-            <a:pPr algn="ctr" indent="0" marL="0">
+            <a:pPr marL="0" indent="0" algn="ctr">
               <a:buNone/>
             </a:pPr>
             <a:r>
@@ -12401,13 +11894,20 @@
             <a:prstDash val="solid"/>
           </a:ln>
           <a:effectLst>
-            <a:outerShdw sx="100000" sy="100000" kx="0" ky="0" algn="bl" rotWithShape="0" blurRad="38100" dist="25400" dir="8100000">
+            <a:outerShdw blurRad="38100" dist="25400" dir="8100000" algn="bl" rotWithShape="0">
               <a:srgbClr val="000000">
                 <a:alpha val="10000"/>
               </a:srgbClr>
             </a:outerShdw>
           </a:effectLst>
         </p:spPr>
+        <p:txBody>
+          <a:bodyPr/>
+          <a:lstStyle/>
+          <a:p>
+            <a:endParaRPr lang="en-FR"/>
+          </a:p>
+        </p:txBody>
       </p:sp>
       <p:sp>
         <p:nvSpPr>
@@ -12430,7 +11930,7 @@
           <a:bodyPr wrap="square" rtlCol="0" anchor="ctr"/>
           <a:lstStyle/>
           <a:p>
-            <a:pPr indent="0" marL="0">
+            <a:pPr marL="0" indent="0">
               <a:buNone/>
             </a:pPr>
             <a:r>
@@ -12749,4 +12249,319 @@
     </a:ext>
   </a:extLst>
 </a:theme>
+</file>
+
+<file path=ppt/theme/theme2.xml><?xml version="1.0" encoding="utf-8"?>
+<a:theme xmlns:a="http://schemas.openxmlformats.org/drawingml/2006/main" name="Office Theme">
+  <a:themeElements>
+    <a:clrScheme name="Office">
+      <a:dk1>
+        <a:sysClr val="windowText" lastClr="000000"/>
+      </a:dk1>
+      <a:lt1>
+        <a:sysClr val="window" lastClr="FFFFFF"/>
+      </a:lt1>
+      <a:dk2>
+        <a:srgbClr val="0E2841"/>
+      </a:dk2>
+      <a:lt2>
+        <a:srgbClr val="E8E8E8"/>
+      </a:lt2>
+      <a:accent1>
+        <a:srgbClr val="156082"/>
+      </a:accent1>
+      <a:accent2>
+        <a:srgbClr val="E97132"/>
+      </a:accent2>
+      <a:accent3>
+        <a:srgbClr val="196B24"/>
+      </a:accent3>
+      <a:accent4>
+        <a:srgbClr val="0F9ED5"/>
+      </a:accent4>
+      <a:accent5>
+        <a:srgbClr val="A02B93"/>
+      </a:accent5>
+      <a:accent6>
+        <a:srgbClr val="4EA72E"/>
+      </a:accent6>
+      <a:hlink>
+        <a:srgbClr val="467886"/>
+      </a:hlink>
+      <a:folHlink>
+        <a:srgbClr val="96607D"/>
+      </a:folHlink>
+    </a:clrScheme>
+    <a:fontScheme name="Office">
+      <a:majorFont>
+        <a:latin typeface="Aptos Display" panose="02110004020202020204"/>
+        <a:ea typeface=""/>
+        <a:cs typeface=""/>
+        <a:font script="Jpan" typeface="游ゴシック Light"/>
+        <a:font script="Hang" typeface="맑은 고딕"/>
+        <a:font script="Hans" typeface="等线 Light"/>
+        <a:font script="Hant" typeface="新細明體"/>
+        <a:font script="Arab" typeface="Times New Roman"/>
+        <a:font script="Hebr" typeface="Times New Roman"/>
+        <a:font script="Thai" typeface="Angsana New"/>
+        <a:font script="Ethi" typeface="Nyala"/>
+        <a:font script="Beng" typeface="Vrinda"/>
+        <a:font script="Gujr" typeface="Shruti"/>
+        <a:font script="Khmr" typeface="MoolBoran"/>
+        <a:font script="Knda" typeface="Tunga"/>
+        <a:font script="Guru" typeface="Raavi"/>
+        <a:font script="Cans" typeface="Euphemia"/>
+        <a:font script="Cher" typeface="Plantagenet Cherokee"/>
+        <a:font script="Yiii" typeface="Microsoft Yi Baiti"/>
+        <a:font script="Tibt" typeface="Microsoft Himalaya"/>
+        <a:font script="Thaa" typeface="MV Boli"/>
+        <a:font script="Deva" typeface="Mangal"/>
+        <a:font script="Telu" typeface="Gautami"/>
+        <a:font script="Taml" typeface="Latha"/>
+        <a:font script="Syrc" typeface="Estrangelo Edessa"/>
+        <a:font script="Orya" typeface="Kalinga"/>
+        <a:font script="Mlym" typeface="Kartika"/>
+        <a:font script="Laoo" typeface="DokChampa"/>
+        <a:font script="Sinh" typeface="Iskoola Pota"/>
+        <a:font script="Mong" typeface="Mongolian Baiti"/>
+        <a:font script="Viet" typeface="Times New Roman"/>
+        <a:font script="Uigh" typeface="Microsoft Uighur"/>
+        <a:font script="Geor" typeface="Sylfaen"/>
+        <a:font script="Armn" typeface="Arial"/>
+        <a:font script="Bugi" typeface="Leelawadee UI"/>
+        <a:font script="Bopo" typeface="Microsoft JhengHei"/>
+        <a:font script="Java" typeface="Javanese Text"/>
+        <a:font script="Lisu" typeface="Segoe UI"/>
+        <a:font script="Mymr" typeface="Myanmar Text"/>
+        <a:font script="Nkoo" typeface="Ebrima"/>
+        <a:font script="Olck" typeface="Nirmala UI"/>
+        <a:font script="Osma" typeface="Ebrima"/>
+        <a:font script="Phag" typeface="Phagspa"/>
+        <a:font script="Syrn" typeface="Estrangelo Edessa"/>
+        <a:font script="Syrj" typeface="Estrangelo Edessa"/>
+        <a:font script="Syre" typeface="Estrangelo Edessa"/>
+        <a:font script="Sora" typeface="Nirmala UI"/>
+        <a:font script="Tale" typeface="Microsoft Tai Le"/>
+        <a:font script="Talu" typeface="Microsoft New Tai Lue"/>
+        <a:font script="Tfng" typeface="Ebrima"/>
+      </a:majorFont>
+      <a:minorFont>
+        <a:latin typeface="Aptos" panose="02110004020202020204"/>
+        <a:ea typeface=""/>
+        <a:cs typeface=""/>
+        <a:font script="Jpan" typeface="游ゴシック"/>
+        <a:font script="Hang" typeface="맑은 고딕"/>
+        <a:font script="Hans" typeface="等线"/>
+        <a:font script="Hant" typeface="新細明體"/>
+        <a:font script="Arab" typeface="Arial"/>
+        <a:font script="Hebr" typeface="Arial"/>
+        <a:font script="Thai" typeface="Cordia New"/>
+        <a:font script="Ethi" typeface="Nyala"/>
+        <a:font script="Beng" typeface="Vrinda"/>
+        <a:font script="Gujr" typeface="Shruti"/>
+        <a:font script="Khmr" typeface="DaunPenh"/>
+        <a:font script="Knda" typeface="Tunga"/>
+        <a:font script="Guru" typeface="Raavi"/>
+        <a:font script="Cans" typeface="Euphemia"/>
+        <a:font script="Cher" typeface="Plantagenet Cherokee"/>
+        <a:font script="Yiii" typeface="Microsoft Yi Baiti"/>
+        <a:font script="Tibt" typeface="Microsoft Himalaya"/>
+        <a:font script="Thaa" typeface="MV Boli"/>
+        <a:font script="Deva" typeface="Mangal"/>
+        <a:font script="Telu" typeface="Gautami"/>
+        <a:font script="Taml" typeface="Latha"/>
+        <a:font script="Syrc" typeface="Estrangelo Edessa"/>
+        <a:font script="Orya" typeface="Kalinga"/>
+        <a:font script="Mlym" typeface="Kartika"/>
+        <a:font script="Laoo" typeface="DokChampa"/>
+        <a:font script="Sinh" typeface="Iskoola Pota"/>
+        <a:font script="Mong" typeface="Mongolian Baiti"/>
+        <a:font script="Viet" typeface="Arial"/>
+        <a:font script="Uigh" typeface="Microsoft Uighur"/>
+        <a:font script="Geor" typeface="Sylfaen"/>
+        <a:font script="Armn" typeface="Arial"/>
+        <a:font script="Bugi" typeface="Leelawadee UI"/>
+        <a:font script="Bopo" typeface="Microsoft JhengHei"/>
+        <a:font script="Java" typeface="Javanese Text"/>
+        <a:font script="Lisu" typeface="Segoe UI"/>
+        <a:font script="Mymr" typeface="Myanmar Text"/>
+        <a:font script="Nkoo" typeface="Ebrima"/>
+        <a:font script="Olck" typeface="Nirmala UI"/>
+        <a:font script="Osma" typeface="Ebrima"/>
+        <a:font script="Phag" typeface="Phagspa"/>
+        <a:font script="Syrn" typeface="Estrangelo Edessa"/>
+        <a:font script="Syrj" typeface="Estrangelo Edessa"/>
+        <a:font script="Syre" typeface="Estrangelo Edessa"/>
+        <a:font script="Sora" typeface="Nirmala UI"/>
+        <a:font script="Tale" typeface="Microsoft Tai Le"/>
+        <a:font script="Talu" typeface="Microsoft New Tai Lue"/>
+        <a:font script="Tfng" typeface="Ebrima"/>
+      </a:minorFont>
+    </a:fontScheme>
+    <a:fmtScheme name="Office">
+      <a:fillStyleLst>
+        <a:solidFill>
+          <a:schemeClr val="phClr"/>
+        </a:solidFill>
+        <a:gradFill rotWithShape="1">
+          <a:gsLst>
+            <a:gs pos="0">
+              <a:schemeClr val="phClr">
+                <a:lumMod val="110000"/>
+                <a:satMod val="105000"/>
+                <a:tint val="67000"/>
+              </a:schemeClr>
+            </a:gs>
+            <a:gs pos="50000">
+              <a:schemeClr val="phClr">
+                <a:lumMod val="105000"/>
+                <a:satMod val="103000"/>
+                <a:tint val="73000"/>
+              </a:schemeClr>
+            </a:gs>
+            <a:gs pos="100000">
+              <a:schemeClr val="phClr">
+                <a:lumMod val="105000"/>
+                <a:satMod val="109000"/>
+                <a:tint val="81000"/>
+              </a:schemeClr>
+            </a:gs>
+          </a:gsLst>
+          <a:lin ang="5400000" scaled="0"/>
+        </a:gradFill>
+        <a:gradFill rotWithShape="1">
+          <a:gsLst>
+            <a:gs pos="0">
+              <a:schemeClr val="phClr">
+                <a:satMod val="103000"/>
+                <a:lumMod val="102000"/>
+                <a:tint val="94000"/>
+              </a:schemeClr>
+            </a:gs>
+            <a:gs pos="50000">
+              <a:schemeClr val="phClr">
+                <a:satMod val="110000"/>
+                <a:lumMod val="100000"/>
+                <a:shade val="100000"/>
+              </a:schemeClr>
+            </a:gs>
+            <a:gs pos="100000">
+              <a:schemeClr val="phClr">
+                <a:lumMod val="99000"/>
+                <a:satMod val="120000"/>
+                <a:shade val="78000"/>
+              </a:schemeClr>
+            </a:gs>
+          </a:gsLst>
+          <a:lin ang="5400000" scaled="0"/>
+        </a:gradFill>
+      </a:fillStyleLst>
+      <a:lnStyleLst>
+        <a:ln w="12700" cap="flat" cmpd="sng" algn="ctr">
+          <a:solidFill>
+            <a:schemeClr val="phClr"/>
+          </a:solidFill>
+          <a:prstDash val="solid"/>
+          <a:miter lim="800000"/>
+        </a:ln>
+        <a:ln w="19050" cap="flat" cmpd="sng" algn="ctr">
+          <a:solidFill>
+            <a:schemeClr val="phClr"/>
+          </a:solidFill>
+          <a:prstDash val="solid"/>
+          <a:miter lim="800000"/>
+        </a:ln>
+        <a:ln w="25400" cap="flat" cmpd="sng" algn="ctr">
+          <a:solidFill>
+            <a:schemeClr val="phClr"/>
+          </a:solidFill>
+          <a:prstDash val="solid"/>
+          <a:miter lim="800000"/>
+        </a:ln>
+      </a:lnStyleLst>
+      <a:effectStyleLst>
+        <a:effectStyle>
+          <a:effectLst/>
+        </a:effectStyle>
+        <a:effectStyle>
+          <a:effectLst/>
+        </a:effectStyle>
+        <a:effectStyle>
+          <a:effectLst>
+            <a:outerShdw blurRad="57150" dist="19050" dir="5400000" algn="ctr" rotWithShape="0">
+              <a:srgbClr val="000000">
+                <a:alpha val="63000"/>
+              </a:srgbClr>
+            </a:outerShdw>
+          </a:effectLst>
+        </a:effectStyle>
+      </a:effectStyleLst>
+      <a:bgFillStyleLst>
+        <a:solidFill>
+          <a:schemeClr val="phClr"/>
+        </a:solidFill>
+        <a:solidFill>
+          <a:schemeClr val="phClr">
+            <a:tint val="95000"/>
+            <a:satMod val="170000"/>
+          </a:schemeClr>
+        </a:solidFill>
+        <a:gradFill rotWithShape="1">
+          <a:gsLst>
+            <a:gs pos="0">
+              <a:schemeClr val="phClr">
+                <a:tint val="93000"/>
+                <a:satMod val="150000"/>
+                <a:shade val="98000"/>
+                <a:lumMod val="102000"/>
+              </a:schemeClr>
+            </a:gs>
+            <a:gs pos="50000">
+              <a:schemeClr val="phClr">
+                <a:tint val="98000"/>
+                <a:satMod val="130000"/>
+                <a:shade val="90000"/>
+                <a:lumMod val="103000"/>
+              </a:schemeClr>
+            </a:gs>
+            <a:gs pos="100000">
+              <a:schemeClr val="phClr">
+                <a:shade val="63000"/>
+                <a:satMod val="120000"/>
+              </a:schemeClr>
+            </a:gs>
+          </a:gsLst>
+          <a:lin ang="5400000" scaled="0"/>
+        </a:gradFill>
+      </a:bgFillStyleLst>
+    </a:fmtScheme>
+  </a:themeElements>
+  <a:objectDefaults>
+    <a:lnDef>
+      <a:spPr/>
+      <a:bodyPr/>
+      <a:lstStyle/>
+      <a:style>
+        <a:lnRef idx="2">
+          <a:schemeClr val="accent1"/>
+        </a:lnRef>
+        <a:fillRef idx="0">
+          <a:schemeClr val="accent1"/>
+        </a:fillRef>
+        <a:effectRef idx="1">
+          <a:schemeClr val="accent1"/>
+        </a:effectRef>
+        <a:fontRef idx="minor">
+          <a:schemeClr val="tx1"/>
+        </a:fontRef>
+      </a:style>
+    </a:lnDef>
+  </a:objectDefaults>
+  <a:extraClrSchemeLst/>
+  <a:extLst>
+    <a:ext uri="{05A4C25C-085E-4340-85A3-A5531E510DB2}">
+      <thm15:themeFamily xmlns:thm15="http://schemas.microsoft.com/office/thememl/2012/main" name="Office Theme" id="{2E142A2C-CD16-42D6-873A-C26D2A0506FA}" vid="{1BDDFF52-6CD6-40A5-AB3C-68EB2F1E4D0A}"/>
+    </a:ext>
+  </a:extLst>
+</a:theme>
 </file>